--- a/2026/2026-09-18-AI-News.pptx
+++ b/2026/2026-09-18-AI-News.pptx
@@ -5,7 +5,7 @@
     <p:sldMasterId id="2147483659" r:id="rId1"/>
   </p:sldMasterIdLst>
   <p:notesMasterIdLst>
-    <p:notesMasterId r:id="rId29"/>
+    <p:notesMasterId r:id="rId32"/>
   </p:notesMasterIdLst>
   <p:sldIdLst>
     <p:sldId id="256" r:id="rId2"/>
@@ -35,16 +35,19 @@
     <p:sldId id="280" r:id="rId26"/>
     <p:sldId id="281" r:id="rId27"/>
     <p:sldId id="282" r:id="rId28"/>
+    <p:sldId id="283" r:id="rId29"/>
+    <p:sldId id="284" r:id="rId30"/>
+    <p:sldId id="285" r:id="rId31"/>
   </p:sldIdLst>
   <p:sldSz cx="9144000" cy="5143500" type="screen16x9"/>
   <p:notesSz cx="6858000" cy="9144000"/>
   <p:embeddedFontLst>
     <p:embeddedFont>
       <p:font typeface="Roboto Mono" pitchFamily="49" charset="0"/>
-      <p:regular r:id="rId30"/>
-      <p:bold r:id="rId31"/>
-      <p:italic r:id="rId32"/>
-      <p:boldItalic r:id="rId33"/>
+      <p:regular r:id="rId33"/>
+      <p:bold r:id="rId34"/>
+      <p:italic r:id="rId35"/>
+      <p:boldItalic r:id="rId36"/>
     </p:embeddedFont>
   </p:embeddedFontLst>
   <p:defaultTextStyle>
@@ -1410,6 +1413,246 @@
             </a:r>
             <a:endParaRPr/>
           </a:p>
+          <a:p>
+            <a:pPr marL="0" lvl="0" indent="0" algn="l" rtl="0">
+              <a:spcBef>
+                <a:spcPts val="0"/>
+              </a:spcBef>
+              <a:spcAft>
+                <a:spcPts val="0"/>
+              </a:spcAft>
+              <a:buNone/>
+            </a:pPr>
+            <a:r>
+              <a:rPr lang="en"/>
+              <a:t>Claude Cowork folds into Claude, with Docs, Slides and Design =&gt; Claude Adds Docs, Slides, Design</a:t>
+            </a:r>
+            <a:endParaRPr/>
+          </a:p>
+          <a:p>
+            <a:pPr marL="0" lvl="0" indent="0" algn="l" rtl="0">
+              <a:spcBef>
+                <a:spcPts val="0"/>
+              </a:spcBef>
+              <a:spcAft>
+                <a:spcPts val="0"/>
+              </a:spcAft>
+              <a:buNone/>
+            </a:pPr>
+            <a:r>
+              <a:rPr lang="en"/>
+              <a:t>Apple ships Siri AI in iOS 27, built with Google's Gemini =&gt; Apple Siri AI Runs on Gemini</a:t>
+            </a:r>
+            <a:endParaRPr/>
+          </a:p>
+          <a:p>
+            <a:pPr marL="0" lvl="0" indent="0" algn="l" rtl="0">
+              <a:spcBef>
+                <a:spcPts val="0"/>
+              </a:spcBef>
+              <a:spcAft>
+                <a:spcPts val="0"/>
+              </a:spcAft>
+              <a:buNone/>
+            </a:pPr>
+            <a:r>
+              <a:rPr lang="en"/>
+              <a:t>SoftBank borrows $11.9 billion to keep funding OpenAI =&gt; SoftBank Lends $11.9 Bln to OpenAI</a:t>
+            </a:r>
+            <a:endParaRPr/>
+          </a:p>
+          <a:p>
+            <a:pPr marL="0" lvl="0" indent="0" algn="l" rtl="0">
+              <a:spcBef>
+                <a:spcPts val="0"/>
+              </a:spcBef>
+              <a:spcAft>
+                <a:spcPts val="0"/>
+              </a:spcAft>
+              <a:buNone/>
+            </a:pPr>
+            <a:r>
+              <a:rPr lang="en"/>
+              <a:t>Recursive raises $4.65 billion to automate AI research =&gt; Recursive Raises $4.65 Bln</a:t>
+            </a:r>
+            <a:endParaRPr/>
+          </a:p>
+          <a:p>
+            <a:pPr marL="0" lvl="0" indent="0" algn="l" rtl="0">
+              <a:spcBef>
+                <a:spcPts val="0"/>
+              </a:spcBef>
+              <a:spcAft>
+                <a:spcPts val="0"/>
+              </a:spcAft>
+              <a:buNone/>
+            </a:pPr>
+            <a:r>
+              <a:rPr lang="en"/>
+              <a:t>AIUC raises $40 million to insure AI agents =&gt; AIUC Insures AI Agents</a:t>
+            </a:r>
+            <a:endParaRPr/>
+          </a:p>
+          <a:p>
+            <a:pPr marL="0" lvl="0" indent="0" algn="l" rtl="0">
+              <a:spcBef>
+                <a:spcPts val="0"/>
+              </a:spcBef>
+              <a:spcAft>
+                <a:spcPts val="0"/>
+              </a:spcAft>
+              <a:buNone/>
+            </a:pPr>
+            <a:r>
+              <a:rPr lang="en"/>
+              <a:t>Databricks gives Astra to 3,500 engineers, spend up 60% =&gt; Databricks: Astra Spend Up 60%</a:t>
+            </a:r>
+            <a:endParaRPr/>
+          </a:p>
+          <a:p>
+            <a:pPr marL="0" lvl="0" indent="0" algn="l" rtl="0">
+              <a:spcBef>
+                <a:spcPts val="0"/>
+              </a:spcBef>
+              <a:spcAft>
+                <a:spcPts val="0"/>
+              </a:spcAft>
+              <a:buNone/>
+            </a:pPr>
+            <a:r>
+              <a:rPr lang="en"/>
+              <a:t>Models are cheating on their evaluations =&gt; Models Cheat on Evaluations</a:t>
+            </a:r>
+            <a:endParaRPr/>
+          </a:p>
+          <a:p>
+            <a:pPr marL="0" lvl="0" indent="0" algn="l" rtl="0">
+              <a:spcBef>
+                <a:spcPts val="0"/>
+              </a:spcBef>
+              <a:spcAft>
+                <a:spcPts val="0"/>
+              </a:spcAft>
+              <a:buNone/>
+            </a:pPr>
+            <a:r>
+              <a:rPr lang="en"/>
+              <a:t>A fruit fly connectome walks a robot =&gt; Fruit Fly Brain Walks a Robot</a:t>
+            </a:r>
+            <a:endParaRPr/>
+          </a:p>
+          <a:p>
+            <a:pPr marL="0" lvl="0" indent="0" algn="l" rtl="0">
+              <a:spcBef>
+                <a:spcPts val="0"/>
+              </a:spcBef>
+              <a:spcAft>
+                <a:spcPts val="0"/>
+              </a:spcAft>
+              <a:buNone/>
+            </a:pPr>
+            <a:r>
+              <a:rPr lang="en"/>
+              <a:t>SoftBank borrows $11.9 billion to keep funding OpenAI =&gt; SoftBank Borrows $11.9 Bln for OpenAI</a:t>
+            </a:r>
+            <a:endParaRPr/>
+          </a:p>
+          <a:p>
+            <a:pPr marL="0" lvl="0" indent="0" algn="l" rtl="0">
+              <a:spcBef>
+                <a:spcPts val="0"/>
+              </a:spcBef>
+              <a:spcAft>
+                <a:spcPts val="0"/>
+              </a:spcAft>
+              <a:buNone/>
+            </a:pPr>
+            <a:r>
+              <a:rPr lang="en"/>
+              <a:t>Claude Code Projects keeps agents coding in the cloud while you're offline =&gt; Claude Code Projects in the Cloud</a:t>
+            </a:r>
+            <a:endParaRPr/>
+          </a:p>
+          <a:p>
+            <a:pPr marL="0" lvl="0" indent="0" algn="l" rtl="0">
+              <a:spcBef>
+                <a:spcPts val="0"/>
+              </a:spcBef>
+              <a:spcAft>
+                <a:spcPts val="0"/>
+              </a:spcAft>
+              <a:buNone/>
+            </a:pPr>
+            <a:r>
+              <a:rPr lang="en"/>
+              <a:t>OpenAI publishes its log of misbehaving models =&gt; OpenAI Log of Misbehaving Models</a:t>
+            </a:r>
+            <a:endParaRPr/>
+          </a:p>
+          <a:p>
+            <a:pPr marL="0" lvl="0" indent="0" algn="l" rtl="0">
+              <a:spcBef>
+                <a:spcPts val="0"/>
+              </a:spcBef>
+              <a:spcAft>
+                <a:spcPts val="0"/>
+              </a:spcAft>
+              <a:buNone/>
+            </a:pPr>
+            <a:r>
+              <a:rPr lang="en"/>
+              <a:t>ChatGPT ads now open a chat with the brand's own agent =&gt; ChatGPT Sponsored Agents</a:t>
+            </a:r>
+            <a:endParaRPr/>
+          </a:p>
+          <a:p>
+            <a:pPr marL="0" lvl="0" indent="0" algn="l" rtl="0">
+              <a:spcBef>
+                <a:spcPts val="0"/>
+              </a:spcBef>
+              <a:spcAft>
+                <a:spcPts val="0"/>
+              </a:spcAft>
+              <a:buNone/>
+            </a:pPr>
+            <a:r>
+              <a:rPr lang="en"/>
+              <a:t>Sakana's Fugu models route work across cheaper open models =&gt; Sakana Fugu Model Routing</a:t>
+            </a:r>
+            <a:endParaRPr/>
+          </a:p>
+          <a:p>
+            <a:pPr marL="0" lvl="0" indent="0" algn="l" rtl="0">
+              <a:spcBef>
+                <a:spcPts val="0"/>
+              </a:spcBef>
+              <a:spcAft>
+                <a:spcPts val="0"/>
+              </a:spcAft>
+              <a:buNone/>
+            </a:pPr>
+            <a:r>
+              <a:rPr lang="en"/>
+              <a:t>Snap launches Specs AR glasses at $2,195 =&gt; Snap Specs AR Glasses</a:t>
+            </a:r>
+            <a:endParaRPr/>
+          </a:p>
+          <a:p>
+            <a:pPr marL="0" lvl="0" indent="0" algn="l" rtl="0">
+              <a:spcBef>
+                <a:spcPts val="0"/>
+              </a:spcBef>
+              <a:spcAft>
+                <a:spcPts val="0"/>
+              </a:spcAft>
+              <a:buNone/>
+            </a:pPr>
+            <a:r>
+              <a:rPr lang="en"/>
+              <a:t>Sept 18 =&gt; -</a:t>
+            </a:r>
+            <a:endParaRPr/>
+          </a:p>
         </p:txBody>
       </p:sp>
     </p:spTree>
@@ -1425,7 +1668,7 @@
   <p:cSld>
     <p:spTree>
       <p:nvGrpSpPr>
-        <p:cNvPr id="1" name="Shape 127"/>
+        <p:cNvPr id="1" name="Shape 129"/>
         <p:cNvGrpSpPr/>
         <p:nvPr/>
       </p:nvGrpSpPr>
@@ -1439,7 +1682,7 @@
       </p:grpSpPr>
       <p:sp>
         <p:nvSpPr>
-          <p:cNvPr id="128" name="Google Shape;128;s-news-2:notes"/>
+          <p:cNvPr id="130" name="Google Shape;130;s-news-2:notes"/>
           <p:cNvSpPr>
             <a:spLocks noGrp="1" noRot="1" noChangeAspect="1"/>
           </p:cNvSpPr>
@@ -1480,7 +1723,7 @@
       </p:sp>
       <p:sp>
         <p:nvSpPr>
-          <p:cNvPr id="129" name="Google Shape;129;s-news-2:notes"/>
+          <p:cNvPr id="131" name="Google Shape;131;s-news-2:notes"/>
           <p:cNvSpPr txBox="1">
             <a:spLocks noGrp="1"/>
           </p:cNvSpPr>
@@ -1529,7 +1772,7 @@
   <p:cSld>
     <p:spTree>
       <p:nvGrpSpPr>
-        <p:cNvPr id="1" name="Shape 136"/>
+        <p:cNvPr id="1" name="Shape 138"/>
         <p:cNvGrpSpPr/>
         <p:nvPr/>
       </p:nvGrpSpPr>
@@ -1543,7 +1786,7 @@
       </p:grpSpPr>
       <p:sp>
         <p:nvSpPr>
-          <p:cNvPr id="137" name="Google Shape;137;s-google-s-agentic-video-d0cc:notes"/>
+          <p:cNvPr id="139" name="Google Shape;139;s-google-s-agentic-video-d0cc:notes"/>
           <p:cNvSpPr>
             <a:spLocks noGrp="1" noRot="1" noChangeAspect="1"/>
           </p:cNvSpPr>
@@ -1584,7 +1827,7 @@
       </p:sp>
       <p:sp>
         <p:nvSpPr>
-          <p:cNvPr id="138" name="Google Shape;138;s-google-s-agentic-video-d0cc:notes"/>
+          <p:cNvPr id="140" name="Google Shape;140;s-google-s-agentic-video-d0cc:notes"/>
           <p:cNvSpPr txBox="1">
             <a:spLocks noGrp="1"/>
           </p:cNvSpPr>
@@ -1633,7 +1876,7 @@
   <p:cSld>
     <p:spTree>
       <p:nvGrpSpPr>
-        <p:cNvPr id="1" name="Shape 145"/>
+        <p:cNvPr id="1" name="Shape 147"/>
         <p:cNvGrpSpPr/>
         <p:nvPr/>
       </p:nvGrpSpPr>
@@ -1647,7 +1890,7 @@
       </p:grpSpPr>
       <p:sp>
         <p:nvSpPr>
-          <p:cNvPr id="146" name="Google Shape;146;s-anthropic-models-what-ai-does-fa9c:notes"/>
+          <p:cNvPr id="148" name="Google Shape;148;s-anthropic-models-what-ai-does-fa9c:notes"/>
           <p:cNvSpPr>
             <a:spLocks noGrp="1" noRot="1" noChangeAspect="1"/>
           </p:cNvSpPr>
@@ -1688,7 +1931,7 @@
       </p:sp>
       <p:sp>
         <p:nvSpPr>
-          <p:cNvPr id="147" name="Google Shape;147;s-anthropic-models-what-ai-does-fa9c:notes"/>
+          <p:cNvPr id="149" name="Google Shape;149;s-anthropic-models-what-ai-does-fa9c:notes"/>
           <p:cNvSpPr txBox="1">
             <a:spLocks noGrp="1"/>
           </p:cNvSpPr>
@@ -1737,7 +1980,7 @@
   <p:cSld>
     <p:spTree>
       <p:nvGrpSpPr>
-        <p:cNvPr id="1" name="Shape 154"/>
+        <p:cNvPr id="1" name="Shape 156"/>
         <p:cNvGrpSpPr/>
         <p:nvPr/>
       </p:nvGrpSpPr>
@@ -1751,7 +1994,7 @@
       </p:grpSpPr>
       <p:sp>
         <p:nvSpPr>
-          <p:cNvPr id="155" name="Google Shape;155;g3f8dbb82aa7_0_0:notes"/>
+          <p:cNvPr id="157" name="Google Shape;157;g3f8dbb82aa7_0_0:notes"/>
           <p:cNvSpPr>
             <a:spLocks noGrp="1" noRot="1" noChangeAspect="1"/>
           </p:cNvSpPr>
@@ -1792,7 +2035,7 @@
       </p:sp>
       <p:sp>
         <p:nvSpPr>
-          <p:cNvPr id="156" name="Google Shape;156;g3f8dbb82aa7_0_0:notes"/>
+          <p:cNvPr id="158" name="Google Shape;158;g3f8dbb82aa7_0_0:notes"/>
           <p:cNvSpPr txBox="1">
             <a:spLocks noGrp="1"/>
           </p:cNvSpPr>
@@ -1841,7 +2084,7 @@
   <p:cSld>
     <p:spTree>
       <p:nvGrpSpPr>
-        <p:cNvPr id="1" name="Shape 161"/>
+        <p:cNvPr id="1" name="Shape 163"/>
         <p:cNvGrpSpPr/>
         <p:nvPr/>
       </p:nvGrpSpPr>
@@ -1855,7 +2098,7 @@
       </p:grpSpPr>
       <p:sp>
         <p:nvSpPr>
-          <p:cNvPr id="162" name="Google Shape;162;s-amodei-calls-on-ai-labs-to-fd16:notes"/>
+          <p:cNvPr id="164" name="Google Shape;164;s-amodei-calls-on-ai-labs-to-fd16:notes"/>
           <p:cNvSpPr>
             <a:spLocks noGrp="1" noRot="1" noChangeAspect="1"/>
           </p:cNvSpPr>
@@ -1896,7 +2139,7 @@
       </p:sp>
       <p:sp>
         <p:nvSpPr>
-          <p:cNvPr id="163" name="Google Shape;163;s-amodei-calls-on-ai-labs-to-fd16:notes"/>
+          <p:cNvPr id="165" name="Google Shape;165;s-amodei-calls-on-ai-labs-to-fd16:notes"/>
           <p:cNvSpPr txBox="1">
             <a:spLocks noGrp="1"/>
           </p:cNvSpPr>
@@ -1945,7 +2188,7 @@
   <p:cSld>
     <p:spTree>
       <p:nvGrpSpPr>
-        <p:cNvPr id="1" name="Shape 170"/>
+        <p:cNvPr id="1" name="Shape 172"/>
         <p:cNvGrpSpPr/>
         <p:nvPr/>
       </p:nvGrpSpPr>
@@ -1959,7 +2202,7 @@
       </p:grpSpPr>
       <p:sp>
         <p:nvSpPr>
-          <p:cNvPr id="171" name="Google Shape;171;s-deepseek-v4-1-flash-bigger-f639:notes"/>
+          <p:cNvPr id="173" name="Google Shape;173;s-deepseek-v4-1-flash-bigger-f639:notes"/>
           <p:cNvSpPr>
             <a:spLocks noGrp="1" noRot="1" noChangeAspect="1"/>
           </p:cNvSpPr>
@@ -2000,7 +2243,7 @@
       </p:sp>
       <p:sp>
         <p:nvSpPr>
-          <p:cNvPr id="172" name="Google Shape;172;s-deepseek-v4-1-flash-bigger-f639:notes"/>
+          <p:cNvPr id="174" name="Google Shape;174;s-deepseek-v4-1-flash-bigger-f639:notes"/>
           <p:cNvSpPr txBox="1">
             <a:spLocks noGrp="1"/>
           </p:cNvSpPr>
@@ -2049,7 +2292,7 @@
   <p:cSld>
     <p:spTree>
       <p:nvGrpSpPr>
-        <p:cNvPr id="1" name="Shape 181"/>
+        <p:cNvPr id="1" name="Shape 183"/>
         <p:cNvGrpSpPr/>
         <p:nvPr/>
       </p:nvGrpSpPr>
@@ -2063,7 +2306,7 @@
       </p:grpSpPr>
       <p:sp>
         <p:nvSpPr>
-          <p:cNvPr id="182" name="Google Shape;182;s-microsoft-publishes-a-draft-f18b:notes"/>
+          <p:cNvPr id="184" name="Google Shape;184;s-microsoft-publishes-a-draft-f18b:notes"/>
           <p:cNvSpPr>
             <a:spLocks noGrp="1" noRot="1" noChangeAspect="1"/>
           </p:cNvSpPr>
@@ -2104,7 +2347,7 @@
       </p:sp>
       <p:sp>
         <p:nvSpPr>
-          <p:cNvPr id="183" name="Google Shape;183;s-microsoft-publishes-a-draft-f18b:notes"/>
+          <p:cNvPr id="185" name="Google Shape;185;s-microsoft-publishes-a-draft-f18b:notes"/>
           <p:cNvSpPr txBox="1">
             <a:spLocks noGrp="1"/>
           </p:cNvSpPr>
@@ -2153,7 +2396,7 @@
   <p:cSld>
     <p:spTree>
       <p:nvGrpSpPr>
-        <p:cNvPr id="1" name="Shape 190"/>
+        <p:cNvPr id="1" name="Shape 192"/>
         <p:cNvGrpSpPr/>
         <p:nvPr/>
       </p:nvGrpSpPr>
@@ -2167,7 +2410,7 @@
       </p:grpSpPr>
       <p:sp>
         <p:nvSpPr>
-          <p:cNvPr id="191" name="Google Shape;191;g3fb6dcc7c5d_5_4:notes"/>
+          <p:cNvPr id="193" name="Google Shape;193;g3fb6dcc7c5d_5_4:notes"/>
           <p:cNvSpPr>
             <a:spLocks noGrp="1" noRot="1" noChangeAspect="1"/>
           </p:cNvSpPr>
@@ -2208,7 +2451,7 @@
       </p:sp>
       <p:sp>
         <p:nvSpPr>
-          <p:cNvPr id="192" name="Google Shape;192;g3fb6dcc7c5d_5_4:notes"/>
+          <p:cNvPr id="194" name="Google Shape;194;g3fb6dcc7c5d_5_4:notes"/>
           <p:cNvSpPr txBox="1">
             <a:spLocks noGrp="1"/>
           </p:cNvSpPr>
@@ -2257,7 +2500,7 @@
   <p:cSld>
     <p:spTree>
       <p:nvGrpSpPr>
-        <p:cNvPr id="1" name="Shape 198"/>
+        <p:cNvPr id="1" name="Shape 200"/>
         <p:cNvGrpSpPr/>
         <p:nvPr/>
       </p:nvGrpSpPr>
@@ -2271,7 +2514,7 @@
       </p:grpSpPr>
       <p:sp>
         <p:nvSpPr>
-          <p:cNvPr id="199" name="Google Shape;199;g3fb6dcc7c5d_15_1:notes"/>
+          <p:cNvPr id="201" name="Google Shape;201;g3fb6dcc7c5d_15_1:notes"/>
           <p:cNvSpPr>
             <a:spLocks noGrp="1" noRot="1" noChangeAspect="1"/>
           </p:cNvSpPr>
@@ -2312,7 +2555,7 @@
       </p:sp>
       <p:sp>
         <p:nvSpPr>
-          <p:cNvPr id="200" name="Google Shape;200;g3fb6dcc7c5d_15_1:notes"/>
+          <p:cNvPr id="202" name="Google Shape;202;g3fb6dcc7c5d_15_1:notes"/>
           <p:cNvSpPr txBox="1">
             <a:spLocks noGrp="1"/>
           </p:cNvSpPr>
@@ -2361,7 +2604,7 @@
   <p:cSld>
     <p:spTree>
       <p:nvGrpSpPr>
-        <p:cNvPr id="1" name="Shape 207"/>
+        <p:cNvPr id="1" name="Shape 209"/>
         <p:cNvGrpSpPr/>
         <p:nvPr/>
       </p:nvGrpSpPr>
@@ -2375,7 +2618,7 @@
       </p:grpSpPr>
       <p:sp>
         <p:nvSpPr>
-          <p:cNvPr id="208" name="Google Shape;208;g3fb6dcc7c5d_15_11:notes"/>
+          <p:cNvPr id="210" name="Google Shape;210;g3fb6dcc7c5d_15_11:notes"/>
           <p:cNvSpPr>
             <a:spLocks noGrp="1" noRot="1" noChangeAspect="1"/>
           </p:cNvSpPr>
@@ -2416,7 +2659,7 @@
       </p:sp>
       <p:sp>
         <p:nvSpPr>
-          <p:cNvPr id="209" name="Google Shape;209;g3fb6dcc7c5d_15_11:notes"/>
+          <p:cNvPr id="211" name="Google Shape;211;g3fb6dcc7c5d_15_11:notes"/>
           <p:cNvSpPr txBox="1">
             <a:spLocks noGrp="1"/>
           </p:cNvSpPr>
@@ -2489,7 +2732,7 @@
         </p:nvSpPr>
         <p:spPr>
           <a:xfrm>
-            <a:off x="381000" y="685800"/>
+            <a:off x="381300" y="685800"/>
             <a:ext cx="6096000" cy="3429000"/>
           </a:xfrm>
           <a:custGeom>
@@ -2587,7 +2830,7 @@
   <p:cSld>
     <p:spTree>
       <p:nvGrpSpPr>
-        <p:cNvPr id="1" name="Shape 216"/>
+        <p:cNvPr id="1" name="Shape 218"/>
         <p:cNvGrpSpPr/>
         <p:nvPr/>
       </p:nvGrpSpPr>
@@ -2601,7 +2844,7 @@
       </p:grpSpPr>
       <p:sp>
         <p:nvSpPr>
-          <p:cNvPr id="217" name="Google Shape;217;g3fb6dcc7c5d_15_22:notes"/>
+          <p:cNvPr id="219" name="Google Shape;219;g3fb6dcc7c5d_15_22:notes"/>
           <p:cNvSpPr>
             <a:spLocks noGrp="1" noRot="1" noChangeAspect="1"/>
           </p:cNvSpPr>
@@ -2642,7 +2885,7 @@
       </p:sp>
       <p:sp>
         <p:nvSpPr>
-          <p:cNvPr id="218" name="Google Shape;218;g3fb6dcc7c5d_15_22:notes"/>
+          <p:cNvPr id="220" name="Google Shape;220;g3fb6dcc7c5d_15_22:notes"/>
           <p:cNvSpPr txBox="1">
             <a:spLocks noGrp="1"/>
           </p:cNvSpPr>
@@ -2691,7 +2934,7 @@
   <p:cSld>
     <p:spTree>
       <p:nvGrpSpPr>
-        <p:cNvPr id="1" name="Shape 225"/>
+        <p:cNvPr id="1" name="Shape 227"/>
         <p:cNvGrpSpPr/>
         <p:nvPr/>
       </p:nvGrpSpPr>
@@ -2705,7 +2948,7 @@
       </p:grpSpPr>
       <p:sp>
         <p:nvSpPr>
-          <p:cNvPr id="226" name="Google Shape;226;g3fb6dcc7c5d_15_33:notes"/>
+          <p:cNvPr id="228" name="Google Shape;228;g3fb6dcc7c5d_15_33:notes"/>
           <p:cNvSpPr>
             <a:spLocks noGrp="1" noRot="1" noChangeAspect="1"/>
           </p:cNvSpPr>
@@ -2746,7 +2989,7 @@
       </p:sp>
       <p:sp>
         <p:nvSpPr>
-          <p:cNvPr id="227" name="Google Shape;227;g3fb6dcc7c5d_15_33:notes"/>
+          <p:cNvPr id="229" name="Google Shape;229;g3fb6dcc7c5d_15_33:notes"/>
           <p:cNvSpPr txBox="1">
             <a:spLocks noGrp="1"/>
           </p:cNvSpPr>
@@ -2795,7 +3038,7 @@
   <p:cSld>
     <p:spTree>
       <p:nvGrpSpPr>
-        <p:cNvPr id="1" name="Shape 234"/>
+        <p:cNvPr id="1" name="Shape 238"/>
         <p:cNvGrpSpPr/>
         <p:nvPr/>
       </p:nvGrpSpPr>
@@ -2809,7 +3052,7 @@
       </p:grpSpPr>
       <p:sp>
         <p:nvSpPr>
-          <p:cNvPr id="235" name="Google Shape;235;s-periodic-labs-neon-beats-gpt-f563:notes"/>
+          <p:cNvPr id="239" name="Google Shape;239;s-periodic-labs-neon-beats-gpt-f563:notes"/>
           <p:cNvSpPr>
             <a:spLocks noGrp="1" noRot="1" noChangeAspect="1"/>
           </p:cNvSpPr>
@@ -2850,7 +3093,7 @@
       </p:sp>
       <p:sp>
         <p:nvSpPr>
-          <p:cNvPr id="236" name="Google Shape;236;s-periodic-labs-neon-beats-gpt-f563:notes"/>
+          <p:cNvPr id="240" name="Google Shape;240;s-periodic-labs-neon-beats-gpt-f563:notes"/>
           <p:cNvSpPr txBox="1">
             <a:spLocks noGrp="1"/>
           </p:cNvSpPr>
@@ -2899,7 +3142,7 @@
   <p:cSld>
     <p:spTree>
       <p:nvGrpSpPr>
-        <p:cNvPr id="1" name="Shape 243"/>
+        <p:cNvPr id="1" name="Shape 247"/>
         <p:cNvGrpSpPr/>
         <p:nvPr/>
       </p:nvGrpSpPr>
@@ -2913,7 +3156,7 @@
       </p:grpSpPr>
       <p:sp>
         <p:nvSpPr>
-          <p:cNvPr id="244" name="Google Shape;244;s-salesforce-trains-its-own-baff:notes"/>
+          <p:cNvPr id="248" name="Google Shape;248;s-salesforce-trains-its-own-baff:notes"/>
           <p:cNvSpPr>
             <a:spLocks noGrp="1" noRot="1" noChangeAspect="1"/>
           </p:cNvSpPr>
@@ -2954,7 +3197,7 @@
       </p:sp>
       <p:sp>
         <p:nvSpPr>
-          <p:cNvPr id="245" name="Google Shape;245;s-salesforce-trains-its-own-baff:notes"/>
+          <p:cNvPr id="249" name="Google Shape;249;s-salesforce-trains-its-own-baff:notes"/>
           <p:cNvSpPr txBox="1">
             <a:spLocks noGrp="1"/>
           </p:cNvSpPr>
@@ -3003,7 +3246,7 @@
   <p:cSld>
     <p:spTree>
       <p:nvGrpSpPr>
-        <p:cNvPr id="1" name="Shape 252"/>
+        <p:cNvPr id="1" name="Shape 256"/>
         <p:cNvGrpSpPr/>
         <p:nvPr/>
       </p:nvGrpSpPr>
@@ -3017,7 +3260,7 @@
       </p:grpSpPr>
       <p:sp>
         <p:nvSpPr>
-          <p:cNvPr id="253" name="Google Shape;253;s-z-ai-the-maker-of-glm-raises-8f51:notes"/>
+          <p:cNvPr id="257" name="Google Shape;257;s-z-ai-the-maker-of-glm-raises-8f51:notes"/>
           <p:cNvSpPr>
             <a:spLocks noGrp="1" noRot="1" noChangeAspect="1"/>
           </p:cNvSpPr>
@@ -3058,7 +3301,7 @@
       </p:sp>
       <p:sp>
         <p:nvSpPr>
-          <p:cNvPr id="254" name="Google Shape;254;s-z-ai-the-maker-of-glm-raises-8f51:notes"/>
+          <p:cNvPr id="258" name="Google Shape;258;s-z-ai-the-maker-of-glm-raises-8f51:notes"/>
           <p:cNvSpPr txBox="1">
             <a:spLocks noGrp="1"/>
           </p:cNvSpPr>
@@ -3107,7 +3350,7 @@
   <p:cSld>
     <p:spTree>
       <p:nvGrpSpPr>
-        <p:cNvPr id="1" name="Shape 261"/>
+        <p:cNvPr id="1" name="Shape 266"/>
         <p:cNvGrpSpPr/>
         <p:nvPr/>
       </p:nvGrpSpPr>
@@ -3121,7 +3364,7 @@
       </p:grpSpPr>
       <p:sp>
         <p:nvSpPr>
-          <p:cNvPr id="262" name="Google Shape;262;s-layoffs:notes"/>
+          <p:cNvPr id="267" name="Google Shape;267;s-softbank-borrows-11-9-billion-07b8:notes"/>
           <p:cNvSpPr>
             <a:spLocks noGrp="1" noRot="1" noChangeAspect="1"/>
           </p:cNvSpPr>
@@ -3162,7 +3405,7 @@
       </p:sp>
       <p:sp>
         <p:nvSpPr>
-          <p:cNvPr id="263" name="Google Shape;263;s-layoffs:notes"/>
+          <p:cNvPr id="268" name="Google Shape;268;s-softbank-borrows-11-9-billion-07b8:notes"/>
           <p:cNvSpPr txBox="1">
             <a:spLocks noGrp="1"/>
           </p:cNvSpPr>
@@ -3211,7 +3454,7 @@
   <p:cSld>
     <p:spTree>
       <p:nvGrpSpPr>
-        <p:cNvPr id="1" name="Shape 271"/>
+        <p:cNvPr id="1" name="Shape 276"/>
         <p:cNvGrpSpPr/>
         <p:nvPr/>
       </p:nvGrpSpPr>
@@ -3225,7 +3468,7 @@
       </p:grpSpPr>
       <p:sp>
         <p:nvSpPr>
-          <p:cNvPr id="272" name="Google Shape;272;s-about:notes"/>
+          <p:cNvPr id="277" name="Google Shape;277;s-claude-code-projects-keeps-747b:notes"/>
           <p:cNvSpPr>
             <a:spLocks noGrp="1" noRot="1" noChangeAspect="1"/>
           </p:cNvSpPr>
@@ -3266,7 +3509,7 @@
       </p:sp>
       <p:sp>
         <p:nvSpPr>
-          <p:cNvPr id="273" name="Google Shape;273;s-about:notes"/>
+          <p:cNvPr id="278" name="Google Shape;278;s-claude-code-projects-keeps-747b:notes"/>
           <p:cNvSpPr txBox="1">
             <a:spLocks noGrp="1"/>
           </p:cNvSpPr>
@@ -3315,7 +3558,7 @@
   <p:cSld>
     <p:spTree>
       <p:nvGrpSpPr>
-        <p:cNvPr id="1" name="Shape 278"/>
+        <p:cNvPr id="1" name="Shape 285"/>
         <p:cNvGrpSpPr/>
         <p:nvPr/>
       </p:nvGrpSpPr>
@@ -3329,7 +3572,7 @@
       </p:grpSpPr>
       <p:sp>
         <p:nvSpPr>
-          <p:cNvPr id="279" name="Google Shape;279;s-thanks:notes"/>
+          <p:cNvPr id="286" name="Google Shape;286;s-chatgpt-ads-now-open-a-chat-1d9e:notes"/>
           <p:cNvSpPr>
             <a:spLocks noGrp="1" noRot="1" noChangeAspect="1"/>
           </p:cNvSpPr>
@@ -3370,7 +3613,215 @@
       </p:sp>
       <p:sp>
         <p:nvSpPr>
-          <p:cNvPr id="280" name="Google Shape;280;s-thanks:notes"/>
+          <p:cNvPr id="287" name="Google Shape;287;s-chatgpt-ads-now-open-a-chat-1d9e:notes"/>
+          <p:cNvSpPr txBox="1">
+            <a:spLocks noGrp="1"/>
+          </p:cNvSpPr>
+          <p:nvPr>
+            <p:ph type="body" idx="1"/>
+          </p:nvPr>
+        </p:nvSpPr>
+        <p:spPr>
+          <a:xfrm>
+            <a:off x="685800" y="4343400"/>
+            <a:ext cx="5486400" cy="4114800"/>
+          </a:xfrm>
+          <a:prstGeom prst="rect">
+            <a:avLst/>
+          </a:prstGeom>
+        </p:spPr>
+        <p:txBody>
+          <a:bodyPr spcFirstLastPara="1" wrap="square" lIns="91425" tIns="91425" rIns="91425" bIns="91425" anchor="t" anchorCtr="0">
+            <a:noAutofit/>
+          </a:bodyPr>
+          <a:lstStyle/>
+          <a:p>
+            <a:pPr marL="0" lvl="0" indent="0" algn="l" rtl="0">
+              <a:spcBef>
+                <a:spcPts val="0"/>
+              </a:spcBef>
+              <a:spcAft>
+                <a:spcPts val="0"/>
+              </a:spcAft>
+              <a:buNone/>
+            </a:pPr>
+            <a:endParaRPr/>
+          </a:p>
+        </p:txBody>
+      </p:sp>
+    </p:spTree>
+  </p:cSld>
+  <p:clrMapOvr>
+    <a:masterClrMapping/>
+  </p:clrMapOvr>
+</p:notes>
+</file>
+
+<file path=ppt/notesSlides/notesSlide28.xml><?xml version="1.0" encoding="utf-8"?>
+<p:notes xmlns:a="http://schemas.openxmlformats.org/drawingml/2006/main" xmlns:r="http://schemas.openxmlformats.org/officeDocument/2006/relationships" xmlns:p="http://schemas.openxmlformats.org/presentationml/2006/main" showMasterSp="0" showMasterPhAnim="0">
+  <p:cSld>
+    <p:spTree>
+      <p:nvGrpSpPr>
+        <p:cNvPr id="1" name="Shape 292"/>
+        <p:cNvGrpSpPr/>
+        <p:nvPr/>
+      </p:nvGrpSpPr>
+      <p:grpSpPr>
+        <a:xfrm>
+          <a:off x="0" y="0"/>
+          <a:ext cx="0" cy="0"/>
+          <a:chOff x="0" y="0"/>
+          <a:chExt cx="0" cy="0"/>
+        </a:xfrm>
+      </p:grpSpPr>
+      <p:sp>
+        <p:nvSpPr>
+          <p:cNvPr id="293" name="Google Shape;293;s-layoffs:notes"/>
+          <p:cNvSpPr>
+            <a:spLocks noGrp="1" noRot="1" noChangeAspect="1"/>
+          </p:cNvSpPr>
+          <p:nvPr>
+            <p:ph type="sldImg" idx="2"/>
+          </p:nvPr>
+        </p:nvSpPr>
+        <p:spPr>
+          <a:xfrm>
+            <a:off x="381300" y="685800"/>
+            <a:ext cx="6096000" cy="3429000"/>
+          </a:xfrm>
+          <a:custGeom>
+            <a:avLst/>
+            <a:gdLst/>
+            <a:ahLst/>
+            <a:cxnLst/>
+            <a:rect l="l" t="t" r="r" b="b"/>
+            <a:pathLst>
+              <a:path w="120000" h="120000" extrusionOk="0">
+                <a:moveTo>
+                  <a:pt x="0" y="0"/>
+                </a:moveTo>
+                <a:lnTo>
+                  <a:pt x="120000" y="0"/>
+                </a:lnTo>
+                <a:lnTo>
+                  <a:pt x="120000" y="120000"/>
+                </a:lnTo>
+                <a:lnTo>
+                  <a:pt x="0" y="120000"/>
+                </a:lnTo>
+                <a:close/>
+              </a:path>
+            </a:pathLst>
+          </a:custGeom>
+        </p:spPr>
+      </p:sp>
+      <p:sp>
+        <p:nvSpPr>
+          <p:cNvPr id="294" name="Google Shape;294;s-layoffs:notes"/>
+          <p:cNvSpPr txBox="1">
+            <a:spLocks noGrp="1"/>
+          </p:cNvSpPr>
+          <p:nvPr>
+            <p:ph type="body" idx="1"/>
+          </p:nvPr>
+        </p:nvSpPr>
+        <p:spPr>
+          <a:xfrm>
+            <a:off x="685800" y="4343400"/>
+            <a:ext cx="5486400" cy="4114800"/>
+          </a:xfrm>
+          <a:prstGeom prst="rect">
+            <a:avLst/>
+          </a:prstGeom>
+        </p:spPr>
+        <p:txBody>
+          <a:bodyPr spcFirstLastPara="1" wrap="square" lIns="91425" tIns="91425" rIns="91425" bIns="91425" anchor="t" anchorCtr="0">
+            <a:noAutofit/>
+          </a:bodyPr>
+          <a:lstStyle/>
+          <a:p>
+            <a:pPr marL="0" lvl="0" indent="0" algn="l" rtl="0">
+              <a:spcBef>
+                <a:spcPts val="0"/>
+              </a:spcBef>
+              <a:spcAft>
+                <a:spcPts val="0"/>
+              </a:spcAft>
+              <a:buNone/>
+            </a:pPr>
+            <a:endParaRPr/>
+          </a:p>
+        </p:txBody>
+      </p:sp>
+    </p:spTree>
+  </p:cSld>
+  <p:clrMapOvr>
+    <a:masterClrMapping/>
+  </p:clrMapOvr>
+</p:notes>
+</file>
+
+<file path=ppt/notesSlides/notesSlide29.xml><?xml version="1.0" encoding="utf-8"?>
+<p:notes xmlns:a="http://schemas.openxmlformats.org/drawingml/2006/main" xmlns:r="http://schemas.openxmlformats.org/officeDocument/2006/relationships" xmlns:p="http://schemas.openxmlformats.org/presentationml/2006/main" showMasterSp="0" showMasterPhAnim="0">
+  <p:cSld>
+    <p:spTree>
+      <p:nvGrpSpPr>
+        <p:cNvPr id="1" name="Shape 302"/>
+        <p:cNvGrpSpPr/>
+        <p:nvPr/>
+      </p:nvGrpSpPr>
+      <p:grpSpPr>
+        <a:xfrm>
+          <a:off x="0" y="0"/>
+          <a:ext cx="0" cy="0"/>
+          <a:chOff x="0" y="0"/>
+          <a:chExt cx="0" cy="0"/>
+        </a:xfrm>
+      </p:grpSpPr>
+      <p:sp>
+        <p:nvSpPr>
+          <p:cNvPr id="303" name="Google Shape;303;s-about:notes"/>
+          <p:cNvSpPr>
+            <a:spLocks noGrp="1" noRot="1" noChangeAspect="1"/>
+          </p:cNvSpPr>
+          <p:nvPr>
+            <p:ph type="sldImg" idx="2"/>
+          </p:nvPr>
+        </p:nvSpPr>
+        <p:spPr>
+          <a:xfrm>
+            <a:off x="381300" y="685800"/>
+            <a:ext cx="6096000" cy="3429000"/>
+          </a:xfrm>
+          <a:custGeom>
+            <a:avLst/>
+            <a:gdLst/>
+            <a:ahLst/>
+            <a:cxnLst/>
+            <a:rect l="l" t="t" r="r" b="b"/>
+            <a:pathLst>
+              <a:path w="120000" h="120000" extrusionOk="0">
+                <a:moveTo>
+                  <a:pt x="0" y="0"/>
+                </a:moveTo>
+                <a:lnTo>
+                  <a:pt x="120000" y="0"/>
+                </a:lnTo>
+                <a:lnTo>
+                  <a:pt x="120000" y="120000"/>
+                </a:lnTo>
+                <a:lnTo>
+                  <a:pt x="0" y="120000"/>
+                </a:lnTo>
+                <a:close/>
+              </a:path>
+            </a:pathLst>
+          </a:custGeom>
+        </p:spPr>
+      </p:sp>
+      <p:sp>
+        <p:nvSpPr>
+          <p:cNvPr id="304" name="Google Shape;304;s-about:notes"/>
           <p:cNvSpPr txBox="1">
             <a:spLocks noGrp="1"/>
           </p:cNvSpPr>
@@ -3536,6 +3987,110 @@
 </p:notes>
 </file>
 
+<file path=ppt/notesSlides/notesSlide30.xml><?xml version="1.0" encoding="utf-8"?>
+<p:notes xmlns:a="http://schemas.openxmlformats.org/drawingml/2006/main" xmlns:r="http://schemas.openxmlformats.org/officeDocument/2006/relationships" xmlns:p="http://schemas.openxmlformats.org/presentationml/2006/main" showMasterSp="0" showMasterPhAnim="0">
+  <p:cSld>
+    <p:spTree>
+      <p:nvGrpSpPr>
+        <p:cNvPr id="1" name="Shape 309"/>
+        <p:cNvGrpSpPr/>
+        <p:nvPr/>
+      </p:nvGrpSpPr>
+      <p:grpSpPr>
+        <a:xfrm>
+          <a:off x="0" y="0"/>
+          <a:ext cx="0" cy="0"/>
+          <a:chOff x="0" y="0"/>
+          <a:chExt cx="0" cy="0"/>
+        </a:xfrm>
+      </p:grpSpPr>
+      <p:sp>
+        <p:nvSpPr>
+          <p:cNvPr id="310" name="Google Shape;310;s-thanks:notes"/>
+          <p:cNvSpPr>
+            <a:spLocks noGrp="1" noRot="1" noChangeAspect="1"/>
+          </p:cNvSpPr>
+          <p:nvPr>
+            <p:ph type="sldImg" idx="2"/>
+          </p:nvPr>
+        </p:nvSpPr>
+        <p:spPr>
+          <a:xfrm>
+            <a:off x="381300" y="685800"/>
+            <a:ext cx="6096000" cy="3429000"/>
+          </a:xfrm>
+          <a:custGeom>
+            <a:avLst/>
+            <a:gdLst/>
+            <a:ahLst/>
+            <a:cxnLst/>
+            <a:rect l="l" t="t" r="r" b="b"/>
+            <a:pathLst>
+              <a:path w="120000" h="120000" extrusionOk="0">
+                <a:moveTo>
+                  <a:pt x="0" y="0"/>
+                </a:moveTo>
+                <a:lnTo>
+                  <a:pt x="120000" y="0"/>
+                </a:lnTo>
+                <a:lnTo>
+                  <a:pt x="120000" y="120000"/>
+                </a:lnTo>
+                <a:lnTo>
+                  <a:pt x="0" y="120000"/>
+                </a:lnTo>
+                <a:close/>
+              </a:path>
+            </a:pathLst>
+          </a:custGeom>
+        </p:spPr>
+      </p:sp>
+      <p:sp>
+        <p:nvSpPr>
+          <p:cNvPr id="311" name="Google Shape;311;s-thanks:notes"/>
+          <p:cNvSpPr txBox="1">
+            <a:spLocks noGrp="1"/>
+          </p:cNvSpPr>
+          <p:nvPr>
+            <p:ph type="body" idx="1"/>
+          </p:nvPr>
+        </p:nvSpPr>
+        <p:spPr>
+          <a:xfrm>
+            <a:off x="685800" y="4343400"/>
+            <a:ext cx="5486400" cy="4114800"/>
+          </a:xfrm>
+          <a:prstGeom prst="rect">
+            <a:avLst/>
+          </a:prstGeom>
+        </p:spPr>
+        <p:txBody>
+          <a:bodyPr spcFirstLastPara="1" wrap="square" lIns="91425" tIns="91425" rIns="91425" bIns="91425" anchor="t" anchorCtr="0">
+            <a:noAutofit/>
+          </a:bodyPr>
+          <a:lstStyle/>
+          <a:p>
+            <a:pPr marL="0" lvl="0" indent="0" algn="l" rtl="0">
+              <a:spcBef>
+                <a:spcPts val="0"/>
+              </a:spcBef>
+              <a:spcAft>
+                <a:spcPts val="0"/>
+              </a:spcAft>
+              <a:buNone/>
+            </a:pPr>
+            <a:endParaRPr/>
+          </a:p>
+        </p:txBody>
+      </p:sp>
+    </p:spTree>
+  </p:cSld>
+  <p:clrMapOvr>
+    <a:masterClrMapping/>
+  </p:clrMapOvr>
+</p:notes>
+</file>
+
 <file path=ppt/notesSlides/notesSlide4.xml><?xml version="1.0" encoding="utf-8"?>
 <p:notes xmlns:a="http://schemas.openxmlformats.org/drawingml/2006/main" xmlns:r="http://schemas.openxmlformats.org/officeDocument/2006/relationships" xmlns:p="http://schemas.openxmlformats.org/presentationml/2006/main" showMasterSp="0" showMasterPhAnim="0">
   <p:cSld>
@@ -3957,7 +4512,7 @@
   <p:cSld>
     <p:spTree>
       <p:nvGrpSpPr>
-        <p:cNvPr id="1" name="Shape 112"/>
+        <p:cNvPr id="1" name="Shape 114"/>
         <p:cNvGrpSpPr/>
         <p:nvPr/>
       </p:nvGrpSpPr>
@@ -3971,7 +4526,7 @@
       </p:grpSpPr>
       <p:sp>
         <p:nvSpPr>
-          <p:cNvPr id="113" name="Google Shape;113;g3fb59fa4c2d_20_7:notes"/>
+          <p:cNvPr id="115" name="Google Shape;115;g3fb59fa4c2d_20_7:notes"/>
           <p:cNvSpPr>
             <a:spLocks noGrp="1" noRot="1" noChangeAspect="1"/>
           </p:cNvSpPr>
@@ -4012,7 +4567,7 @@
       </p:sp>
       <p:sp>
         <p:nvSpPr>
-          <p:cNvPr id="114" name="Google Shape;114;g3fb59fa4c2d_20_7:notes"/>
+          <p:cNvPr id="116" name="Google Shape;116;g3fb59fa4c2d_20_7:notes"/>
           <p:cNvSpPr txBox="1">
             <a:spLocks noGrp="1"/>
           </p:cNvSpPr>
@@ -4061,7 +4616,7 @@
   <p:cSld>
     <p:spTree>
       <p:nvGrpSpPr>
-        <p:cNvPr id="1" name="Shape 119"/>
+        <p:cNvPr id="1" name="Shape 121"/>
         <p:cNvGrpSpPr/>
         <p:nvPr/>
       </p:nvGrpSpPr>
@@ -4075,7 +4630,7 @@
       </p:grpSpPr>
       <p:sp>
         <p:nvSpPr>
-          <p:cNvPr id="120" name="Google Shape;120;s-youtube:notes"/>
+          <p:cNvPr id="122" name="Google Shape;122;s-youtube:notes"/>
           <p:cNvSpPr>
             <a:spLocks noGrp="1" noRot="1" noChangeAspect="1"/>
           </p:cNvSpPr>
@@ -4116,7 +4671,7 @@
       </p:sp>
       <p:sp>
         <p:nvSpPr>
-          <p:cNvPr id="121" name="Google Shape;121;s-youtube:notes"/>
+          <p:cNvPr id="123" name="Google Shape;123;s-youtube:notes"/>
           <p:cNvSpPr txBox="1">
             <a:spLocks noGrp="1"/>
           </p:cNvSpPr>
@@ -9050,13 +9605,15 @@
         </p:nvSpPr>
         <p:spPr>
           <a:xfrm>
-            <a:off x="36576" y="532754"/>
-            <a:ext cx="4517100" cy="4519200"/>
+            <a:off x="114360" y="595361"/>
+            <a:ext cx="3280800" cy="4420800"/>
           </a:xfrm>
           <a:prstGeom prst="rect">
             <a:avLst/>
           </a:prstGeom>
-          <a:noFill/>
+          <a:solidFill>
+            <a:srgbClr val="FFF2CC"/>
+          </a:solidFill>
           <a:ln w="9525" cap="flat" cmpd="sng">
             <a:solidFill>
               <a:srgbClr val="FF0000"/>
@@ -9068,22 +9625,27 @@
           </a:ln>
         </p:spPr>
         <p:txBody>
-          <a:bodyPr spcFirstLastPara="1" wrap="square" lIns="91425" tIns="91425" rIns="91425" bIns="91425" anchor="t" anchorCtr="0">
-            <a:noAutofit/>
+          <a:bodyPr spcFirstLastPara="1" wrap="square" lIns="9125" tIns="9125" rIns="9125" bIns="9125" anchor="t" anchorCtr="0">
+            <a:spAutoFit/>
           </a:bodyPr>
           <a:lstStyle/>
           <a:p>
-            <a:pPr marL="171450" lvl="0" indent="-171450" algn="l" rtl="0">
-              <a:spcBef>
-                <a:spcPts val="0"/>
-              </a:spcBef>
-              <a:spcAft>
-                <a:spcPts val="0"/>
-              </a:spcAft>
-              <a:buNone/>
-            </a:pPr>
-            <a:r>
-              <a:rPr lang="en" b="1">
+            <a:pPr marL="171450" lvl="0" indent="-139700" algn="l" rtl="0">
+              <a:spcBef>
+                <a:spcPts val="0"/>
+              </a:spcBef>
+              <a:spcAft>
+                <a:spcPts val="0"/>
+              </a:spcAft>
+              <a:buClr>
+                <a:srgbClr val="4472C4"/>
+              </a:buClr>
+              <a:buSzPts val="1300"/>
+              <a:buFont typeface="Calibri"/>
+              <a:buChar char="●"/>
+            </a:pPr>
+            <a:r>
+              <a:rPr lang="en" sz="1300" b="1">
                 <a:solidFill>
                   <a:srgbClr val="4472C4"/>
                 </a:solidFill>
@@ -9092,9 +9654,9 @@
                 <a:cs typeface="Calibri"/>
                 <a:sym typeface="Calibri"/>
               </a:rPr>
-              <a:t>● Crowd-sourced LM Arena</a:t>
-            </a:r>
-            <a:endParaRPr b="1">
+              <a:t>Crowd-sourced LM Arena</a:t>
+            </a:r>
+            <a:endParaRPr sz="1300" b="1">
               <a:solidFill>
                 <a:srgbClr val="4472C4"/>
               </a:solidFill>
@@ -9105,17 +9667,22 @@
             </a:endParaRPr>
           </a:p>
           <a:p>
-            <a:pPr marL="171450" lvl="0" indent="-171450" algn="l" rtl="0">
-              <a:spcBef>
-                <a:spcPts val="0"/>
-              </a:spcBef>
-              <a:spcAft>
-                <a:spcPts val="0"/>
-              </a:spcAft>
-              <a:buNone/>
-            </a:pPr>
-            <a:r>
-              <a:rPr lang="en" b="1">
+            <a:pPr marL="171450" lvl="0" indent="-139700" algn="l" rtl="0">
+              <a:spcBef>
+                <a:spcPts val="0"/>
+              </a:spcBef>
+              <a:spcAft>
+                <a:spcPts val="0"/>
+              </a:spcAft>
+              <a:buClr>
+                <a:srgbClr val="4472C4"/>
+              </a:buClr>
+              <a:buSzPts val="1300"/>
+              <a:buFont typeface="Calibri"/>
+              <a:buChar char="●"/>
+            </a:pPr>
+            <a:r>
+              <a:rPr lang="en" sz="1300" b="1">
                 <a:solidFill>
                   <a:srgbClr val="4472C4"/>
                 </a:solidFill>
@@ -9124,9 +9691,9 @@
                 <a:cs typeface="Calibri"/>
                 <a:sym typeface="Calibri"/>
               </a:rPr>
-              <a:t>● Claude Fable-5 - 6TB</a:t>
-            </a:r>
-            <a:endParaRPr b="1">
+              <a:t>Claude Fable-5 - 6TB</a:t>
+            </a:r>
+            <a:endParaRPr sz="1300" b="1">
               <a:solidFill>
                 <a:srgbClr val="4472C4"/>
               </a:solidFill>
@@ -9137,17 +9704,22 @@
             </a:endParaRPr>
           </a:p>
           <a:p>
-            <a:pPr marL="171450" lvl="0" indent="-171450" algn="l" rtl="0">
-              <a:spcBef>
-                <a:spcPts val="0"/>
-              </a:spcBef>
-              <a:spcAft>
-                <a:spcPts val="0"/>
-              </a:spcAft>
-              <a:buNone/>
-            </a:pPr>
-            <a:r>
-              <a:rPr lang="en" b="1">
+            <a:pPr marL="171450" lvl="0" indent="-139700" algn="l" rtl="0">
+              <a:spcBef>
+                <a:spcPts val="0"/>
+              </a:spcBef>
+              <a:spcAft>
+                <a:spcPts val="0"/>
+              </a:spcAft>
+              <a:buClr>
+                <a:srgbClr val="4472C4"/>
+              </a:buClr>
+              <a:buSzPts val="1300"/>
+              <a:buFont typeface="Calibri"/>
+              <a:buChar char="●"/>
+            </a:pPr>
+            <a:r>
+              <a:rPr lang="en" sz="1300" b="1">
                 <a:solidFill>
                   <a:srgbClr val="4472C4"/>
                 </a:solidFill>
@@ -9156,9 +9728,9 @@
                 <a:cs typeface="Calibri"/>
                 <a:sym typeface="Calibri"/>
               </a:rPr>
-              <a:t>● Meta Muse Agent Ships</a:t>
-            </a:r>
-            <a:endParaRPr b="1">
+              <a:t>Meta Muse Agent Ships</a:t>
+            </a:r>
+            <a:endParaRPr sz="1300" b="1">
               <a:solidFill>
                 <a:srgbClr val="4472C4"/>
               </a:solidFill>
@@ -9169,17 +9741,22 @@
             </a:endParaRPr>
           </a:p>
           <a:p>
-            <a:pPr marL="171450" lvl="0" indent="-171450" algn="l" rtl="0">
-              <a:spcBef>
-                <a:spcPts val="0"/>
-              </a:spcBef>
-              <a:spcAft>
-                <a:spcPts val="0"/>
-              </a:spcAft>
-              <a:buNone/>
-            </a:pPr>
-            <a:r>
-              <a:rPr lang="en" b="1">
+            <a:pPr marL="171450" lvl="0" indent="-139700" algn="l" rtl="0">
+              <a:spcBef>
+                <a:spcPts val="0"/>
+              </a:spcBef>
+              <a:spcAft>
+                <a:spcPts val="0"/>
+              </a:spcAft>
+              <a:buClr>
+                <a:srgbClr val="4472C4"/>
+              </a:buClr>
+              <a:buSzPts val="1300"/>
+              <a:buFont typeface="Calibri"/>
+              <a:buChar char="●"/>
+            </a:pPr>
+            <a:r>
+              <a:rPr lang="en" sz="1300" b="1">
                 <a:solidFill>
                   <a:srgbClr val="4472C4"/>
                 </a:solidFill>
@@ -9188,9 +9765,9 @@
                 <a:cs typeface="Calibri"/>
                 <a:sym typeface="Calibri"/>
               </a:rPr>
-              <a:t>● Claude Formalized Fermat's Theorem</a:t>
-            </a:r>
-            <a:endParaRPr b="1">
+              <a:t>Claude Formalized Fermat's Theorem</a:t>
+            </a:r>
+            <a:endParaRPr sz="1300" b="1">
               <a:solidFill>
                 <a:srgbClr val="4472C4"/>
               </a:solidFill>
@@ -9201,17 +9778,22 @@
             </a:endParaRPr>
           </a:p>
           <a:p>
-            <a:pPr marL="171450" lvl="0" indent="-171450" algn="l" rtl="0">
-              <a:spcBef>
-                <a:spcPts val="0"/>
-              </a:spcBef>
-              <a:spcAft>
-                <a:spcPts val="0"/>
-              </a:spcAft>
-              <a:buNone/>
-            </a:pPr>
-            <a:r>
-              <a:rPr lang="en" b="1">
+            <a:pPr marL="171450" lvl="0" indent="-139700" algn="l" rtl="0">
+              <a:spcBef>
+                <a:spcPts val="0"/>
+              </a:spcBef>
+              <a:spcAft>
+                <a:spcPts val="0"/>
+              </a:spcAft>
+              <a:buClr>
+                <a:srgbClr val="4472C4"/>
+              </a:buClr>
+              <a:buSzPts val="1300"/>
+              <a:buFont typeface="Calibri"/>
+              <a:buChar char="●"/>
+            </a:pPr>
+            <a:r>
+              <a:rPr lang="en" sz="1300" b="1">
                 <a:solidFill>
                   <a:srgbClr val="4472C4"/>
                 </a:solidFill>
@@ -9220,9 +9802,9 @@
                 <a:cs typeface="Calibri"/>
                 <a:sym typeface="Calibri"/>
               </a:rPr>
-              <a:t>● Andrej Karpathy Workflow</a:t>
-            </a:r>
-            <a:endParaRPr b="1">
+              <a:t>Andrej Karpathy Workflow</a:t>
+            </a:r>
+            <a:endParaRPr sz="1300" b="1">
               <a:solidFill>
                 <a:srgbClr val="4472C4"/>
               </a:solidFill>
@@ -9233,17 +9815,22 @@
             </a:endParaRPr>
           </a:p>
           <a:p>
-            <a:pPr marL="171450" lvl="0" indent="-171450" algn="l" rtl="0">
-              <a:spcBef>
-                <a:spcPts val="0"/>
-              </a:spcBef>
-              <a:spcAft>
-                <a:spcPts val="0"/>
-              </a:spcAft>
-              <a:buNone/>
-            </a:pPr>
-            <a:r>
-              <a:rPr lang="en" b="1">
+            <a:pPr marL="171450" lvl="0" indent="-139700" algn="l" rtl="0">
+              <a:spcBef>
+                <a:spcPts val="0"/>
+              </a:spcBef>
+              <a:spcAft>
+                <a:spcPts val="0"/>
+              </a:spcAft>
+              <a:buClr>
+                <a:srgbClr val="4472C4"/>
+              </a:buClr>
+              <a:buSzPts val="1300"/>
+              <a:buFont typeface="Calibri"/>
+              <a:buChar char="●"/>
+            </a:pPr>
+            <a:r>
+              <a:rPr lang="en" sz="1300" b="1">
                 <a:solidFill>
                   <a:srgbClr val="4472C4"/>
                 </a:solidFill>
@@ -9252,9 +9839,9 @@
                 <a:cs typeface="Calibri"/>
                 <a:sym typeface="Calibri"/>
               </a:rPr>
-              <a:t>● OpenAI Astra,is Very Good with Blender 3D</a:t>
-            </a:r>
-            <a:endParaRPr b="1">
+              <a:t>OpenAI Astra,is Very Good with Blender 3D</a:t>
+            </a:r>
+            <a:endParaRPr sz="1300" b="1">
               <a:solidFill>
                 <a:srgbClr val="4472C4"/>
               </a:solidFill>
@@ -9265,17 +9852,22 @@
             </a:endParaRPr>
           </a:p>
           <a:p>
-            <a:pPr marL="171450" lvl="0" indent="-171450" algn="l" rtl="0">
-              <a:spcBef>
-                <a:spcPts val="0"/>
-              </a:spcBef>
-              <a:spcAft>
-                <a:spcPts val="0"/>
-              </a:spcAft>
-              <a:buNone/>
-            </a:pPr>
-            <a:r>
-              <a:rPr lang="en" b="1">
+            <a:pPr marL="171450" lvl="0" indent="-139700" algn="l" rtl="0">
+              <a:spcBef>
+                <a:spcPts val="0"/>
+              </a:spcBef>
+              <a:spcAft>
+                <a:spcPts val="0"/>
+              </a:spcAft>
+              <a:buClr>
+                <a:srgbClr val="4472C4"/>
+              </a:buClr>
+              <a:buSzPts val="1300"/>
+              <a:buFont typeface="Calibri"/>
+              <a:buChar char="●"/>
+            </a:pPr>
+            <a:r>
+              <a:rPr lang="en" sz="1300" b="1">
                 <a:solidFill>
                   <a:srgbClr val="4472C4"/>
                 </a:solidFill>
@@ -9284,9 +9876,9 @@
                 <a:cs typeface="Calibri"/>
                 <a:sym typeface="Calibri"/>
               </a:rPr>
-              <a:t>● Self-Tuning Agent Harnesses</a:t>
-            </a:r>
-            <a:endParaRPr b="1">
+              <a:t>Self-Tuning Agent Harnesses</a:t>
+            </a:r>
+            <a:endParaRPr sz="1300" b="1">
               <a:solidFill>
                 <a:srgbClr val="4472C4"/>
               </a:solidFill>
@@ -9297,17 +9889,22 @@
             </a:endParaRPr>
           </a:p>
           <a:p>
-            <a:pPr marL="171450" lvl="0" indent="-171450" algn="l" rtl="0">
-              <a:spcBef>
-                <a:spcPts val="0"/>
-              </a:spcBef>
-              <a:spcAft>
-                <a:spcPts val="0"/>
-              </a:spcAft>
-              <a:buNone/>
-            </a:pPr>
-            <a:r>
-              <a:rPr lang="en" b="1">
+            <a:pPr marL="171450" lvl="0" indent="-139700" algn="l" rtl="0">
+              <a:spcBef>
+                <a:spcPts val="0"/>
+              </a:spcBef>
+              <a:spcAft>
+                <a:spcPts val="0"/>
+              </a:spcAft>
+              <a:buClr>
+                <a:srgbClr val="4472C4"/>
+              </a:buClr>
+              <a:buSzPts val="1300"/>
+              <a:buFont typeface="Calibri"/>
+              <a:buChar char="●"/>
+            </a:pPr>
+            <a:r>
+              <a:rPr lang="en" sz="1300" b="1">
                 <a:solidFill>
                   <a:srgbClr val="4472C4"/>
                 </a:solidFill>
@@ -9316,9 +9913,9 @@
                 <a:cs typeface="Calibri"/>
                 <a:sym typeface="Calibri"/>
               </a:rPr>
-              <a:t>● Recursive Self-Improvement</a:t>
-            </a:r>
-            <a:endParaRPr b="1">
+              <a:t>Customers Expect Apps To Be Smart</a:t>
+            </a:r>
+            <a:endParaRPr sz="1300" b="1">
               <a:solidFill>
                 <a:srgbClr val="4472C4"/>
               </a:solidFill>
@@ -9329,17 +9926,22 @@
             </a:endParaRPr>
           </a:p>
           <a:p>
-            <a:pPr marL="171450" lvl="0" indent="-171450" algn="l" rtl="0">
-              <a:spcBef>
-                <a:spcPts val="0"/>
-              </a:spcBef>
-              <a:spcAft>
-                <a:spcPts val="0"/>
-              </a:spcAft>
-              <a:buNone/>
-            </a:pPr>
-            <a:r>
-              <a:rPr lang="en" b="1">
+            <a:pPr marL="171450" lvl="0" indent="-139700" algn="l" rtl="0">
+              <a:spcBef>
+                <a:spcPts val="0"/>
+              </a:spcBef>
+              <a:spcAft>
+                <a:spcPts val="0"/>
+              </a:spcAft>
+              <a:buClr>
+                <a:srgbClr val="4472C4"/>
+              </a:buClr>
+              <a:buSzPts val="1300"/>
+              <a:buFont typeface="Calibri"/>
+              <a:buChar char="●"/>
+            </a:pPr>
+            <a:r>
+              <a:rPr lang="en" sz="1300" b="1">
                 <a:solidFill>
                   <a:srgbClr val="4472C4"/>
                 </a:solidFill>
@@ -9348,9 +9950,9 @@
                 <a:cs typeface="Calibri"/>
                 <a:sym typeface="Calibri"/>
               </a:rPr>
-              <a:t>● RSI - Recursive Self-Improvement</a:t>
-            </a:r>
-            <a:endParaRPr b="1">
+              <a:t>Anthropic Resignation, Extinction Debate</a:t>
+            </a:r>
+            <a:endParaRPr sz="1300" b="1">
               <a:solidFill>
                 <a:srgbClr val="4472C4"/>
               </a:solidFill>
@@ -9361,17 +9963,22 @@
             </a:endParaRPr>
           </a:p>
           <a:p>
-            <a:pPr marL="171450" lvl="0" indent="-171450" algn="l" rtl="0">
-              <a:spcBef>
-                <a:spcPts val="0"/>
-              </a:spcBef>
-              <a:spcAft>
-                <a:spcPts val="0"/>
-              </a:spcAft>
-              <a:buNone/>
-            </a:pPr>
-            <a:r>
-              <a:rPr lang="en" b="1">
+            <a:pPr marL="171450" lvl="0" indent="-139700" algn="l" rtl="0">
+              <a:spcBef>
+                <a:spcPts val="0"/>
+              </a:spcBef>
+              <a:spcAft>
+                <a:spcPts val="0"/>
+              </a:spcAft>
+              <a:buClr>
+                <a:srgbClr val="4472C4"/>
+              </a:buClr>
+              <a:buSzPts val="1300"/>
+              <a:buFont typeface="Calibri"/>
+              <a:buChar char="●"/>
+            </a:pPr>
+            <a:r>
+              <a:rPr lang="en" sz="1300" b="1">
                 <a:solidFill>
                   <a:srgbClr val="4472C4"/>
                 </a:solidFill>
@@ -9380,9 +9987,9 @@
                 <a:cs typeface="Calibri"/>
                 <a:sym typeface="Calibri"/>
               </a:rPr>
-              <a:t>● Customers Expect Apps To Be Smart</a:t>
-            </a:r>
-            <a:endParaRPr b="1">
+              <a:t>Mistral Raises Record EU Round</a:t>
+            </a:r>
+            <a:endParaRPr sz="1300" b="1">
               <a:solidFill>
                 <a:srgbClr val="4472C4"/>
               </a:solidFill>
@@ -9393,17 +10000,22 @@
             </a:endParaRPr>
           </a:p>
           <a:p>
-            <a:pPr marL="171450" lvl="0" indent="-171450" algn="l" rtl="0">
-              <a:spcBef>
-                <a:spcPts val="0"/>
-              </a:spcBef>
-              <a:spcAft>
-                <a:spcPts val="0"/>
-              </a:spcAft>
-              <a:buNone/>
-            </a:pPr>
-            <a:r>
-              <a:rPr lang="en" b="1">
+            <a:pPr marL="171450" lvl="0" indent="-139700" algn="l" rtl="0">
+              <a:spcBef>
+                <a:spcPts val="0"/>
+              </a:spcBef>
+              <a:spcAft>
+                <a:spcPts val="0"/>
+              </a:spcAft>
+              <a:buClr>
+                <a:srgbClr val="4472C4"/>
+              </a:buClr>
+              <a:buSzPts val="1300"/>
+              <a:buFont typeface="Calibri"/>
+              <a:buChar char="●"/>
+            </a:pPr>
+            <a:r>
+              <a:rPr lang="en" sz="1300" b="1">
                 <a:solidFill>
                   <a:srgbClr val="4472C4"/>
                 </a:solidFill>
@@ -9412,9 +10024,9 @@
                 <a:cs typeface="Calibri"/>
                 <a:sym typeface="Calibri"/>
               </a:rPr>
-              <a:t>● Anthropic Resignation, Extinction Debate</a:t>
-            </a:r>
-            <a:endParaRPr b="1">
+              <a:t>Google Agentic Video: 88% Fewer Tokens</a:t>
+            </a:r>
+            <a:endParaRPr sz="1300" b="1">
               <a:solidFill>
                 <a:srgbClr val="4472C4"/>
               </a:solidFill>
@@ -9425,17 +10037,22 @@
             </a:endParaRPr>
           </a:p>
           <a:p>
-            <a:pPr marL="171450" lvl="0" indent="-171450" algn="l" rtl="0">
-              <a:spcBef>
-                <a:spcPts val="0"/>
-              </a:spcBef>
-              <a:spcAft>
-                <a:spcPts val="0"/>
-              </a:spcAft>
-              <a:buNone/>
-            </a:pPr>
-            <a:r>
-              <a:rPr lang="en" b="1">
+            <a:pPr marL="171450" lvl="0" indent="-139700" algn="l" rtl="0">
+              <a:spcBef>
+                <a:spcPts val="0"/>
+              </a:spcBef>
+              <a:spcAft>
+                <a:spcPts val="0"/>
+              </a:spcAft>
+              <a:buClr>
+                <a:srgbClr val="4472C4"/>
+              </a:buClr>
+              <a:buSzPts val="1300"/>
+              <a:buFont typeface="Calibri"/>
+              <a:buChar char="●"/>
+            </a:pPr>
+            <a:r>
+              <a:rPr lang="en" sz="1300" b="1">
                 <a:solidFill>
                   <a:srgbClr val="4472C4"/>
                 </a:solidFill>
@@ -9444,9 +10061,9 @@
                 <a:cs typeface="Calibri"/>
                 <a:sym typeface="Calibri"/>
               </a:rPr>
-              <a:t>● Mistral Raises Record EU Round</a:t>
-            </a:r>
-            <a:endParaRPr b="1">
+              <a:t>Music Industry Starts Licensing AI</a:t>
+            </a:r>
+            <a:endParaRPr sz="1300" b="1">
               <a:solidFill>
                 <a:srgbClr val="4472C4"/>
               </a:solidFill>
@@ -9457,17 +10074,22 @@
             </a:endParaRPr>
           </a:p>
           <a:p>
-            <a:pPr marL="171450" lvl="0" indent="-171450" algn="l" rtl="0">
-              <a:spcBef>
-                <a:spcPts val="0"/>
-              </a:spcBef>
-              <a:spcAft>
-                <a:spcPts val="0"/>
-              </a:spcAft>
-              <a:buNone/>
-            </a:pPr>
-            <a:r>
-              <a:rPr lang="en" b="1">
+            <a:pPr marL="171450" lvl="0" indent="-139700" algn="l" rtl="0">
+              <a:spcBef>
+                <a:spcPts val="0"/>
+              </a:spcBef>
+              <a:spcAft>
+                <a:spcPts val="0"/>
+              </a:spcAft>
+              <a:buClr>
+                <a:srgbClr val="4472C4"/>
+              </a:buClr>
+              <a:buSzPts val="1300"/>
+              <a:buFont typeface="Calibri"/>
+              <a:buChar char="●"/>
+            </a:pPr>
+            <a:r>
+              <a:rPr lang="en" sz="1300" b="1">
                 <a:solidFill>
                   <a:srgbClr val="4472C4"/>
                 </a:solidFill>
@@ -9476,9 +10098,9 @@
                 <a:cs typeface="Calibri"/>
                 <a:sym typeface="Calibri"/>
               </a:rPr>
-              <a:t>● Google Agentic Video: 88% Fewer Tokens</a:t>
-            </a:r>
-            <a:endParaRPr b="1">
+              <a:t>Anthropic: AI and US Jobs by 2030</a:t>
+            </a:r>
+            <a:endParaRPr sz="1300" b="1">
               <a:solidFill>
                 <a:srgbClr val="4472C4"/>
               </a:solidFill>
@@ -9489,17 +10111,22 @@
             </a:endParaRPr>
           </a:p>
           <a:p>
-            <a:pPr marL="171450" lvl="0" indent="-171450" algn="l" rtl="0">
-              <a:spcBef>
-                <a:spcPts val="0"/>
-              </a:spcBef>
-              <a:spcAft>
-                <a:spcPts val="0"/>
-              </a:spcAft>
-              <a:buNone/>
-            </a:pPr>
-            <a:r>
-              <a:rPr lang="en" b="1">
+            <a:pPr marL="171450" lvl="0" indent="-139700" algn="l" rtl="0">
+              <a:spcBef>
+                <a:spcPts val="0"/>
+              </a:spcBef>
+              <a:spcAft>
+                <a:spcPts val="0"/>
+              </a:spcAft>
+              <a:buClr>
+                <a:srgbClr val="4472C4"/>
+              </a:buClr>
+              <a:buSzPts val="1300"/>
+              <a:buFont typeface="Calibri"/>
+              <a:buChar char="●"/>
+            </a:pPr>
+            <a:r>
+              <a:rPr lang="en" sz="1300" b="1">
                 <a:solidFill>
                   <a:srgbClr val="4472C4"/>
                 </a:solidFill>
@@ -9508,9 +10135,9 @@
                 <a:cs typeface="Calibri"/>
                 <a:sym typeface="Calibri"/>
               </a:rPr>
-              <a:t>● Music Industry Starts Licensing AI</a:t>
-            </a:r>
-            <a:endParaRPr b="1">
+              <a:t>Apple Siri Upgrade</a:t>
+            </a:r>
+            <a:endParaRPr sz="1300" b="1">
               <a:solidFill>
                 <a:srgbClr val="4472C4"/>
               </a:solidFill>
@@ -9521,17 +10148,22 @@
             </a:endParaRPr>
           </a:p>
           <a:p>
-            <a:pPr marL="171450" lvl="0" indent="-171450" algn="l" rtl="0">
-              <a:spcBef>
-                <a:spcPts val="0"/>
-              </a:spcBef>
-              <a:spcAft>
-                <a:spcPts val="0"/>
-              </a:spcAft>
-              <a:buNone/>
-            </a:pPr>
-            <a:r>
-              <a:rPr lang="en" b="1">
+            <a:pPr marL="171450" lvl="0" indent="-139700" algn="l" rtl="0">
+              <a:spcBef>
+                <a:spcPts val="0"/>
+              </a:spcBef>
+              <a:spcAft>
+                <a:spcPts val="0"/>
+              </a:spcAft>
+              <a:buClr>
+                <a:srgbClr val="4472C4"/>
+              </a:buClr>
+              <a:buSzPts val="1300"/>
+              <a:buFont typeface="Calibri"/>
+              <a:buChar char="●"/>
+            </a:pPr>
+            <a:r>
+              <a:rPr lang="en" sz="1300" b="1">
                 <a:solidFill>
                   <a:srgbClr val="4472C4"/>
                 </a:solidFill>
@@ -9540,9 +10172,9 @@
                 <a:cs typeface="Calibri"/>
                 <a:sym typeface="Calibri"/>
               </a:rPr>
-              <a:t>● Anthropic: AI and US Jobs by 2030</a:t>
-            </a:r>
-            <a:endParaRPr b="1">
+              <a:t>AIUC Certifies AI Agents</a:t>
+            </a:r>
+            <a:endParaRPr sz="1300" b="1">
               <a:solidFill>
                 <a:srgbClr val="4472C4"/>
               </a:solidFill>
@@ -9553,17 +10185,22 @@
             </a:endParaRPr>
           </a:p>
           <a:p>
-            <a:pPr marL="171450" lvl="0" indent="-171450" algn="l" rtl="0">
-              <a:spcBef>
-                <a:spcPts val="0"/>
-              </a:spcBef>
-              <a:spcAft>
-                <a:spcPts val="0"/>
-              </a:spcAft>
-              <a:buNone/>
-            </a:pPr>
-            <a:r>
-              <a:rPr lang="en" b="1">
+            <a:pPr marL="171450" lvl="0" indent="-139700" algn="l" rtl="0">
+              <a:spcBef>
+                <a:spcPts val="0"/>
+              </a:spcBef>
+              <a:spcAft>
+                <a:spcPts val="0"/>
+              </a:spcAft>
+              <a:buClr>
+                <a:srgbClr val="4472C4"/>
+              </a:buClr>
+              <a:buSzPts val="1300"/>
+              <a:buFont typeface="Calibri"/>
+              <a:buChar char="●"/>
+            </a:pPr>
+            <a:r>
+              <a:rPr lang="en" sz="1300" b="1">
                 <a:solidFill>
                   <a:srgbClr val="4472C4"/>
                 </a:solidFill>
@@ -9572,9 +10209,9 @@
                 <a:cs typeface="Calibri"/>
                 <a:sym typeface="Calibri"/>
               </a:rPr>
-              <a:t>● Apple Siri Upgrade</a:t>
-            </a:r>
-            <a:endParaRPr b="1">
+              <a:t>Amodei: Pace the Frontier</a:t>
+            </a:r>
+            <a:endParaRPr sz="1300" b="1">
               <a:solidFill>
                 <a:srgbClr val="4472C4"/>
               </a:solidFill>
@@ -9585,17 +10222,22 @@
             </a:endParaRPr>
           </a:p>
           <a:p>
-            <a:pPr marL="171450" lvl="0" indent="-171450" algn="l" rtl="0">
-              <a:spcBef>
-                <a:spcPts val="0"/>
-              </a:spcBef>
-              <a:spcAft>
-                <a:spcPts val="0"/>
-              </a:spcAft>
-              <a:buNone/>
-            </a:pPr>
-            <a:r>
-              <a:rPr lang="en" b="1">
+            <a:pPr marL="171450" lvl="0" indent="-139700" algn="l" rtl="0">
+              <a:spcBef>
+                <a:spcPts val="0"/>
+              </a:spcBef>
+              <a:spcAft>
+                <a:spcPts val="0"/>
+              </a:spcAft>
+              <a:buClr>
+                <a:srgbClr val="4472C4"/>
+              </a:buClr>
+              <a:buSzPts val="1300"/>
+              <a:buFont typeface="Calibri"/>
+              <a:buChar char="●"/>
+            </a:pPr>
+            <a:r>
+              <a:rPr lang="en" sz="1300" b="1">
                 <a:solidFill>
                   <a:srgbClr val="4472C4"/>
                 </a:solidFill>
@@ -9604,9 +10246,9 @@
                 <a:cs typeface="Calibri"/>
                 <a:sym typeface="Calibri"/>
               </a:rPr>
-              <a:t>● AIUC Certifies AI Agents</a:t>
-            </a:r>
-            <a:endParaRPr b="1">
+              <a:t>OpenAI Delays IPO, Anthropic to Nasdaq</a:t>
+            </a:r>
+            <a:endParaRPr sz="1300" b="1">
               <a:solidFill>
                 <a:srgbClr val="4472C4"/>
               </a:solidFill>
@@ -9617,17 +10259,22 @@
             </a:endParaRPr>
           </a:p>
           <a:p>
-            <a:pPr marL="171450" lvl="0" indent="-171450" algn="l" rtl="0">
-              <a:spcBef>
-                <a:spcPts val="0"/>
-              </a:spcBef>
-              <a:spcAft>
-                <a:spcPts val="0"/>
-              </a:spcAft>
-              <a:buNone/>
-            </a:pPr>
-            <a:r>
-              <a:rPr lang="en" b="1">
+            <a:pPr marL="171450" lvl="0" indent="-139700" algn="l" rtl="0">
+              <a:spcBef>
+                <a:spcPts val="0"/>
+              </a:spcBef>
+              <a:spcAft>
+                <a:spcPts val="0"/>
+              </a:spcAft>
+              <a:buClr>
+                <a:srgbClr val="4472C4"/>
+              </a:buClr>
+              <a:buSzPts val="1300"/>
+              <a:buFont typeface="Calibri"/>
+              <a:buChar char="●"/>
+            </a:pPr>
+            <a:r>
+              <a:rPr lang="en" sz="1300" b="1">
                 <a:solidFill>
                   <a:srgbClr val="4472C4"/>
                 </a:solidFill>
@@ -9636,9 +10283,9 @@
                 <a:cs typeface="Calibri"/>
                 <a:sym typeface="Calibri"/>
               </a:rPr>
-              <a:t>● Amodei: Pace the Frontier</a:t>
-            </a:r>
-            <a:endParaRPr b="1">
+              <a:t>DeepSeek V4.1 Flash Release</a:t>
+            </a:r>
+            <a:endParaRPr sz="1300" b="1">
               <a:solidFill>
                 <a:srgbClr val="4472C4"/>
               </a:solidFill>
@@ -9649,17 +10296,22 @@
             </a:endParaRPr>
           </a:p>
           <a:p>
-            <a:pPr marL="171450" lvl="0" indent="-171450" algn="l" rtl="0">
-              <a:spcBef>
-                <a:spcPts val="0"/>
-              </a:spcBef>
-              <a:spcAft>
-                <a:spcPts val="0"/>
-              </a:spcAft>
-              <a:buNone/>
-            </a:pPr>
-            <a:r>
-              <a:rPr lang="en" b="1">
+            <a:pPr marL="171450" lvl="0" indent="-139700" algn="l" rtl="0">
+              <a:spcBef>
+                <a:spcPts val="0"/>
+              </a:spcBef>
+              <a:spcAft>
+                <a:spcPts val="0"/>
+              </a:spcAft>
+              <a:buClr>
+                <a:srgbClr val="4472C4"/>
+              </a:buClr>
+              <a:buSzPts val="1300"/>
+              <a:buFont typeface="Calibri"/>
+              <a:buChar char="●"/>
+            </a:pPr>
+            <a:r>
+              <a:rPr lang="en" sz="1300" b="1">
                 <a:solidFill>
                   <a:srgbClr val="4472C4"/>
                 </a:solidFill>
@@ -9668,9 +10320,9 @@
                 <a:cs typeface="Calibri"/>
                 <a:sym typeface="Calibri"/>
               </a:rPr>
-              <a:t>● OpenAI Delays IPO, Anthropic to Nasdaq</a:t>
-            </a:r>
-            <a:endParaRPr b="1">
+              <a:t>Cognition SWE-2 Coding Model</a:t>
+            </a:r>
+            <a:endParaRPr sz="1300" b="1">
               <a:solidFill>
                 <a:srgbClr val="4472C4"/>
               </a:solidFill>
@@ -9681,17 +10333,22 @@
             </a:endParaRPr>
           </a:p>
           <a:p>
-            <a:pPr marL="171450" lvl="0" indent="-171450" algn="l" rtl="0">
-              <a:spcBef>
-                <a:spcPts val="0"/>
-              </a:spcBef>
-              <a:spcAft>
-                <a:spcPts val="0"/>
-              </a:spcAft>
-              <a:buNone/>
-            </a:pPr>
-            <a:r>
-              <a:rPr lang="en" b="1">
+            <a:pPr marL="171450" lvl="0" indent="-139700" algn="l" rtl="0">
+              <a:spcBef>
+                <a:spcPts val="0"/>
+              </a:spcBef>
+              <a:spcAft>
+                <a:spcPts val="0"/>
+              </a:spcAft>
+              <a:buClr>
+                <a:srgbClr val="4472C4"/>
+              </a:buClr>
+              <a:buSzPts val="1300"/>
+              <a:buFont typeface="Calibri"/>
+              <a:buChar char="●"/>
+            </a:pPr>
+            <a:r>
+              <a:rPr lang="en" sz="1300" b="1">
                 <a:solidFill>
                   <a:srgbClr val="4472C4"/>
                 </a:solidFill>
@@ -9700,9 +10357,83 @@
                 <a:cs typeface="Calibri"/>
                 <a:sym typeface="Calibri"/>
               </a:rPr>
-              <a:t>● DeepSeek V4.1 Flash Release</a:t>
-            </a:r>
-            <a:endParaRPr b="1">
+              <a:t>OpenAI Financial Services on GPT-6 Astra</a:t>
+            </a:r>
+            <a:endParaRPr sz="1300" b="1">
+              <a:solidFill>
+                <a:srgbClr val="4472C4"/>
+              </a:solidFill>
+              <a:latin typeface="Calibri"/>
+              <a:ea typeface="Calibri"/>
+              <a:cs typeface="Calibri"/>
+              <a:sym typeface="Calibri"/>
+            </a:endParaRPr>
+          </a:p>
+          <a:p>
+            <a:pPr marL="171450" lvl="0" indent="-139700" algn="l" rtl="0">
+              <a:spcBef>
+                <a:spcPts val="0"/>
+              </a:spcBef>
+              <a:spcAft>
+                <a:spcPts val="0"/>
+              </a:spcAft>
+              <a:buClr>
+                <a:srgbClr val="4472C4"/>
+              </a:buClr>
+              <a:buSzPts val="1300"/>
+              <a:buFont typeface="Calibri"/>
+              <a:buChar char="●"/>
+            </a:pPr>
+            <a:r>
+              <a:rPr lang="en" sz="1300" b="1">
+                <a:solidFill>
+                  <a:srgbClr val="4472C4"/>
+                </a:solidFill>
+                <a:latin typeface="Calibri"/>
+                <a:ea typeface="Calibri"/>
+                <a:cs typeface="Calibri"/>
+                <a:sym typeface="Calibri"/>
+              </a:rPr>
+              <a:t>Anthropic Claude Money</a:t>
+            </a:r>
+            <a:endParaRPr sz="1300" b="1">
+              <a:solidFill>
+                <a:srgbClr val="4472C4"/>
+              </a:solidFill>
+              <a:latin typeface="Calibri"/>
+              <a:ea typeface="Calibri"/>
+              <a:cs typeface="Calibri"/>
+              <a:sym typeface="Calibri"/>
+            </a:endParaRPr>
+          </a:p>
+          <a:p>
+            <a:pPr marL="171450" lvl="0" indent="-139700" algn="l" rtl="0">
+              <a:spcBef>
+                <a:spcPts val="0"/>
+              </a:spcBef>
+              <a:spcAft>
+                <a:spcPts val="0"/>
+              </a:spcAft>
+              <a:buClr>
+                <a:srgbClr val="4472C4"/>
+              </a:buClr>
+              <a:buSzPts val="1300"/>
+              <a:buFont typeface="Calibri"/>
+              <a:buChar char="●"/>
+            </a:pPr>
+            <a:r>
+              <a:rPr lang="en" sz="1300" b="1">
+                <a:solidFill>
+                  <a:srgbClr val="4472C4"/>
+                </a:solidFill>
+                <a:latin typeface="Calibri"/>
+                <a:ea typeface="Calibri"/>
+                <a:cs typeface="Calibri"/>
+                <a:sym typeface="Calibri"/>
+              </a:rPr>
+              <a:t>OpenAI Buys Glass Imaging</a:t>
+            </a:r>
+            <a:endParaRPr sz="1300" b="1">
               <a:solidFill>
                 <a:srgbClr val="4472C4"/>
               </a:solidFill>
@@ -9722,13 +10453,15 @@
         </p:nvSpPr>
         <p:spPr>
           <a:xfrm>
-            <a:off x="4590288" y="532754"/>
-            <a:ext cx="4517100" cy="4494600"/>
+            <a:off x="3505582" y="535967"/>
+            <a:ext cx="3518700" cy="4620900"/>
           </a:xfrm>
           <a:prstGeom prst="rect">
             <a:avLst/>
           </a:prstGeom>
-          <a:noFill/>
+          <a:solidFill>
+            <a:srgbClr val="D9EAD3"/>
+          </a:solidFill>
           <a:ln w="9525" cap="flat" cmpd="sng">
             <a:solidFill>
               <a:srgbClr val="FF0000"/>
@@ -9740,22 +10473,27 @@
           </a:ln>
         </p:spPr>
         <p:txBody>
-          <a:bodyPr spcFirstLastPara="1" wrap="square" lIns="91425" tIns="91425" rIns="91425" bIns="91425" anchor="t" anchorCtr="0">
+          <a:bodyPr spcFirstLastPara="1" wrap="square" lIns="9125" tIns="9125" rIns="9125" bIns="9125" anchor="t" anchorCtr="0">
             <a:spAutoFit/>
           </a:bodyPr>
           <a:lstStyle/>
           <a:p>
-            <a:pPr marL="171450" lvl="0" indent="-171450" algn="l" rtl="0">
-              <a:spcBef>
-                <a:spcPts val="0"/>
-              </a:spcBef>
-              <a:spcAft>
-                <a:spcPts val="0"/>
-              </a:spcAft>
-              <a:buNone/>
-            </a:pPr>
-            <a:r>
-              <a:rPr lang="en" b="1">
+            <a:pPr marL="171450" lvl="0" indent="-139700" algn="l" rtl="0">
+              <a:spcBef>
+                <a:spcPts val="0"/>
+              </a:spcBef>
+              <a:spcAft>
+                <a:spcPts val="0"/>
+              </a:spcAft>
+              <a:buClr>
+                <a:srgbClr val="4472C4"/>
+              </a:buClr>
+              <a:buSzPts val="1300"/>
+              <a:buFont typeface="Calibri"/>
+              <a:buChar char="●"/>
+            </a:pPr>
+            <a:r>
+              <a:rPr lang="en" sz="1300" b="1">
                 <a:solidFill>
                   <a:srgbClr val="4472C4"/>
                 </a:solidFill>
@@ -9764,9 +10502,9 @@
                 <a:cs typeface="Calibri"/>
                 <a:sym typeface="Calibri"/>
               </a:rPr>
-              <a:t>● Cognition SWE-2 Coding Model</a:t>
-            </a:r>
-            <a:endParaRPr b="1">
+              <a:t>Killed By AI - 123 products</a:t>
+            </a:r>
+            <a:endParaRPr sz="1300" b="1">
               <a:solidFill>
                 <a:srgbClr val="4472C4"/>
               </a:solidFill>
@@ -9777,17 +10515,22 @@
             </a:endParaRPr>
           </a:p>
           <a:p>
-            <a:pPr marL="171450" lvl="0" indent="-171450" algn="l" rtl="0">
-              <a:spcBef>
-                <a:spcPts val="0"/>
-              </a:spcBef>
-              <a:spcAft>
-                <a:spcPts val="0"/>
-              </a:spcAft>
-              <a:buNone/>
-            </a:pPr>
-            <a:r>
-              <a:rPr lang="en" b="1">
+            <a:pPr marL="171450" lvl="0" indent="-139700" algn="l" rtl="0">
+              <a:spcBef>
+                <a:spcPts val="0"/>
+              </a:spcBef>
+              <a:spcAft>
+                <a:spcPts val="0"/>
+              </a:spcAft>
+              <a:buClr>
+                <a:srgbClr val="4472C4"/>
+              </a:buClr>
+              <a:buSzPts val="1300"/>
+              <a:buFont typeface="Calibri"/>
+              <a:buChar char="●"/>
+            </a:pPr>
+            <a:r>
+              <a:rPr lang="en" sz="1300" b="1">
                 <a:solidFill>
                   <a:srgbClr val="4472C4"/>
                 </a:solidFill>
@@ -9796,9 +10539,9 @@
                 <a:cs typeface="Calibri"/>
                 <a:sym typeface="Calibri"/>
               </a:rPr>
-              <a:t>● OpenAI Financial Services on GPT-6 Astra</a:t>
-            </a:r>
-            <a:endParaRPr b="1">
+              <a:t>TopView MCP - AI Ad Workflow</a:t>
+            </a:r>
+            <a:endParaRPr sz="1300" b="1">
               <a:solidFill>
                 <a:srgbClr val="4472C4"/>
               </a:solidFill>
@@ -9809,17 +10552,22 @@
             </a:endParaRPr>
           </a:p>
           <a:p>
-            <a:pPr marL="171450" lvl="0" indent="-171450" algn="l" rtl="0">
-              <a:spcBef>
-                <a:spcPts val="0"/>
-              </a:spcBef>
-              <a:spcAft>
-                <a:spcPts val="0"/>
-              </a:spcAft>
-              <a:buNone/>
-            </a:pPr>
-            <a:r>
-              <a:rPr lang="en" b="1">
+            <a:pPr marL="171450" lvl="0" indent="-139700" algn="l" rtl="0">
+              <a:spcBef>
+                <a:spcPts val="0"/>
+              </a:spcBef>
+              <a:spcAft>
+                <a:spcPts val="0"/>
+              </a:spcAft>
+              <a:buClr>
+                <a:srgbClr val="4472C4"/>
+              </a:buClr>
+              <a:buSzPts val="1300"/>
+              <a:buFont typeface="Calibri"/>
+              <a:buChar char="●"/>
+            </a:pPr>
+            <a:r>
+              <a:rPr lang="en" sz="1300" b="1">
                 <a:solidFill>
                   <a:srgbClr val="4472C4"/>
                 </a:solidFill>
@@ -9828,9 +10576,9 @@
                 <a:cs typeface="Calibri"/>
                 <a:sym typeface="Calibri"/>
               </a:rPr>
-              <a:t>● Anthropic Claude Money</a:t>
-            </a:r>
-            <a:endParaRPr b="1">
+              <a:t>Claudex - Claude Code + OpenAI Codex</a:t>
+            </a:r>
+            <a:endParaRPr sz="1300" b="1">
               <a:solidFill>
                 <a:srgbClr val="4472C4"/>
               </a:solidFill>
@@ -9841,17 +10589,22 @@
             </a:endParaRPr>
           </a:p>
           <a:p>
-            <a:pPr marL="171450" lvl="0" indent="-171450" algn="l" rtl="0">
-              <a:spcBef>
-                <a:spcPts val="0"/>
-              </a:spcBef>
-              <a:spcAft>
-                <a:spcPts val="0"/>
-              </a:spcAft>
-              <a:buNone/>
-            </a:pPr>
-            <a:r>
-              <a:rPr lang="en" b="1">
+            <a:pPr marL="171450" lvl="0" indent="-139700" algn="l" rtl="0">
+              <a:spcBef>
+                <a:spcPts val="0"/>
+              </a:spcBef>
+              <a:spcAft>
+                <a:spcPts val="0"/>
+              </a:spcAft>
+              <a:buClr>
+                <a:srgbClr val="4472C4"/>
+              </a:buClr>
+              <a:buSzPts val="1300"/>
+              <a:buFont typeface="Calibri"/>
+              <a:buChar char="●"/>
+            </a:pPr>
+            <a:r>
+              <a:rPr lang="en" sz="1300" b="1">
                 <a:solidFill>
                   <a:srgbClr val="4472C4"/>
                 </a:solidFill>
@@ -9860,9 +10613,9 @@
                 <a:cs typeface="Calibri"/>
                 <a:sym typeface="Calibri"/>
               </a:rPr>
-              <a:t>● OpenAI Buys Glass Imaging</a:t>
-            </a:r>
-            <a:endParaRPr b="1">
+              <a:t>Google Pics - Precise AI Editing</a:t>
+            </a:r>
+            <a:endParaRPr sz="1300" b="1">
               <a:solidFill>
                 <a:srgbClr val="4472C4"/>
               </a:solidFill>
@@ -9873,17 +10626,22 @@
             </a:endParaRPr>
           </a:p>
           <a:p>
-            <a:pPr marL="171450" lvl="0" indent="-171450" algn="l" rtl="0">
-              <a:spcBef>
-                <a:spcPts val="0"/>
-              </a:spcBef>
-              <a:spcAft>
-                <a:spcPts val="0"/>
-              </a:spcAft>
-              <a:buNone/>
-            </a:pPr>
-            <a:r>
-              <a:rPr lang="en" b="1">
+            <a:pPr marL="171450" lvl="0" indent="-139700" algn="l" rtl="0">
+              <a:spcBef>
+                <a:spcPts val="0"/>
+              </a:spcBef>
+              <a:spcAft>
+                <a:spcPts val="0"/>
+              </a:spcAft>
+              <a:buClr>
+                <a:srgbClr val="4472C4"/>
+              </a:buClr>
+              <a:buSzPts val="1300"/>
+              <a:buFont typeface="Calibri"/>
+              <a:buChar char="●"/>
+            </a:pPr>
+            <a:r>
+              <a:rPr lang="en" sz="1300" b="1">
                 <a:solidFill>
                   <a:srgbClr val="4472C4"/>
                 </a:solidFill>
@@ -9892,9 +10650,9 @@
                 <a:cs typeface="Calibri"/>
                 <a:sym typeface="Calibri"/>
               </a:rPr>
-              <a:t>● Killed By AI - 123 products</a:t>
-            </a:r>
-            <a:endParaRPr b="1">
+              <a:t>Ecdysis - Agent Harness Training (China)</a:t>
+            </a:r>
+            <a:endParaRPr sz="1300" b="1">
               <a:solidFill>
                 <a:srgbClr val="4472C4"/>
               </a:solidFill>
@@ -9905,17 +10663,22 @@
             </a:endParaRPr>
           </a:p>
           <a:p>
-            <a:pPr marL="171450" lvl="0" indent="-171450" algn="l" rtl="0">
-              <a:spcBef>
-                <a:spcPts val="0"/>
-              </a:spcBef>
-              <a:spcAft>
-                <a:spcPts val="0"/>
-              </a:spcAft>
-              <a:buNone/>
-            </a:pPr>
-            <a:r>
-              <a:rPr lang="en" b="1">
+            <a:pPr marL="171450" lvl="0" indent="-139700" algn="l" rtl="0">
+              <a:spcBef>
+                <a:spcPts val="0"/>
+              </a:spcBef>
+              <a:spcAft>
+                <a:spcPts val="0"/>
+              </a:spcAft>
+              <a:buClr>
+                <a:srgbClr val="4472C4"/>
+              </a:buClr>
+              <a:buSzPts val="1300"/>
+              <a:buFont typeface="Calibri"/>
+              <a:buChar char="●"/>
+            </a:pPr>
+            <a:r>
+              <a:rPr lang="en" sz="1300" b="1">
                 <a:solidFill>
                   <a:srgbClr val="4472C4"/>
                 </a:solidFill>
@@ -9924,9 +10687,9 @@
                 <a:cs typeface="Calibri"/>
                 <a:sym typeface="Calibri"/>
               </a:rPr>
-              <a:t>● TopView MCP - AI Ad Workflow</a:t>
-            </a:r>
-            <a:endParaRPr b="1">
+              <a:t>Krea Agents - Creative AI Workflow</a:t>
+            </a:r>
+            <a:endParaRPr sz="1300" b="1">
               <a:solidFill>
                 <a:srgbClr val="4472C4"/>
               </a:solidFill>
@@ -9937,17 +10700,22 @@
             </a:endParaRPr>
           </a:p>
           <a:p>
-            <a:pPr marL="171450" lvl="0" indent="-171450" algn="l" rtl="0">
-              <a:spcBef>
-                <a:spcPts val="0"/>
-              </a:spcBef>
-              <a:spcAft>
-                <a:spcPts val="0"/>
-              </a:spcAft>
-              <a:buNone/>
-            </a:pPr>
-            <a:r>
-              <a:rPr lang="en" b="1">
+            <a:pPr marL="171450" lvl="0" indent="-139700" algn="l" rtl="0">
+              <a:spcBef>
+                <a:spcPts val="0"/>
+              </a:spcBef>
+              <a:spcAft>
+                <a:spcPts val="0"/>
+              </a:spcAft>
+              <a:buClr>
+                <a:srgbClr val="4472C4"/>
+              </a:buClr>
+              <a:buSzPts val="1300"/>
+              <a:buFont typeface="Calibri"/>
+              <a:buChar char="●"/>
+            </a:pPr>
+            <a:r>
+              <a:rPr lang="en" sz="1300" b="1">
                 <a:solidFill>
                   <a:srgbClr val="4472C4"/>
                 </a:solidFill>
@@ -9956,9 +10724,9 @@
                 <a:cs typeface="Calibri"/>
                 <a:sym typeface="Calibri"/>
               </a:rPr>
-              <a:t>● Claudex - Claude Code + OpenAI Codex</a:t>
-            </a:r>
-            <a:endParaRPr b="1">
+              <a:t>Lightning v3.1 Pro Text-to-speech</a:t>
+            </a:r>
+            <a:endParaRPr sz="1300" b="1">
               <a:solidFill>
                 <a:srgbClr val="4472C4"/>
               </a:solidFill>
@@ -9969,17 +10737,22 @@
             </a:endParaRPr>
           </a:p>
           <a:p>
-            <a:pPr marL="171450" lvl="0" indent="-171450" algn="l" rtl="0">
-              <a:spcBef>
-                <a:spcPts val="0"/>
-              </a:spcBef>
-              <a:spcAft>
-                <a:spcPts val="0"/>
-              </a:spcAft>
-              <a:buNone/>
-            </a:pPr>
-            <a:r>
-              <a:rPr lang="en" b="1">
+            <a:pPr marL="171450" lvl="0" indent="-139700" algn="l" rtl="0">
+              <a:spcBef>
+                <a:spcPts val="0"/>
+              </a:spcBef>
+              <a:spcAft>
+                <a:spcPts val="0"/>
+              </a:spcAft>
+              <a:buClr>
+                <a:srgbClr val="4472C4"/>
+              </a:buClr>
+              <a:buSzPts val="1300"/>
+              <a:buFont typeface="Calibri"/>
+              <a:buChar char="●"/>
+            </a:pPr>
+            <a:r>
+              <a:rPr lang="en" sz="1300" b="1">
                 <a:solidFill>
                   <a:srgbClr val="4472C4"/>
                 </a:solidFill>
@@ -9988,9 +10761,9 @@
                 <a:cs typeface="Calibri"/>
                 <a:sym typeface="Calibri"/>
               </a:rPr>
-              <a:t>● Google Pics - Precise AI Editing</a:t>
-            </a:r>
-            <a:endParaRPr b="1">
+              <a:t>Nex-N2.5 - Free Agent Models from China</a:t>
+            </a:r>
+            <a:endParaRPr sz="1300" b="1">
               <a:solidFill>
                 <a:srgbClr val="4472C4"/>
               </a:solidFill>
@@ -10001,17 +10774,22 @@
             </a:endParaRPr>
           </a:p>
           <a:p>
-            <a:pPr marL="171450" lvl="0" indent="-171450" algn="l" rtl="0">
-              <a:spcBef>
-                <a:spcPts val="0"/>
-              </a:spcBef>
-              <a:spcAft>
-                <a:spcPts val="0"/>
-              </a:spcAft>
-              <a:buNone/>
-            </a:pPr>
-            <a:r>
-              <a:rPr lang="en" b="1">
+            <a:pPr marL="171450" lvl="0" indent="-139700" algn="l" rtl="0">
+              <a:spcBef>
+                <a:spcPts val="0"/>
+              </a:spcBef>
+              <a:spcAft>
+                <a:spcPts val="0"/>
+              </a:spcAft>
+              <a:buClr>
+                <a:srgbClr val="4472C4"/>
+              </a:buClr>
+              <a:buSzPts val="1300"/>
+              <a:buFont typeface="Calibri"/>
+              <a:buChar char="●"/>
+            </a:pPr>
+            <a:r>
+              <a:rPr lang="en" sz="1300" b="1">
                 <a:solidFill>
                   <a:srgbClr val="4472C4"/>
                 </a:solidFill>
@@ -10020,9 +10798,9 @@
                 <a:cs typeface="Calibri"/>
                 <a:sym typeface="Calibri"/>
               </a:rPr>
-              <a:t>● Ecdysis - Agent Harness Training (China)</a:t>
-            </a:r>
-            <a:endParaRPr b="1">
+              <a:t>TypeSafe AI - Jev Decision Model</a:t>
+            </a:r>
+            <a:endParaRPr sz="1300" b="1">
               <a:solidFill>
                 <a:srgbClr val="4472C4"/>
               </a:solidFill>
@@ -10033,17 +10811,22 @@
             </a:endParaRPr>
           </a:p>
           <a:p>
-            <a:pPr marL="171450" lvl="0" indent="-171450" algn="l" rtl="0">
-              <a:spcBef>
-                <a:spcPts val="0"/>
-              </a:spcBef>
-              <a:spcAft>
-                <a:spcPts val="0"/>
-              </a:spcAft>
-              <a:buNone/>
-            </a:pPr>
-            <a:r>
-              <a:rPr lang="en" b="1">
+            <a:pPr marL="171450" lvl="0" indent="-139700" algn="l" rtl="0">
+              <a:spcBef>
+                <a:spcPts val="0"/>
+              </a:spcBef>
+              <a:spcAft>
+                <a:spcPts val="0"/>
+              </a:spcAft>
+              <a:buClr>
+                <a:srgbClr val="4472C4"/>
+              </a:buClr>
+              <a:buSzPts val="1300"/>
+              <a:buFont typeface="Calibri"/>
+              <a:buChar char="●"/>
+            </a:pPr>
+            <a:r>
+              <a:rPr lang="en" sz="1300" b="1">
                 <a:solidFill>
                   <a:srgbClr val="4472C4"/>
                 </a:solidFill>
@@ -10052,9 +10835,9 @@
                 <a:cs typeface="Calibri"/>
                 <a:sym typeface="Calibri"/>
               </a:rPr>
-              <a:t>● Krea Agents - Creative AI Workflow</a:t>
-            </a:r>
-            <a:endParaRPr b="1">
+              <a:t>Cactus Needle 3: Tiny Automation AI</a:t>
+            </a:r>
+            <a:endParaRPr sz="1300" b="1">
               <a:solidFill>
                 <a:srgbClr val="4472C4"/>
               </a:solidFill>
@@ -10065,17 +10848,22 @@
             </a:endParaRPr>
           </a:p>
           <a:p>
-            <a:pPr marL="171450" lvl="0" indent="-171450" algn="l" rtl="0">
-              <a:spcBef>
-                <a:spcPts val="0"/>
-              </a:spcBef>
-              <a:spcAft>
-                <a:spcPts val="0"/>
-              </a:spcAft>
-              <a:buNone/>
-            </a:pPr>
-            <a:r>
-              <a:rPr lang="en" b="1">
+            <a:pPr marL="171450" lvl="0" indent="-139700" algn="l" rtl="0">
+              <a:spcBef>
+                <a:spcPts val="0"/>
+              </a:spcBef>
+              <a:spcAft>
+                <a:spcPts val="0"/>
+              </a:spcAft>
+              <a:buClr>
+                <a:srgbClr val="4472C4"/>
+              </a:buClr>
+              <a:buSzPts val="1300"/>
+              <a:buFont typeface="Calibri"/>
+              <a:buChar char="●"/>
+            </a:pPr>
+            <a:r>
+              <a:rPr lang="en" sz="1300" b="1">
                 <a:solidFill>
                   <a:srgbClr val="4472C4"/>
                 </a:solidFill>
@@ -10084,9 +10872,9 @@
                 <a:cs typeface="Calibri"/>
                 <a:sym typeface="Calibri"/>
               </a:rPr>
-              <a:t>● Lightning v3.1 Pro Text-to-speech</a:t>
-            </a:r>
-            <a:endParaRPr b="1">
+              <a:t>Periodic Labs' NeonModel</a:t>
+            </a:r>
+            <a:endParaRPr sz="1300" b="1">
               <a:solidFill>
                 <a:srgbClr val="4472C4"/>
               </a:solidFill>
@@ -10097,17 +10885,22 @@
             </a:endParaRPr>
           </a:p>
           <a:p>
-            <a:pPr marL="171450" lvl="0" indent="-171450" algn="l" rtl="0">
-              <a:spcBef>
-                <a:spcPts val="0"/>
-              </a:spcBef>
-              <a:spcAft>
-                <a:spcPts val="0"/>
-              </a:spcAft>
-              <a:buNone/>
-            </a:pPr>
-            <a:r>
-              <a:rPr lang="en" b="1">
+            <a:pPr marL="171450" lvl="0" indent="-139700" algn="l" rtl="0">
+              <a:spcBef>
+                <a:spcPts val="0"/>
+              </a:spcBef>
+              <a:spcAft>
+                <a:spcPts val="0"/>
+              </a:spcAft>
+              <a:buClr>
+                <a:srgbClr val="4472C4"/>
+              </a:buClr>
+              <a:buSzPts val="1300"/>
+              <a:buFont typeface="Calibri"/>
+              <a:buChar char="●"/>
+            </a:pPr>
+            <a:r>
+              <a:rPr lang="en" sz="1300" b="1">
                 <a:solidFill>
                   <a:srgbClr val="4472C4"/>
                 </a:solidFill>
@@ -10116,9 +10909,9 @@
                 <a:cs typeface="Calibri"/>
                 <a:sym typeface="Calibri"/>
               </a:rPr>
-              <a:t>● Nex-N2.5 - Free Agent Models from China</a:t>
-            </a:r>
-            <a:endParaRPr b="1">
+              <a:t>Google Gemini 3.8 Live Voice Model</a:t>
+            </a:r>
+            <a:endParaRPr sz="1300" b="1">
               <a:solidFill>
                 <a:srgbClr val="4472C4"/>
               </a:solidFill>
@@ -10129,17 +10922,22 @@
             </a:endParaRPr>
           </a:p>
           <a:p>
-            <a:pPr marL="171450" lvl="0" indent="-171450" algn="l" rtl="0">
-              <a:spcBef>
-                <a:spcPts val="0"/>
-              </a:spcBef>
-              <a:spcAft>
-                <a:spcPts val="0"/>
-              </a:spcAft>
-              <a:buNone/>
-            </a:pPr>
-            <a:r>
-              <a:rPr lang="en" b="1">
+            <a:pPr marL="171450" lvl="0" indent="-139700" algn="l" rtl="0">
+              <a:spcBef>
+                <a:spcPts val="0"/>
+              </a:spcBef>
+              <a:spcAft>
+                <a:spcPts val="0"/>
+              </a:spcAft>
+              <a:buClr>
+                <a:srgbClr val="4472C4"/>
+              </a:buClr>
+              <a:buSzPts val="1300"/>
+              <a:buFont typeface="Calibri"/>
+              <a:buChar char="●"/>
+            </a:pPr>
+            <a:r>
+              <a:rPr lang="en" sz="1300" b="1">
                 <a:solidFill>
                   <a:srgbClr val="4472C4"/>
                 </a:solidFill>
@@ -10148,9 +10946,9 @@
                 <a:cs typeface="Calibri"/>
                 <a:sym typeface="Calibri"/>
               </a:rPr>
-              <a:t>● TypeSafe AI - Jev Decision Model</a:t>
-            </a:r>
-            <a:endParaRPr b="1">
+              <a:t>Salesforce Koa CRM reasoning model</a:t>
+            </a:r>
+            <a:endParaRPr sz="1300" b="1">
               <a:solidFill>
                 <a:srgbClr val="4472C4"/>
               </a:solidFill>
@@ -10161,17 +10959,22 @@
             </a:endParaRPr>
           </a:p>
           <a:p>
-            <a:pPr marL="171450" lvl="0" indent="-171450" algn="l" rtl="0">
-              <a:spcBef>
-                <a:spcPts val="0"/>
-              </a:spcBef>
-              <a:spcAft>
-                <a:spcPts val="0"/>
-              </a:spcAft>
-              <a:buNone/>
-            </a:pPr>
-            <a:r>
-              <a:rPr lang="en" b="1">
+            <a:pPr marL="171450" lvl="0" indent="-139700" algn="l" rtl="0">
+              <a:spcBef>
+                <a:spcPts val="0"/>
+              </a:spcBef>
+              <a:spcAft>
+                <a:spcPts val="0"/>
+              </a:spcAft>
+              <a:buClr>
+                <a:srgbClr val="4472C4"/>
+              </a:buClr>
+              <a:buSzPts val="1300"/>
+              <a:buFont typeface="Calibri"/>
+              <a:buChar char="●"/>
+            </a:pPr>
+            <a:r>
+              <a:rPr lang="en" sz="1300" b="1">
                 <a:solidFill>
                   <a:srgbClr val="4472C4"/>
                 </a:solidFill>
@@ -10180,9 +10983,9 @@
                 <a:cs typeface="Calibri"/>
                 <a:sym typeface="Calibri"/>
               </a:rPr>
-              <a:t>● Periodic Labs' NeonModel</a:t>
-            </a:r>
-            <a:endParaRPr b="1">
+              <a:t>Nous Hermes: 1,393-Agent Refactor</a:t>
+            </a:r>
+            <a:endParaRPr sz="1300" b="1">
               <a:solidFill>
                 <a:srgbClr val="4472C4"/>
               </a:solidFill>
@@ -10193,17 +10996,22 @@
             </a:endParaRPr>
           </a:p>
           <a:p>
-            <a:pPr marL="171450" lvl="0" indent="-171450" algn="l" rtl="0">
-              <a:spcBef>
-                <a:spcPts val="0"/>
-              </a:spcBef>
-              <a:spcAft>
-                <a:spcPts val="0"/>
-              </a:spcAft>
-              <a:buNone/>
-            </a:pPr>
-            <a:r>
-              <a:rPr lang="en" b="1">
+            <a:pPr marL="171450" lvl="0" indent="-139700" algn="l" rtl="0">
+              <a:spcBef>
+                <a:spcPts val="0"/>
+              </a:spcBef>
+              <a:spcAft>
+                <a:spcPts val="0"/>
+              </a:spcAft>
+              <a:buClr>
+                <a:srgbClr val="4472C4"/>
+              </a:buClr>
+              <a:buSzPts val="1300"/>
+              <a:buFont typeface="Calibri"/>
+              <a:buChar char="●"/>
+            </a:pPr>
+            <a:r>
+              <a:rPr lang="en" sz="1300" b="1">
                 <a:solidFill>
                   <a:srgbClr val="4472C4"/>
                 </a:solidFill>
@@ -10212,9 +11020,9 @@
                 <a:cs typeface="Calibri"/>
                 <a:sym typeface="Calibri"/>
               </a:rPr>
-              <a:t>● Google Gemini 3.8 Live Voice Model</a:t>
-            </a:r>
-            <a:endParaRPr b="1">
+              <a:t>Z.ai, the maker of GLM, raises $5 Bln</a:t>
+            </a:r>
+            <a:endParaRPr sz="1300" b="1">
               <a:solidFill>
                 <a:srgbClr val="4472C4"/>
               </a:solidFill>
@@ -10225,17 +11033,22 @@
             </a:endParaRPr>
           </a:p>
           <a:p>
-            <a:pPr marL="171450" lvl="0" indent="-171450" algn="l" rtl="0">
-              <a:spcBef>
-                <a:spcPts val="0"/>
-              </a:spcBef>
-              <a:spcAft>
-                <a:spcPts val="0"/>
-              </a:spcAft>
-              <a:buNone/>
-            </a:pPr>
-            <a:r>
-              <a:rPr lang="en" b="1">
+            <a:pPr marL="171450" lvl="0" indent="-139700" algn="l" rtl="0">
+              <a:spcBef>
+                <a:spcPts val="0"/>
+              </a:spcBef>
+              <a:spcAft>
+                <a:spcPts val="0"/>
+              </a:spcAft>
+              <a:buClr>
+                <a:srgbClr val="4472C4"/>
+              </a:buClr>
+              <a:buSzPts val="1300"/>
+              <a:buFont typeface="Calibri"/>
+              <a:buChar char="●"/>
+            </a:pPr>
+            <a:r>
+              <a:rPr lang="en" sz="1300" b="1">
                 <a:solidFill>
                   <a:srgbClr val="4472C4"/>
                 </a:solidFill>
@@ -10244,9 +11057,9 @@
                 <a:cs typeface="Calibri"/>
                 <a:sym typeface="Calibri"/>
               </a:rPr>
-              <a:t>● Salesforce Koa CRM reasoning model</a:t>
-            </a:r>
-            <a:endParaRPr b="1">
+              <a:t>Odyssey-3 World Model for Robots</a:t>
+            </a:r>
+            <a:endParaRPr sz="1300" b="1">
               <a:solidFill>
                 <a:srgbClr val="4472C4"/>
               </a:solidFill>
@@ -10257,17 +11070,22 @@
             </a:endParaRPr>
           </a:p>
           <a:p>
-            <a:pPr marL="171450" lvl="0" indent="-171450" algn="l" rtl="0">
-              <a:spcBef>
-                <a:spcPts val="0"/>
-              </a:spcBef>
-              <a:spcAft>
-                <a:spcPts val="0"/>
-              </a:spcAft>
-              <a:buNone/>
-            </a:pPr>
-            <a:r>
-              <a:rPr lang="en" b="1">
+            <a:pPr marL="171450" lvl="0" indent="-139700" algn="l" rtl="0">
+              <a:spcBef>
+                <a:spcPts val="0"/>
+              </a:spcBef>
+              <a:spcAft>
+                <a:spcPts val="0"/>
+              </a:spcAft>
+              <a:buClr>
+                <a:srgbClr val="4472C4"/>
+              </a:buClr>
+              <a:buSzPts val="1300"/>
+              <a:buFont typeface="Calibri"/>
+              <a:buChar char="●"/>
+            </a:pPr>
+            <a:r>
+              <a:rPr lang="en" sz="1300" b="1">
                 <a:solidFill>
                   <a:srgbClr val="4472C4"/>
                 </a:solidFill>
@@ -10276,9 +11094,9 @@
                 <a:cs typeface="Calibri"/>
                 <a:sym typeface="Calibri"/>
               </a:rPr>
-              <a:t>● Nous Hermes: 1,393-Agent Refactor</a:t>
-            </a:r>
-            <a:endParaRPr b="1">
+              <a:t>Google Home MCP</a:t>
+            </a:r>
+            <a:endParaRPr sz="1300" b="1">
               <a:solidFill>
                 <a:srgbClr val="4472C4"/>
               </a:solidFill>
@@ -10289,17 +11107,22 @@
             </a:endParaRPr>
           </a:p>
           <a:p>
-            <a:pPr marL="171450" lvl="0" indent="-171450" algn="l" rtl="0">
-              <a:spcBef>
-                <a:spcPts val="0"/>
-              </a:spcBef>
-              <a:spcAft>
-                <a:spcPts val="0"/>
-              </a:spcAft>
-              <a:buNone/>
-            </a:pPr>
-            <a:r>
-              <a:rPr lang="en" b="1">
+            <a:pPr marL="171450" lvl="0" indent="-139700" algn="l" rtl="0">
+              <a:spcBef>
+                <a:spcPts val="0"/>
+              </a:spcBef>
+              <a:spcAft>
+                <a:spcPts val="0"/>
+              </a:spcAft>
+              <a:buClr>
+                <a:srgbClr val="4472C4"/>
+              </a:buClr>
+              <a:buSzPts val="1300"/>
+              <a:buFont typeface="Calibri"/>
+              <a:buChar char="●"/>
+            </a:pPr>
+            <a:r>
+              <a:rPr lang="en" sz="1300" b="1">
                 <a:solidFill>
                   <a:srgbClr val="4472C4"/>
                 </a:solidFill>
@@ -10308,9 +11131,9 @@
                 <a:cs typeface="Calibri"/>
                 <a:sym typeface="Calibri"/>
               </a:rPr>
-              <a:t>● Z.ai, the maker of GLM, raises $5 Bln</a:t>
-            </a:r>
-            <a:endParaRPr b="1">
+              <a:t>Recursive Raises Seed $4.65B at $5B Valuation</a:t>
+            </a:r>
+            <a:endParaRPr sz="1300" b="1">
               <a:solidFill>
                 <a:srgbClr val="4472C4"/>
               </a:solidFill>
@@ -10321,17 +11144,22 @@
             </a:endParaRPr>
           </a:p>
           <a:p>
-            <a:pPr marL="171450" lvl="0" indent="-171450" algn="l" rtl="0">
-              <a:spcBef>
-                <a:spcPts val="0"/>
-              </a:spcBef>
-              <a:spcAft>
-                <a:spcPts val="0"/>
-              </a:spcAft>
-              <a:buNone/>
-            </a:pPr>
-            <a:r>
-              <a:rPr lang="en" b="1">
+            <a:pPr marL="171450" lvl="0" indent="-139700" algn="l" rtl="0">
+              <a:spcBef>
+                <a:spcPts val="0"/>
+              </a:spcBef>
+              <a:spcAft>
+                <a:spcPts val="0"/>
+              </a:spcAft>
+              <a:buClr>
+                <a:srgbClr val="4472C4"/>
+              </a:buClr>
+              <a:buSzPts val="1300"/>
+              <a:buFont typeface="Calibri"/>
+              <a:buChar char="●"/>
+            </a:pPr>
+            <a:r>
+              <a:rPr lang="en" sz="1300" b="1">
                 <a:solidFill>
                   <a:srgbClr val="4472C4"/>
                 </a:solidFill>
@@ -10340,9 +11168,9 @@
                 <a:cs typeface="Calibri"/>
                 <a:sym typeface="Calibri"/>
               </a:rPr>
-              <a:t>● Odyssey-3 World Model for Robots</a:t>
-            </a:r>
-            <a:endParaRPr b="1">
+              <a:t>Databricks now offers Astra to 3.5K Engineers</a:t>
+            </a:r>
+            <a:endParaRPr sz="1300" b="1">
               <a:solidFill>
                 <a:srgbClr val="4472C4"/>
               </a:solidFill>
@@ -10353,17 +11181,22 @@
             </a:endParaRPr>
           </a:p>
           <a:p>
-            <a:pPr marL="171450" lvl="0" indent="-171450" algn="l" rtl="0">
-              <a:spcBef>
-                <a:spcPts val="0"/>
-              </a:spcBef>
-              <a:spcAft>
-                <a:spcPts val="0"/>
-              </a:spcAft>
-              <a:buNone/>
-            </a:pPr>
-            <a:r>
-              <a:rPr lang="en" b="1">
+            <a:pPr marL="171450" lvl="0" indent="-139700" algn="l" rtl="0">
+              <a:spcBef>
+                <a:spcPts val="0"/>
+              </a:spcBef>
+              <a:spcAft>
+                <a:spcPts val="0"/>
+              </a:spcAft>
+              <a:buClr>
+                <a:srgbClr val="4472C4"/>
+              </a:buClr>
+              <a:buSzPts val="1300"/>
+              <a:buFont typeface="Calibri"/>
+              <a:buChar char="●"/>
+            </a:pPr>
+            <a:r>
+              <a:rPr lang="en" sz="1300" b="1">
                 <a:solidFill>
                   <a:srgbClr val="4472C4"/>
                 </a:solidFill>
@@ -10372,9 +11205,120 @@
                 <a:cs typeface="Calibri"/>
                 <a:sym typeface="Calibri"/>
               </a:rPr>
-              <a:t>● Jobs &amp; Layoffs</a:t>
-            </a:r>
-            <a:endParaRPr b="1">
+              <a:t>Claude Code Projects</a:t>
+            </a:r>
+            <a:endParaRPr sz="1300" b="1">
+              <a:solidFill>
+                <a:srgbClr val="4472C4"/>
+              </a:solidFill>
+              <a:latin typeface="Calibri"/>
+              <a:ea typeface="Calibri"/>
+              <a:cs typeface="Calibri"/>
+              <a:sym typeface="Calibri"/>
+            </a:endParaRPr>
+          </a:p>
+          <a:p>
+            <a:pPr marL="171450" lvl="0" indent="-139700" algn="l" rtl="0">
+              <a:spcBef>
+                <a:spcPts val="0"/>
+              </a:spcBef>
+              <a:spcAft>
+                <a:spcPts val="0"/>
+              </a:spcAft>
+              <a:buClr>
+                <a:srgbClr val="4472C4"/>
+              </a:buClr>
+              <a:buSzPts val="1300"/>
+              <a:buFont typeface="Calibri"/>
+              <a:buChar char="●"/>
+            </a:pPr>
+            <a:r>
+              <a:rPr lang="en" sz="1300" b="1">
+                <a:solidFill>
+                  <a:srgbClr val="4472C4"/>
+                </a:solidFill>
+                <a:latin typeface="Calibri"/>
+                <a:ea typeface="Calibri"/>
+                <a:cs typeface="Calibri"/>
+                <a:sym typeface="Calibri"/>
+              </a:rPr>
+              <a:t>ChatGPT ads now open a chat with Agent</a:t>
+            </a:r>
+            <a:endParaRPr sz="1300" b="1">
+              <a:solidFill>
+                <a:srgbClr val="4472C4"/>
+              </a:solidFill>
+              <a:latin typeface="Calibri"/>
+              <a:ea typeface="Calibri"/>
+              <a:cs typeface="Calibri"/>
+              <a:sym typeface="Calibri"/>
+            </a:endParaRPr>
+          </a:p>
+          <a:p>
+            <a:pPr marL="171450" lvl="0" indent="-139700" algn="l" rtl="0">
+              <a:spcBef>
+                <a:spcPts val="0"/>
+              </a:spcBef>
+              <a:spcAft>
+                <a:spcPts val="0"/>
+              </a:spcAft>
+              <a:buClr>
+                <a:srgbClr val="4472C4"/>
+              </a:buClr>
+              <a:buSzPts val="1300"/>
+              <a:buFont typeface="Calibri"/>
+              <a:buChar char="●"/>
+            </a:pPr>
+            <a:r>
+              <a:rPr lang="en" sz="1300" b="1">
+                <a:solidFill>
+                  <a:srgbClr val="4472C4"/>
+                </a:solidFill>
+                <a:latin typeface="Calibri"/>
+                <a:ea typeface="Calibri"/>
+                <a:cs typeface="Calibri"/>
+                <a:sym typeface="Calibri"/>
+              </a:rPr>
+              <a:t>Snap Specs AR Glasses</a:t>
+            </a:r>
+            <a:endParaRPr sz="1300" b="1">
+              <a:solidFill>
+                <a:srgbClr val="4472C4"/>
+              </a:solidFill>
+              <a:latin typeface="Calibri"/>
+              <a:ea typeface="Calibri"/>
+              <a:cs typeface="Calibri"/>
+              <a:sym typeface="Calibri"/>
+            </a:endParaRPr>
+          </a:p>
+          <a:p>
+            <a:pPr marL="171450" lvl="0" indent="-139700" algn="l" rtl="0">
+              <a:spcBef>
+                <a:spcPts val="0"/>
+              </a:spcBef>
+              <a:spcAft>
+                <a:spcPts val="0"/>
+              </a:spcAft>
+              <a:buClr>
+                <a:srgbClr val="4472C4"/>
+              </a:buClr>
+              <a:buSzPts val="1300"/>
+              <a:buFont typeface="Calibri"/>
+              <a:buChar char="●"/>
+            </a:pPr>
+            <a:r>
+              <a:rPr lang="en" sz="1300" b="1">
+                <a:solidFill>
+                  <a:srgbClr val="4472C4"/>
+                </a:solidFill>
+                <a:latin typeface="Calibri"/>
+                <a:ea typeface="Calibri"/>
+                <a:cs typeface="Calibri"/>
+                <a:sym typeface="Calibri"/>
+              </a:rPr>
+              <a:t>Jobs &amp; Layoffs</a:t>
+            </a:r>
+            <a:endParaRPr sz="1300" b="1">
               <a:solidFill>
                 <a:srgbClr val="4472C4"/>
               </a:solidFill>
@@ -10399,7 +11343,7 @@
   <p:cSld>
     <p:spTree>
       <p:nvGrpSpPr>
-        <p:cNvPr id="1" name="Shape 130"/>
+        <p:cNvPr id="1" name="Shape 132"/>
         <p:cNvGrpSpPr/>
         <p:nvPr/>
       </p:nvGrpSpPr>
@@ -10413,7 +11357,7 @@
       </p:grpSpPr>
       <p:sp>
         <p:nvSpPr>
-          <p:cNvPr id="131" name="Google Shape;131;p22"/>
+          <p:cNvPr id="133" name="Google Shape;133;p22"/>
           <p:cNvSpPr txBox="1"/>
           <p:nvPr/>
         </p:nvSpPr>
@@ -10465,7 +11409,7 @@
       </p:sp>
       <p:sp>
         <p:nvSpPr>
-          <p:cNvPr id="132" name="Google Shape;132;p22"/>
+          <p:cNvPr id="134" name="Google Shape;134;p22"/>
           <p:cNvSpPr txBox="1"/>
           <p:nvPr/>
         </p:nvSpPr>
@@ -10719,7 +11663,7 @@
       </p:sp>
       <p:pic>
         <p:nvPicPr>
-          <p:cNvPr id="133" name="Google Shape;133;p22"/>
+          <p:cNvPr id="135" name="Google Shape;135;p22"/>
           <p:cNvPicPr preferRelativeResize="0"/>
           <p:nvPr/>
         </p:nvPicPr>
@@ -10757,7 +11701,7 @@
       </p:pic>
       <p:sp>
         <p:nvSpPr>
-          <p:cNvPr id="134" name="Google Shape;134;p22"/>
+          <p:cNvPr id="136" name="Google Shape;136;p22"/>
           <p:cNvSpPr txBox="1"/>
           <p:nvPr/>
         </p:nvSpPr>
@@ -11031,7 +11975,7 @@
       </p:sp>
       <p:pic>
         <p:nvPicPr>
-          <p:cNvPr id="135" name="Google Shape;135;p22"/>
+          <p:cNvPr id="137" name="Google Shape;137;p22"/>
           <p:cNvPicPr preferRelativeResize="0"/>
           <p:nvPr/>
         </p:nvPicPr>
@@ -11080,7 +12024,7 @@
   <p:cSld>
     <p:spTree>
       <p:nvGrpSpPr>
-        <p:cNvPr id="1" name="Shape 139"/>
+        <p:cNvPr id="1" name="Shape 141"/>
         <p:cNvGrpSpPr/>
         <p:nvPr/>
       </p:nvGrpSpPr>
@@ -11094,7 +12038,7 @@
       </p:grpSpPr>
       <p:sp>
         <p:nvSpPr>
-          <p:cNvPr id="140" name="Google Shape;140;p23"/>
+          <p:cNvPr id="142" name="Google Shape;142;p23"/>
           <p:cNvSpPr txBox="1"/>
           <p:nvPr/>
         </p:nvSpPr>
@@ -11146,7 +12090,7 @@
       </p:sp>
       <p:sp>
         <p:nvSpPr>
-          <p:cNvPr id="141" name="Google Shape;141;p23"/>
+          <p:cNvPr id="143" name="Google Shape;143;p23"/>
           <p:cNvSpPr txBox="1"/>
           <p:nvPr/>
         </p:nvSpPr>
@@ -11370,7 +12314,7 @@
       </p:sp>
       <p:pic>
         <p:nvPicPr>
-          <p:cNvPr id="142" name="Google Shape;142;p23"/>
+          <p:cNvPr id="144" name="Google Shape;144;p23"/>
           <p:cNvPicPr preferRelativeResize="0"/>
           <p:nvPr/>
         </p:nvPicPr>
@@ -11409,7 +12353,7 @@
       </p:pic>
       <p:sp>
         <p:nvSpPr>
-          <p:cNvPr id="143" name="Google Shape;143;p23"/>
+          <p:cNvPr id="145" name="Google Shape;145;p23"/>
           <p:cNvSpPr txBox="1"/>
           <p:nvPr/>
         </p:nvSpPr>
@@ -11636,7 +12580,7 @@
       </p:sp>
       <p:pic>
         <p:nvPicPr>
-          <p:cNvPr id="144" name="Google Shape;144;p23"/>
+          <p:cNvPr id="146" name="Google Shape;146;p23"/>
           <p:cNvPicPr preferRelativeResize="0"/>
           <p:nvPr/>
         </p:nvPicPr>
@@ -11685,7 +12629,7 @@
   <p:cSld>
     <p:spTree>
       <p:nvGrpSpPr>
-        <p:cNvPr id="1" name="Shape 148"/>
+        <p:cNvPr id="1" name="Shape 150"/>
         <p:cNvGrpSpPr/>
         <p:nvPr/>
       </p:nvGrpSpPr>
@@ -11699,7 +12643,7 @@
       </p:grpSpPr>
       <p:sp>
         <p:nvSpPr>
-          <p:cNvPr id="149" name="Google Shape;149;p24"/>
+          <p:cNvPr id="151" name="Google Shape;151;p24"/>
           <p:cNvSpPr txBox="1"/>
           <p:nvPr/>
         </p:nvSpPr>
@@ -11751,7 +12695,7 @@
       </p:sp>
       <p:sp>
         <p:nvSpPr>
-          <p:cNvPr id="150" name="Google Shape;150;p24"/>
+          <p:cNvPr id="152" name="Google Shape;152;p24"/>
           <p:cNvSpPr txBox="1"/>
           <p:nvPr/>
         </p:nvSpPr>
@@ -12076,7 +13020,7 @@
       </p:sp>
       <p:pic>
         <p:nvPicPr>
-          <p:cNvPr id="151" name="Google Shape;151;p24"/>
+          <p:cNvPr id="153" name="Google Shape;153;p24"/>
           <p:cNvPicPr preferRelativeResize="0"/>
           <p:nvPr/>
         </p:nvPicPr>
@@ -12115,7 +13059,7 @@
       </p:pic>
       <p:sp>
         <p:nvSpPr>
-          <p:cNvPr id="152" name="Google Shape;152;p24"/>
+          <p:cNvPr id="154" name="Google Shape;154;p24"/>
           <p:cNvSpPr txBox="1"/>
           <p:nvPr/>
         </p:nvSpPr>
@@ -12257,7 +13201,7 @@
       </p:sp>
       <p:pic>
         <p:nvPicPr>
-          <p:cNvPr id="153" name="Google Shape;153;p24"/>
+          <p:cNvPr id="155" name="Google Shape;155;p24"/>
           <p:cNvPicPr preferRelativeResize="0"/>
           <p:nvPr/>
         </p:nvPicPr>
@@ -12306,7 +13250,7 @@
   <p:cSld>
     <p:spTree>
       <p:nvGrpSpPr>
-        <p:cNvPr id="1" name="Shape 157"/>
+        <p:cNvPr id="1" name="Shape 159"/>
         <p:cNvGrpSpPr/>
         <p:nvPr/>
       </p:nvGrpSpPr>
@@ -12320,7 +13264,7 @@
       </p:grpSpPr>
       <p:sp>
         <p:nvSpPr>
-          <p:cNvPr id="158" name="Google Shape;158;p25"/>
+          <p:cNvPr id="160" name="Google Shape;160;p25"/>
           <p:cNvSpPr txBox="1"/>
           <p:nvPr/>
         </p:nvSpPr>
@@ -12372,7 +13316,7 @@
       </p:sp>
       <p:sp>
         <p:nvSpPr>
-          <p:cNvPr id="159" name="Google Shape;159;p25"/>
+          <p:cNvPr id="161" name="Google Shape;161;p25"/>
           <p:cNvSpPr txBox="1"/>
           <p:nvPr/>
         </p:nvSpPr>
@@ -12643,7 +13587,7 @@
       </p:sp>
       <p:pic>
         <p:nvPicPr>
-          <p:cNvPr id="160" name="Google Shape;160;p25"/>
+          <p:cNvPr id="162" name="Google Shape;162;p25"/>
           <p:cNvPicPr preferRelativeResize="0"/>
           <p:nvPr/>
         </p:nvPicPr>
@@ -12693,7 +13637,7 @@
   <p:cSld>
     <p:spTree>
       <p:nvGrpSpPr>
-        <p:cNvPr id="1" name="Shape 164"/>
+        <p:cNvPr id="1" name="Shape 166"/>
         <p:cNvGrpSpPr/>
         <p:nvPr/>
       </p:nvGrpSpPr>
@@ -12707,7 +13651,7 @@
       </p:grpSpPr>
       <p:sp>
         <p:nvSpPr>
-          <p:cNvPr id="165" name="Google Shape;165;p26"/>
+          <p:cNvPr id="167" name="Google Shape;167;p26"/>
           <p:cNvSpPr txBox="1"/>
           <p:nvPr/>
         </p:nvSpPr>
@@ -12759,7 +13703,7 @@
       </p:sp>
       <p:sp>
         <p:nvSpPr>
-          <p:cNvPr id="166" name="Google Shape;166;p26"/>
+          <p:cNvPr id="168" name="Google Shape;168;p26"/>
           <p:cNvSpPr txBox="1"/>
           <p:nvPr/>
         </p:nvSpPr>
@@ -13057,7 +14001,7 @@
       </p:sp>
       <p:sp>
         <p:nvSpPr>
-          <p:cNvPr id="167" name="Google Shape;167;p26"/>
+          <p:cNvPr id="169" name="Google Shape;169;p26"/>
           <p:cNvSpPr txBox="1"/>
           <p:nvPr/>
         </p:nvSpPr>
@@ -13360,7 +14304,7 @@
       </p:sp>
       <p:pic>
         <p:nvPicPr>
-          <p:cNvPr id="168" name="Google Shape;168;p26"/>
+          <p:cNvPr id="170" name="Google Shape;170;p26"/>
           <p:cNvPicPr preferRelativeResize="0"/>
           <p:nvPr/>
         </p:nvPicPr>
@@ -13399,7 +14343,7 @@
       </p:pic>
       <p:pic>
         <p:nvPicPr>
-          <p:cNvPr id="169" name="Google Shape;169;p26"/>
+          <p:cNvPr id="171" name="Google Shape;171;p26"/>
           <p:cNvPicPr preferRelativeResize="0"/>
           <p:nvPr/>
         </p:nvPicPr>
@@ -13449,7 +14393,7 @@
   <p:cSld>
     <p:spTree>
       <p:nvGrpSpPr>
-        <p:cNvPr id="1" name="Shape 173"/>
+        <p:cNvPr id="1" name="Shape 175"/>
         <p:cNvGrpSpPr/>
         <p:nvPr/>
       </p:nvGrpSpPr>
@@ -13463,7 +14407,7 @@
       </p:grpSpPr>
       <p:sp>
         <p:nvSpPr>
-          <p:cNvPr id="174" name="Google Shape;174;p27"/>
+          <p:cNvPr id="176" name="Google Shape;176;p27"/>
           <p:cNvSpPr txBox="1"/>
           <p:nvPr/>
         </p:nvSpPr>
@@ -13875,7 +14819,7 @@
       </p:sp>
       <p:sp>
         <p:nvSpPr>
-          <p:cNvPr id="175" name="Google Shape;175;p27"/>
+          <p:cNvPr id="177" name="Google Shape;177;p27"/>
           <p:cNvSpPr txBox="1"/>
           <p:nvPr/>
         </p:nvSpPr>
@@ -14150,7 +15094,7 @@
       </p:sp>
       <p:sp>
         <p:nvSpPr>
-          <p:cNvPr id="176" name="Google Shape;176;p27"/>
+          <p:cNvPr id="178" name="Google Shape;178;p27"/>
           <p:cNvSpPr txBox="1"/>
           <p:nvPr/>
         </p:nvSpPr>
@@ -14445,7 +15389,7 @@
       </p:sp>
       <p:pic>
         <p:nvPicPr>
-          <p:cNvPr id="177" name="Google Shape;177;p27"/>
+          <p:cNvPr id="179" name="Google Shape;179;p27"/>
           <p:cNvPicPr preferRelativeResize="0"/>
           <p:nvPr/>
         </p:nvPicPr>
@@ -14479,7 +15423,7 @@
       </p:pic>
       <p:pic>
         <p:nvPicPr>
-          <p:cNvPr id="178" name="Google Shape;178;p27"/>
+          <p:cNvPr id="180" name="Google Shape;180;p27"/>
           <p:cNvPicPr preferRelativeResize="0"/>
           <p:nvPr/>
         </p:nvPicPr>
@@ -14518,7 +15462,7 @@
       </p:pic>
       <p:pic>
         <p:nvPicPr>
-          <p:cNvPr id="179" name="Google Shape;179;p27"/>
+          <p:cNvPr id="181" name="Google Shape;181;p27"/>
           <p:cNvPicPr preferRelativeResize="0"/>
           <p:nvPr/>
         </p:nvPicPr>
@@ -14556,7 +15500,7 @@
       </p:pic>
       <p:sp>
         <p:nvSpPr>
-          <p:cNvPr id="180" name="Google Shape;180;p27"/>
+          <p:cNvPr id="182" name="Google Shape;182;p27"/>
           <p:cNvSpPr txBox="1"/>
           <p:nvPr/>
         </p:nvSpPr>
@@ -14619,7 +15563,7 @@
   <p:cSld>
     <p:spTree>
       <p:nvGrpSpPr>
-        <p:cNvPr id="1" name="Shape 184"/>
+        <p:cNvPr id="1" name="Shape 186"/>
         <p:cNvGrpSpPr/>
         <p:nvPr/>
       </p:nvGrpSpPr>
@@ -14633,7 +15577,7 @@
       </p:grpSpPr>
       <p:sp>
         <p:nvSpPr>
-          <p:cNvPr id="185" name="Google Shape;185;p28"/>
+          <p:cNvPr id="187" name="Google Shape;187;p28"/>
           <p:cNvSpPr txBox="1"/>
           <p:nvPr/>
         </p:nvSpPr>
@@ -14964,7 +15908,7 @@
       </p:sp>
       <p:pic>
         <p:nvPicPr>
-          <p:cNvPr id="186" name="Google Shape;186;p28"/>
+          <p:cNvPr id="188" name="Google Shape;188;p28"/>
           <p:cNvPicPr preferRelativeResize="0"/>
           <p:nvPr/>
         </p:nvPicPr>
@@ -15002,7 +15946,7 @@
       </p:pic>
       <p:sp>
         <p:nvSpPr>
-          <p:cNvPr id="187" name="Google Shape;187;p28"/>
+          <p:cNvPr id="189" name="Google Shape;189;p28"/>
           <p:cNvSpPr txBox="1"/>
           <p:nvPr/>
         </p:nvSpPr>
@@ -15244,7 +16188,7 @@
       </p:sp>
       <p:pic>
         <p:nvPicPr>
-          <p:cNvPr id="188" name="Google Shape;188;p28"/>
+          <p:cNvPr id="190" name="Google Shape;190;p28"/>
           <p:cNvPicPr preferRelativeResize="0"/>
           <p:nvPr/>
         </p:nvPicPr>
@@ -15283,7 +16227,7 @@
       </p:pic>
       <p:sp>
         <p:nvSpPr>
-          <p:cNvPr id="189" name="Google Shape;189;p28"/>
+          <p:cNvPr id="191" name="Google Shape;191;p28"/>
           <p:cNvSpPr txBox="1"/>
           <p:nvPr/>
         </p:nvSpPr>
@@ -15346,7 +16290,7 @@
   <p:cSld>
     <p:spTree>
       <p:nvGrpSpPr>
-        <p:cNvPr id="1" name="Shape 193"/>
+        <p:cNvPr id="1" name="Shape 195"/>
         <p:cNvGrpSpPr/>
         <p:nvPr/>
       </p:nvGrpSpPr>
@@ -15360,7 +16304,7 @@
       </p:grpSpPr>
       <p:sp>
         <p:nvSpPr>
-          <p:cNvPr id="194" name="Google Shape;194;p29"/>
+          <p:cNvPr id="196" name="Google Shape;196;p29"/>
           <p:cNvSpPr txBox="1"/>
           <p:nvPr/>
         </p:nvSpPr>
@@ -15412,7 +16356,7 @@
       </p:sp>
       <p:sp>
         <p:nvSpPr>
-          <p:cNvPr id="195" name="Google Shape;195;p29"/>
+          <p:cNvPr id="197" name="Google Shape;197;p29"/>
           <p:cNvSpPr txBox="1"/>
           <p:nvPr/>
         </p:nvSpPr>
@@ -15966,7 +16910,7 @@
       </p:sp>
       <p:pic>
         <p:nvPicPr>
-          <p:cNvPr id="196" name="Google Shape;196;p29"/>
+          <p:cNvPr id="198" name="Google Shape;198;p29"/>
           <p:cNvPicPr preferRelativeResize="0"/>
           <p:nvPr/>
         </p:nvPicPr>
@@ -16005,7 +16949,7 @@
       </p:pic>
       <p:pic>
         <p:nvPicPr>
-          <p:cNvPr id="197" name="Google Shape;197;p29"/>
+          <p:cNvPr id="199" name="Google Shape;199;p29"/>
           <p:cNvPicPr preferRelativeResize="0"/>
           <p:nvPr/>
         </p:nvPicPr>
@@ -16055,7 +16999,7 @@
   <p:cSld>
     <p:spTree>
       <p:nvGrpSpPr>
-        <p:cNvPr id="1" name="Shape 201"/>
+        <p:cNvPr id="1" name="Shape 203"/>
         <p:cNvGrpSpPr/>
         <p:nvPr/>
       </p:nvGrpSpPr>
@@ -16069,7 +17013,7 @@
       </p:grpSpPr>
       <p:sp>
         <p:nvSpPr>
-          <p:cNvPr id="202" name="Google Shape;202;p30"/>
+          <p:cNvPr id="204" name="Google Shape;204;p30"/>
           <p:cNvSpPr txBox="1"/>
           <p:nvPr/>
         </p:nvSpPr>
@@ -16121,7 +17065,7 @@
       </p:sp>
       <p:sp>
         <p:nvSpPr>
-          <p:cNvPr id="203" name="Google Shape;203;p30"/>
+          <p:cNvPr id="205" name="Google Shape;205;p30"/>
           <p:cNvSpPr txBox="1"/>
           <p:nvPr/>
         </p:nvSpPr>
@@ -16386,7 +17330,7 @@
       </p:sp>
       <p:pic>
         <p:nvPicPr>
-          <p:cNvPr id="204" name="Google Shape;204;p30"/>
+          <p:cNvPr id="206" name="Google Shape;206;p30"/>
           <p:cNvPicPr preferRelativeResize="0"/>
           <p:nvPr/>
         </p:nvPicPr>
@@ -16425,7 +17369,7 @@
       </p:pic>
       <p:sp>
         <p:nvSpPr>
-          <p:cNvPr id="205" name="Google Shape;205;p30"/>
+          <p:cNvPr id="207" name="Google Shape;207;p30"/>
           <p:cNvSpPr txBox="1"/>
           <p:nvPr/>
         </p:nvSpPr>
@@ -16722,7 +17666,7 @@
       </p:sp>
       <p:pic>
         <p:nvPicPr>
-          <p:cNvPr id="206" name="Google Shape;206;p30"/>
+          <p:cNvPr id="208" name="Google Shape;208;p30"/>
           <p:cNvPicPr preferRelativeResize="0"/>
           <p:nvPr/>
         </p:nvPicPr>
@@ -16772,7 +17716,7 @@
   <p:cSld>
     <p:spTree>
       <p:nvGrpSpPr>
-        <p:cNvPr id="1" name="Shape 210"/>
+        <p:cNvPr id="1" name="Shape 212"/>
         <p:cNvGrpSpPr/>
         <p:nvPr/>
       </p:nvGrpSpPr>
@@ -16786,7 +17730,7 @@
       </p:grpSpPr>
       <p:sp>
         <p:nvSpPr>
-          <p:cNvPr id="211" name="Google Shape;211;p31"/>
+          <p:cNvPr id="213" name="Google Shape;213;p31"/>
           <p:cNvSpPr txBox="1"/>
           <p:nvPr/>
         </p:nvSpPr>
@@ -16855,7 +17799,7 @@
       </p:sp>
       <p:sp>
         <p:nvSpPr>
-          <p:cNvPr id="212" name="Google Shape;212;p31"/>
+          <p:cNvPr id="214" name="Google Shape;214;p31"/>
           <p:cNvSpPr txBox="1"/>
           <p:nvPr/>
         </p:nvSpPr>
@@ -17234,7 +18178,7 @@
       </p:sp>
       <p:pic>
         <p:nvPicPr>
-          <p:cNvPr id="213" name="Google Shape;213;p31"/>
+          <p:cNvPr id="215" name="Google Shape;215;p31"/>
           <p:cNvPicPr preferRelativeResize="0"/>
           <p:nvPr/>
         </p:nvPicPr>
@@ -17273,7 +18217,7 @@
       </p:pic>
       <p:sp>
         <p:nvSpPr>
-          <p:cNvPr id="214" name="Google Shape;214;p31"/>
+          <p:cNvPr id="216" name="Google Shape;216;p31"/>
           <p:cNvSpPr txBox="1"/>
           <p:nvPr/>
         </p:nvSpPr>
@@ -17497,7 +18441,7 @@
       </p:sp>
       <p:pic>
         <p:nvPicPr>
-          <p:cNvPr id="215" name="Google Shape;215;p31"/>
+          <p:cNvPr id="217" name="Google Shape;217;p31"/>
           <p:cNvPicPr preferRelativeResize="0"/>
           <p:nvPr/>
         </p:nvPicPr>
@@ -18021,14 +18965,14 @@
         </p:nvGraphicFramePr>
         <p:xfrm>
           <a:off x="5742420" y="430065"/>
-          <a:ext cx="804500" cy="571500"/>
+          <a:ext cx="3000000" cy="3000000"/>
         </p:xfrm>
         <a:graphic>
           <a:graphicData uri="http://schemas.openxmlformats.org/drawingml/2006/table">
             <a:tbl>
               <a:tblPr>
                 <a:noFill/>
-                <a:tableStyleId>{FA790FBC-84A3-4958-AE8D-4D8C27275DA0}</a:tableStyleId>
+                <a:tableStyleId>{3D0790E7-BC65-4C42-916B-19C9781F746D}</a:tableStyleId>
               </a:tblPr>
               <a:tblGrid>
                 <a:gridCol w="219050">
@@ -18909,14 +19853,14 @@
         </p:nvGraphicFramePr>
         <p:xfrm>
           <a:off x="3075200" y="742403"/>
-          <a:ext cx="2133600" cy="3993200"/>
+          <a:ext cx="3000000" cy="3000000"/>
         </p:xfrm>
         <a:graphic>
           <a:graphicData uri="http://schemas.openxmlformats.org/drawingml/2006/table">
             <a:tbl>
               <a:tblPr>
                 <a:noFill/>
-                <a:tableStyleId>{FA790FBC-84A3-4958-AE8D-4D8C27275DA0}</a:tableStyleId>
+                <a:tableStyleId>{3D0790E7-BC65-4C42-916B-19C9781F746D}</a:tableStyleId>
               </a:tblPr>
               <a:tblGrid>
                 <a:gridCol w="276225">
@@ -25229,14 +26173,14 @@
         </p:nvGraphicFramePr>
         <p:xfrm>
           <a:off x="423650" y="745044"/>
-          <a:ext cx="1828800" cy="3905278"/>
+          <a:ext cx="3000000" cy="3000000"/>
         </p:xfrm>
         <a:graphic>
           <a:graphicData uri="http://schemas.openxmlformats.org/drawingml/2006/table">
             <a:tbl>
               <a:tblPr>
                 <a:noFill/>
-                <a:tableStyleId>{FA790FBC-84A3-4958-AE8D-4D8C27275DA0}</a:tableStyleId>
+                <a:tableStyleId>{3D0790E7-BC65-4C42-916B-19C9781F746D}</a:tableStyleId>
               </a:tblPr>
               <a:tblGrid>
                 <a:gridCol w="276225">
@@ -31554,7 +32498,7 @@
   <p:cSld>
     <p:spTree>
       <p:nvGrpSpPr>
-        <p:cNvPr id="1" name="Shape 219"/>
+        <p:cNvPr id="1" name="Shape 221"/>
         <p:cNvGrpSpPr/>
         <p:nvPr/>
       </p:nvGrpSpPr>
@@ -31568,7 +32512,7 @@
       </p:grpSpPr>
       <p:sp>
         <p:nvSpPr>
-          <p:cNvPr id="220" name="Google Shape;220;p32"/>
+          <p:cNvPr id="222" name="Google Shape;222;p32"/>
           <p:cNvSpPr txBox="1"/>
           <p:nvPr/>
         </p:nvSpPr>
@@ -31637,7 +32581,7 @@
       </p:sp>
       <p:sp>
         <p:nvSpPr>
-          <p:cNvPr id="221" name="Google Shape;221;p32"/>
+          <p:cNvPr id="223" name="Google Shape;223;p32"/>
           <p:cNvSpPr txBox="1"/>
           <p:nvPr/>
         </p:nvSpPr>
@@ -31939,7 +32883,7 @@
       </p:sp>
       <p:pic>
         <p:nvPicPr>
-          <p:cNvPr id="222" name="Google Shape;222;p32"/>
+          <p:cNvPr id="224" name="Google Shape;224;p32"/>
           <p:cNvPicPr preferRelativeResize="0"/>
           <p:nvPr/>
         </p:nvPicPr>
@@ -31978,7 +32922,7 @@
       </p:pic>
       <p:sp>
         <p:nvSpPr>
-          <p:cNvPr id="223" name="Google Shape;223;p32"/>
+          <p:cNvPr id="225" name="Google Shape;225;p32"/>
           <p:cNvSpPr txBox="1"/>
           <p:nvPr/>
         </p:nvSpPr>
@@ -32247,7 +33191,7 @@
       </p:sp>
       <p:pic>
         <p:nvPicPr>
-          <p:cNvPr id="224" name="Google Shape;224;p32"/>
+          <p:cNvPr id="226" name="Google Shape;226;p32"/>
           <p:cNvPicPr preferRelativeResize="0"/>
           <p:nvPr/>
         </p:nvPicPr>
@@ -32297,7 +33241,7 @@
   <p:cSld>
     <p:spTree>
       <p:nvGrpSpPr>
-        <p:cNvPr id="1" name="Shape 228"/>
+        <p:cNvPr id="1" name="Shape 230"/>
         <p:cNvGrpSpPr/>
         <p:nvPr/>
       </p:nvGrpSpPr>
@@ -32311,7 +33255,7 @@
       </p:grpSpPr>
       <p:sp>
         <p:nvSpPr>
-          <p:cNvPr id="229" name="Google Shape;229;p33"/>
+          <p:cNvPr id="231" name="Google Shape;231;p33"/>
           <p:cNvSpPr txBox="1"/>
           <p:nvPr/>
         </p:nvSpPr>
@@ -32363,7 +33307,7 @@
       </p:sp>
       <p:sp>
         <p:nvSpPr>
-          <p:cNvPr id="230" name="Google Shape;230;p33"/>
+          <p:cNvPr id="232" name="Google Shape;232;p33"/>
           <p:cNvSpPr txBox="1"/>
           <p:nvPr/>
         </p:nvSpPr>
@@ -32619,7 +33563,7 @@
       </p:sp>
       <p:pic>
         <p:nvPicPr>
-          <p:cNvPr id="231" name="Google Shape;231;p33"/>
+          <p:cNvPr id="233" name="Google Shape;233;p33"/>
           <p:cNvPicPr preferRelativeResize="0"/>
           <p:nvPr/>
         </p:nvPicPr>
@@ -32637,7 +33581,7 @@
         </p:blipFill>
         <p:spPr>
           <a:xfrm>
-            <a:off x="5125775" y="631588"/>
+            <a:off x="5125775" y="453406"/>
             <a:ext cx="3033975" cy="1285875"/>
           </a:xfrm>
           <a:prstGeom prst="rect">
@@ -32657,14 +33601,14 @@
       </p:pic>
       <p:sp>
         <p:nvSpPr>
-          <p:cNvPr id="232" name="Google Shape;232;p33"/>
+          <p:cNvPr id="234" name="Google Shape;234;p33"/>
           <p:cNvSpPr txBox="1"/>
           <p:nvPr/>
         </p:nvSpPr>
         <p:spPr>
           <a:xfrm>
             <a:off x="76200" y="2101500"/>
-            <a:ext cx="4914000" cy="2511900"/>
+            <a:ext cx="4914000" cy="2696700"/>
           </a:xfrm>
           <a:prstGeom prst="rect">
             <a:avLst/>
@@ -32783,7 +33727,24 @@
                 <a:cs typeface="Calibri"/>
                 <a:sym typeface="Calibri"/>
               </a:rPr>
-              <a:t>Jev is their new model trained to give short decisions (choice, score, probability) to fixed questions, for example:</a:t>
+              <a:t>Jev is their new model trained to give short decisions </a:t>
+            </a:r>
+            <a:br>
+              <a:rPr lang="en" sz="1200">
+                <a:latin typeface="Calibri"/>
+                <a:ea typeface="Calibri"/>
+                <a:cs typeface="Calibri"/>
+                <a:sym typeface="Calibri"/>
+              </a:rPr>
+            </a:br>
+            <a:r>
+              <a:rPr lang="en" sz="1200">
+                <a:latin typeface="Calibri"/>
+                <a:ea typeface="Calibri"/>
+                <a:cs typeface="Calibri"/>
+                <a:sym typeface="Calibri"/>
+              </a:rPr>
+              <a:t>(choice, score, probability) to fixed questions, for example:</a:t>
             </a:r>
             <a:endParaRPr sz="1200">
               <a:latin typeface="Calibri"/>
@@ -33043,6 +34004,34 @@
             </a:endParaRPr>
           </a:p>
           <a:p>
+            <a:pPr marL="171450" lvl="0" indent="-133350" algn="l" rtl="0">
+              <a:spcBef>
+                <a:spcPts val="0"/>
+              </a:spcBef>
+              <a:spcAft>
+                <a:spcPts val="0"/>
+              </a:spcAft>
+              <a:buSzPts val="1200"/>
+              <a:buFont typeface="Calibri"/>
+              <a:buChar char="●"/>
+            </a:pPr>
+            <a:r>
+              <a:rPr lang="en" sz="1200">
+                <a:latin typeface="Calibri"/>
+                <a:ea typeface="Calibri"/>
+                <a:cs typeface="Calibri"/>
+                <a:sym typeface="Calibri"/>
+              </a:rPr>
+              <a:t>Context window is 64k tokens per request, no image, audio, or video</a:t>
+            </a:r>
+            <a:endParaRPr sz="1200">
+              <a:latin typeface="Calibri"/>
+              <a:ea typeface="Calibri"/>
+              <a:cs typeface="Calibri"/>
+              <a:sym typeface="Calibri"/>
+            </a:endParaRPr>
+          </a:p>
+          <a:p>
             <a:pPr marL="171450" lvl="0" indent="-114300" algn="l" rtl="0">
               <a:spcBef>
                 <a:spcPts val="0"/>
@@ -33168,7 +34157,7 @@
       </p:sp>
       <p:pic>
         <p:nvPicPr>
-          <p:cNvPr id="233" name="Google Shape;233;p33"/>
+          <p:cNvPr id="235" name="Google Shape;235;p33"/>
           <p:cNvPicPr preferRelativeResize="0"/>
           <p:nvPr/>
         </p:nvPicPr>
@@ -33187,8 +34176,324 @@
         </p:blipFill>
         <p:spPr>
           <a:xfrm>
-            <a:off x="5125775" y="2947999"/>
-            <a:ext cx="3033976" cy="667805"/>
+            <a:off x="3664675" y="1999486"/>
+            <a:ext cx="2396446" cy="527475"/>
+          </a:xfrm>
+          <a:prstGeom prst="rect">
+            <a:avLst/>
+          </a:prstGeom>
+          <a:noFill/>
+          <a:ln w="9525" cap="flat" cmpd="sng">
+            <a:solidFill>
+              <a:srgbClr val="FF0000"/>
+            </a:solidFill>
+            <a:prstDash val="solid"/>
+            <a:round/>
+            <a:headEnd type="none" w="sm" len="sm"/>
+            <a:tailEnd type="none" w="sm" len="sm"/>
+          </a:ln>
+        </p:spPr>
+      </p:pic>
+      <p:sp>
+        <p:nvSpPr>
+          <p:cNvPr id="236" name="Google Shape;236;p33"/>
+          <p:cNvSpPr txBox="1"/>
+          <p:nvPr/>
+        </p:nvSpPr>
+        <p:spPr>
+          <a:xfrm>
+            <a:off x="5057104" y="2674282"/>
+            <a:ext cx="4027500" cy="2327400"/>
+          </a:xfrm>
+          <a:prstGeom prst="rect">
+            <a:avLst/>
+          </a:prstGeom>
+          <a:solidFill>
+            <a:srgbClr val="FFF2CC"/>
+          </a:solidFill>
+          <a:ln w="9525" cap="flat" cmpd="sng">
+            <a:solidFill>
+              <a:srgbClr val="FF0000"/>
+            </a:solidFill>
+            <a:prstDash val="solid"/>
+            <a:round/>
+            <a:headEnd type="none" w="sm" len="sm"/>
+            <a:tailEnd type="none" w="sm" len="sm"/>
+          </a:ln>
+        </p:spPr>
+        <p:txBody>
+          <a:bodyPr spcFirstLastPara="1" wrap="square" lIns="9125" tIns="9125" rIns="9125" bIns="9125" anchor="t" anchorCtr="0">
+            <a:spAutoFit/>
+          </a:bodyPr>
+          <a:lstStyle/>
+          <a:p>
+            <a:pPr marL="171450" lvl="0" indent="-114300" algn="l" rtl="0">
+              <a:spcBef>
+                <a:spcPts val="0"/>
+              </a:spcBef>
+              <a:spcAft>
+                <a:spcPts val="0"/>
+              </a:spcAft>
+              <a:buClr>
+                <a:srgbClr val="FF0000"/>
+              </a:buClr>
+              <a:buSzPts val="900"/>
+              <a:buFont typeface="Calibri"/>
+              <a:buChar char="●"/>
+            </a:pPr>
+            <a:r>
+              <a:rPr lang="en" sz="1200" b="1">
+                <a:solidFill>
+                  <a:srgbClr val="FF0000"/>
+                </a:solidFill>
+                <a:latin typeface="Calibri"/>
+                <a:ea typeface="Calibri"/>
+                <a:cs typeface="Calibri"/>
+                <a:sym typeface="Calibri"/>
+              </a:rPr>
+              <a:t>Needle 3: Tiny Automation AI</a:t>
+            </a:r>
+            <a:endParaRPr sz="1200" b="1">
+              <a:solidFill>
+                <a:srgbClr val="FF0000"/>
+              </a:solidFill>
+              <a:latin typeface="Calibri"/>
+              <a:ea typeface="Calibri"/>
+              <a:cs typeface="Calibri"/>
+              <a:sym typeface="Calibri"/>
+            </a:endParaRPr>
+          </a:p>
+          <a:p>
+            <a:pPr marL="171450" lvl="0" indent="-114300" algn="l" rtl="0">
+              <a:spcBef>
+                <a:spcPts val="0"/>
+              </a:spcBef>
+              <a:spcAft>
+                <a:spcPts val="0"/>
+              </a:spcAft>
+              <a:buSzPts val="900"/>
+              <a:buFont typeface="Calibri"/>
+              <a:buChar char="●"/>
+            </a:pPr>
+            <a:r>
+              <a:rPr lang="en" sz="1200">
+                <a:solidFill>
+                  <a:schemeClr val="dk1"/>
+                </a:solidFill>
+                <a:latin typeface="Calibri"/>
+                <a:ea typeface="Calibri"/>
+                <a:cs typeface="Calibri"/>
+                <a:sym typeface="Calibri"/>
+              </a:rPr>
+              <a:t>By Cactus Compute, open source, only for local tool calling and structured data extraction—not general chat</a:t>
+            </a:r>
+            <a:endParaRPr sz="1200">
+              <a:solidFill>
+                <a:schemeClr val="dk1"/>
+              </a:solidFill>
+              <a:latin typeface="Calibri"/>
+              <a:ea typeface="Calibri"/>
+              <a:cs typeface="Calibri"/>
+              <a:sym typeface="Calibri"/>
+            </a:endParaRPr>
+          </a:p>
+          <a:p>
+            <a:pPr marL="171450" lvl="0" indent="-114300" algn="l" rtl="0">
+              <a:spcBef>
+                <a:spcPts val="0"/>
+              </a:spcBef>
+              <a:spcAft>
+                <a:spcPts val="0"/>
+              </a:spcAft>
+              <a:buSzPts val="900"/>
+              <a:buFont typeface="Calibri"/>
+              <a:buChar char="●"/>
+            </a:pPr>
+            <a:r>
+              <a:rPr lang="en" sz="1200">
+                <a:solidFill>
+                  <a:schemeClr val="dk1"/>
+                </a:solidFill>
+                <a:latin typeface="Calibri"/>
+                <a:ea typeface="Calibri"/>
+                <a:cs typeface="Calibri"/>
+                <a:sym typeface="Calibri"/>
+              </a:rPr>
+              <a:t>For phones, wearables, smart homes, robots, vehicles, browsers, and microcontroller-class edge devices</a:t>
+            </a:r>
+            <a:endParaRPr sz="1200">
+              <a:solidFill>
+                <a:schemeClr val="dk1"/>
+              </a:solidFill>
+              <a:latin typeface="Calibri"/>
+              <a:ea typeface="Calibri"/>
+              <a:cs typeface="Calibri"/>
+              <a:sym typeface="Calibri"/>
+            </a:endParaRPr>
+          </a:p>
+          <a:p>
+            <a:pPr marL="171450" lvl="0" indent="-114300" algn="l" rtl="0">
+              <a:spcBef>
+                <a:spcPts val="0"/>
+              </a:spcBef>
+              <a:spcAft>
+                <a:spcPts val="0"/>
+              </a:spcAft>
+              <a:buSzPts val="900"/>
+              <a:buFont typeface="Calibri"/>
+              <a:buChar char="●"/>
+            </a:pPr>
+            <a:r>
+              <a:rPr lang="en" sz="1200">
+                <a:solidFill>
+                  <a:schemeClr val="dk1"/>
+                </a:solidFill>
+                <a:latin typeface="Calibri"/>
+                <a:ea typeface="Calibri"/>
+                <a:cs typeface="Calibri"/>
+                <a:sym typeface="Calibri"/>
+              </a:rPr>
+              <a:t>Needle maps requests directly into schema-constrained function calls, returning an empty list when no exposed tool applies.</a:t>
+            </a:r>
+            <a:endParaRPr sz="1200">
+              <a:solidFill>
+                <a:schemeClr val="dk1"/>
+              </a:solidFill>
+              <a:latin typeface="Calibri"/>
+              <a:ea typeface="Calibri"/>
+              <a:cs typeface="Calibri"/>
+              <a:sym typeface="Calibri"/>
+            </a:endParaRPr>
+          </a:p>
+          <a:p>
+            <a:pPr marL="171450" lvl="0" indent="-114300" algn="l" rtl="0">
+              <a:spcBef>
+                <a:spcPts val="0"/>
+              </a:spcBef>
+              <a:spcAft>
+                <a:spcPts val="0"/>
+              </a:spcAft>
+              <a:buSzPts val="900"/>
+              <a:buFont typeface="Calibri"/>
+              <a:buChar char="●"/>
+            </a:pPr>
+            <a:r>
+              <a:rPr lang="en" sz="1200">
+                <a:solidFill>
+                  <a:schemeClr val="dk1"/>
+                </a:solidFill>
+                <a:latin typeface="Calibri"/>
+                <a:ea typeface="Calibri"/>
+                <a:cs typeface="Calibri"/>
+                <a:sym typeface="Calibri"/>
+              </a:rPr>
+              <a:t>Sliceable 2–20-layer architecture ships in 8–29 MB, supports roughly 25–121M params at 2-bit quantization, and can run locally at up to 4,000 decode tokens/sec on Raspberry Pi</a:t>
+            </a:r>
+            <a:endParaRPr sz="1200">
+              <a:solidFill>
+                <a:schemeClr val="dk1"/>
+              </a:solidFill>
+              <a:latin typeface="Calibri"/>
+              <a:ea typeface="Calibri"/>
+              <a:cs typeface="Calibri"/>
+              <a:sym typeface="Calibri"/>
+            </a:endParaRPr>
+          </a:p>
+          <a:p>
+            <a:pPr marL="171450" lvl="0" indent="-95250" algn="l" rtl="0">
+              <a:spcBef>
+                <a:spcPts val="0"/>
+              </a:spcBef>
+              <a:spcAft>
+                <a:spcPts val="0"/>
+              </a:spcAft>
+              <a:buSzPts val="600"/>
+              <a:buFont typeface="Calibri"/>
+              <a:buChar char="●"/>
+            </a:pPr>
+            <a:r>
+              <a:rPr lang="en" sz="900" u="sng">
+                <a:solidFill>
+                  <a:schemeClr val="hlink"/>
+                </a:solidFill>
+                <a:latin typeface="Calibri"/>
+                <a:ea typeface="Calibri"/>
+                <a:cs typeface="Calibri"/>
+                <a:sym typeface="Calibri"/>
+                <a:hlinkClick r:id="rId9"/>
+              </a:rPr>
+              <a:t>https://cactuscompute.com/needle</a:t>
+            </a:r>
+            <a:endParaRPr sz="900">
+              <a:solidFill>
+                <a:schemeClr val="dk1"/>
+              </a:solidFill>
+              <a:latin typeface="Calibri"/>
+              <a:ea typeface="Calibri"/>
+              <a:cs typeface="Calibri"/>
+              <a:sym typeface="Calibri"/>
+            </a:endParaRPr>
+          </a:p>
+          <a:p>
+            <a:pPr marL="171450" lvl="0" indent="-95250" algn="l" rtl="0">
+              <a:spcBef>
+                <a:spcPts val="0"/>
+              </a:spcBef>
+              <a:spcAft>
+                <a:spcPts val="0"/>
+              </a:spcAft>
+              <a:buSzPts val="600"/>
+              <a:buFont typeface="Calibri"/>
+              <a:buChar char="●"/>
+            </a:pPr>
+            <a:r>
+              <a:rPr lang="en" sz="900" u="sng">
+                <a:solidFill>
+                  <a:schemeClr val="hlink"/>
+                </a:solidFill>
+                <a:latin typeface="Calibri"/>
+                <a:ea typeface="Calibri"/>
+                <a:cs typeface="Calibri"/>
+                <a:sym typeface="Calibri"/>
+                <a:hlinkClick r:id="rId10"/>
+              </a:rPr>
+              <a:t>https://github.com/cactus-compute/needle</a:t>
+            </a:r>
+            <a:endParaRPr sz="900">
+              <a:solidFill>
+                <a:schemeClr val="dk1"/>
+              </a:solidFill>
+              <a:latin typeface="Calibri"/>
+              <a:ea typeface="Calibri"/>
+              <a:cs typeface="Calibri"/>
+              <a:sym typeface="Calibri"/>
+            </a:endParaRPr>
+          </a:p>
+        </p:txBody>
+      </p:sp>
+      <p:pic>
+        <p:nvPicPr>
+          <p:cNvPr id="237" name="Google Shape;237;p33"/>
+          <p:cNvPicPr preferRelativeResize="0"/>
+          <p:nvPr/>
+        </p:nvPicPr>
+        <p:blipFill>
+          <a:blip r:embed="rId11" cstate="email">
+            <a:alphaModFix/>
+            <a:extLst>
+              <a:ext uri="{28A0092B-C50C-407E-A947-70E740481C1C}">
+                <a14:useLocalDpi xmlns:a14="http://schemas.microsoft.com/office/drawing/2010/main"/>
+              </a:ext>
+            </a:extLst>
+          </a:blip>
+          <a:stretch>
+            <a:fillRect/>
+          </a:stretch>
+        </p:blipFill>
+        <p:spPr>
+          <a:xfrm>
+            <a:off x="6688149" y="1999466"/>
+            <a:ext cx="2396449" cy="549763"/>
           </a:xfrm>
           <a:prstGeom prst="rect">
             <a:avLst/>
@@ -33218,7 +34523,7 @@
   <p:cSld>
     <p:spTree>
       <p:nvGrpSpPr>
-        <p:cNvPr id="1" name="Shape 237"/>
+        <p:cNvPr id="1" name="Shape 241"/>
         <p:cNvGrpSpPr/>
         <p:nvPr/>
       </p:nvGrpSpPr>
@@ -33232,7 +34537,7 @@
       </p:grpSpPr>
       <p:sp>
         <p:nvSpPr>
-          <p:cNvPr id="238" name="Google Shape;238;p34"/>
+          <p:cNvPr id="242" name="Google Shape;242;p34"/>
           <p:cNvSpPr txBox="1"/>
           <p:nvPr/>
         </p:nvSpPr>
@@ -33284,7 +34589,7 @@
       </p:sp>
       <p:sp>
         <p:nvSpPr>
-          <p:cNvPr id="239" name="Google Shape;239;p34"/>
+          <p:cNvPr id="243" name="Google Shape;243;p34"/>
           <p:cNvSpPr txBox="1"/>
           <p:nvPr/>
         </p:nvSpPr>
@@ -33699,7 +35004,7 @@
       </p:sp>
       <p:pic>
         <p:nvPicPr>
-          <p:cNvPr id="240" name="Google Shape;240;p34"/>
+          <p:cNvPr id="244" name="Google Shape;244;p34"/>
           <p:cNvPicPr preferRelativeResize="0"/>
           <p:nvPr/>
         </p:nvPicPr>
@@ -33738,7 +35043,7 @@
       </p:pic>
       <p:sp>
         <p:nvSpPr>
-          <p:cNvPr id="241" name="Google Shape;241;p34"/>
+          <p:cNvPr id="245" name="Google Shape;245;p34"/>
           <p:cNvSpPr txBox="1"/>
           <p:nvPr/>
         </p:nvSpPr>
@@ -34150,7 +35455,7 @@
       </p:sp>
       <p:pic>
         <p:nvPicPr>
-          <p:cNvPr id="242" name="Google Shape;242;p34"/>
+          <p:cNvPr id="246" name="Google Shape;246;p34"/>
           <p:cNvPicPr preferRelativeResize="0"/>
           <p:nvPr/>
         </p:nvPicPr>
@@ -34199,7 +35504,7 @@
   <p:cSld>
     <p:spTree>
       <p:nvGrpSpPr>
-        <p:cNvPr id="1" name="Shape 246"/>
+        <p:cNvPr id="1" name="Shape 250"/>
         <p:cNvGrpSpPr/>
         <p:nvPr/>
       </p:nvGrpSpPr>
@@ -34213,7 +35518,7 @@
       </p:grpSpPr>
       <p:sp>
         <p:nvSpPr>
-          <p:cNvPr id="247" name="Google Shape;247;p35"/>
+          <p:cNvPr id="251" name="Google Shape;251;p35"/>
           <p:cNvSpPr txBox="1"/>
           <p:nvPr/>
         </p:nvSpPr>
@@ -34265,7 +35570,7 @@
       </p:sp>
       <p:sp>
         <p:nvSpPr>
-          <p:cNvPr id="248" name="Google Shape;248;p35"/>
+          <p:cNvPr id="252" name="Google Shape;252;p35"/>
           <p:cNvSpPr txBox="1"/>
           <p:nvPr/>
         </p:nvSpPr>
@@ -34632,7 +35937,7 @@
       </p:sp>
       <p:sp>
         <p:nvSpPr>
-          <p:cNvPr id="249" name="Google Shape;249;p35"/>
+          <p:cNvPr id="253" name="Google Shape;253;p35"/>
           <p:cNvSpPr txBox="1"/>
           <p:nvPr/>
         </p:nvSpPr>
@@ -35040,7 +36345,7 @@
       </p:sp>
       <p:pic>
         <p:nvPicPr>
-          <p:cNvPr id="250" name="Google Shape;250;p35"/>
+          <p:cNvPr id="254" name="Google Shape;254;p35"/>
           <p:cNvPicPr preferRelativeResize="0"/>
           <p:nvPr/>
         </p:nvPicPr>
@@ -35079,7 +36384,7 @@
       </p:pic>
       <p:pic>
         <p:nvPicPr>
-          <p:cNvPr id="251" name="Google Shape;251;p35"/>
+          <p:cNvPr id="255" name="Google Shape;255;p35"/>
           <p:cNvPicPr preferRelativeResize="0"/>
           <p:nvPr/>
         </p:nvPicPr>
@@ -35129,7 +36434,7 @@
   <p:cSld>
     <p:spTree>
       <p:nvGrpSpPr>
-        <p:cNvPr id="1" name="Shape 255"/>
+        <p:cNvPr id="1" name="Shape 259"/>
         <p:cNvGrpSpPr/>
         <p:nvPr/>
       </p:nvGrpSpPr>
@@ -35143,7 +36448,7 @@
       </p:grpSpPr>
       <p:sp>
         <p:nvSpPr>
-          <p:cNvPr id="256" name="Google Shape;256;p36"/>
+          <p:cNvPr id="260" name="Google Shape;260;p36"/>
           <p:cNvSpPr txBox="1"/>
           <p:nvPr/>
         </p:nvSpPr>
@@ -35195,13 +36500,13 @@
       </p:sp>
       <p:sp>
         <p:nvSpPr>
-          <p:cNvPr id="257" name="Google Shape;257;p36"/>
+          <p:cNvPr id="261" name="Google Shape;261;p36"/>
           <p:cNvSpPr txBox="1"/>
           <p:nvPr/>
         </p:nvSpPr>
         <p:spPr>
           <a:xfrm>
-            <a:off x="36575" y="758950"/>
+            <a:off x="36575" y="357978"/>
             <a:ext cx="3630600" cy="1034400"/>
           </a:xfrm>
           <a:prstGeom prst="rect">
@@ -35347,14 +36652,14 @@
       </p:sp>
       <p:sp>
         <p:nvSpPr>
-          <p:cNvPr id="258" name="Google Shape;258;p36"/>
+          <p:cNvPr id="262" name="Google Shape;262;p36"/>
           <p:cNvSpPr txBox="1"/>
           <p:nvPr/>
         </p:nvSpPr>
         <p:spPr>
           <a:xfrm>
-            <a:off x="36575" y="2501950"/>
-            <a:ext cx="4449600" cy="1865400"/>
+            <a:off x="36575" y="1451125"/>
+            <a:ext cx="6144000" cy="1496100"/>
           </a:xfrm>
           <a:prstGeom prst="rect">
             <a:avLst/>
@@ -35669,7 +36974,7 @@
       </p:sp>
       <p:pic>
         <p:nvPicPr>
-          <p:cNvPr id="259" name="Google Shape;259;p36"/>
+          <p:cNvPr id="263" name="Google Shape;263;p36"/>
           <p:cNvPicPr preferRelativeResize="0"/>
           <p:nvPr/>
         </p:nvPicPr>
@@ -35688,7 +36993,7 @@
         </p:blipFill>
         <p:spPr>
           <a:xfrm>
-            <a:off x="3867150" y="847713"/>
+            <a:off x="3867150" y="446741"/>
             <a:ext cx="2752724" cy="856875"/>
           </a:xfrm>
           <a:prstGeom prst="rect">
@@ -35708,7 +37013,7 @@
       </p:pic>
       <p:pic>
         <p:nvPicPr>
-          <p:cNvPr id="260" name="Google Shape;260;p36"/>
+          <p:cNvPr id="264" name="Google Shape;264;p36"/>
           <p:cNvPicPr preferRelativeResize="0"/>
           <p:nvPr/>
         </p:nvPicPr>
@@ -35727,8 +37032,997 @@
         </p:blipFill>
         <p:spPr>
           <a:xfrm>
-            <a:off x="4943575" y="2660742"/>
+            <a:off x="6315175" y="1451120"/>
             <a:ext cx="2504975" cy="1547800"/>
+          </a:xfrm>
+          <a:prstGeom prst="rect">
+            <a:avLst/>
+          </a:prstGeom>
+          <a:noFill/>
+          <a:ln w="9525" cap="flat" cmpd="sng">
+            <a:solidFill>
+              <a:srgbClr val="FF0000"/>
+            </a:solidFill>
+            <a:prstDash val="solid"/>
+            <a:round/>
+            <a:headEnd type="none" w="sm" len="sm"/>
+            <a:tailEnd type="none" w="sm" len="sm"/>
+          </a:ln>
+        </p:spPr>
+      </p:pic>
+      <p:sp>
+        <p:nvSpPr>
+          <p:cNvPr id="265" name="Google Shape;265;p36"/>
+          <p:cNvSpPr txBox="1"/>
+          <p:nvPr/>
+        </p:nvSpPr>
+        <p:spPr>
+          <a:xfrm>
+            <a:off x="36575" y="3005975"/>
+            <a:ext cx="6144000" cy="1865400"/>
+          </a:xfrm>
+          <a:prstGeom prst="rect">
+            <a:avLst/>
+          </a:prstGeom>
+          <a:solidFill>
+            <a:srgbClr val="FFF2CC"/>
+          </a:solidFill>
+          <a:ln w="9525" cap="flat" cmpd="sng">
+            <a:solidFill>
+              <a:srgbClr val="FF0000"/>
+            </a:solidFill>
+            <a:prstDash val="solid"/>
+            <a:round/>
+            <a:headEnd type="none" w="sm" len="sm"/>
+            <a:tailEnd type="none" w="sm" len="sm"/>
+          </a:ln>
+        </p:spPr>
+        <p:txBody>
+          <a:bodyPr spcFirstLastPara="1" wrap="square" lIns="9125" tIns="9125" rIns="9125" bIns="9125" anchor="t" anchorCtr="0">
+            <a:spAutoFit/>
+          </a:bodyPr>
+          <a:lstStyle/>
+          <a:p>
+            <a:pPr marL="171450" lvl="0" indent="-133350" algn="l" rtl="0">
+              <a:spcBef>
+                <a:spcPts val="0"/>
+              </a:spcBef>
+              <a:spcAft>
+                <a:spcPts val="0"/>
+              </a:spcAft>
+              <a:buClr>
+                <a:srgbClr val="FF0000"/>
+              </a:buClr>
+              <a:buSzPts val="1200"/>
+              <a:buFont typeface="Calibri"/>
+              <a:buChar char="●"/>
+            </a:pPr>
+            <a:r>
+              <a:rPr lang="en" sz="1200" b="1">
+                <a:solidFill>
+                  <a:srgbClr val="FF0000"/>
+                </a:solidFill>
+                <a:latin typeface="Calibri"/>
+                <a:ea typeface="Calibri"/>
+                <a:cs typeface="Calibri"/>
+                <a:sym typeface="Calibri"/>
+              </a:rPr>
+              <a:t>Google Home MCP</a:t>
+            </a:r>
+            <a:endParaRPr sz="1200" b="1">
+              <a:solidFill>
+                <a:srgbClr val="FF0000"/>
+              </a:solidFill>
+              <a:latin typeface="Calibri"/>
+              <a:ea typeface="Calibri"/>
+              <a:cs typeface="Calibri"/>
+              <a:sym typeface="Calibri"/>
+            </a:endParaRPr>
+          </a:p>
+          <a:p>
+            <a:pPr marL="171450" lvl="0" indent="-133350" algn="l" rtl="0">
+              <a:spcBef>
+                <a:spcPts val="0"/>
+              </a:spcBef>
+              <a:spcAft>
+                <a:spcPts val="0"/>
+              </a:spcAft>
+              <a:buSzPts val="1200"/>
+              <a:buFont typeface="Calibri"/>
+              <a:buChar char="●"/>
+            </a:pPr>
+            <a:r>
+              <a:rPr lang="en" sz="1200">
+                <a:latin typeface="Calibri"/>
+                <a:ea typeface="Calibri"/>
+                <a:cs typeface="Calibri"/>
+                <a:sym typeface="Calibri"/>
+              </a:rPr>
+              <a:t>Google Home - managing  Nest products and compatible devices (lights, thermostats, cameras, etc.) from smartphone</a:t>
+            </a:r>
+            <a:endParaRPr sz="1200">
+              <a:latin typeface="Calibri"/>
+              <a:ea typeface="Calibri"/>
+              <a:cs typeface="Calibri"/>
+              <a:sym typeface="Calibri"/>
+            </a:endParaRPr>
+          </a:p>
+          <a:p>
+            <a:pPr marL="171450" lvl="0" indent="-133350" algn="l" rtl="0">
+              <a:spcBef>
+                <a:spcPts val="0"/>
+              </a:spcBef>
+              <a:spcAft>
+                <a:spcPts val="0"/>
+              </a:spcAft>
+              <a:buSzPts val="1200"/>
+              <a:buFont typeface="Calibri"/>
+              <a:buChar char="●"/>
+            </a:pPr>
+            <a:r>
+              <a:rPr lang="en" sz="1200">
+                <a:latin typeface="Calibri"/>
+                <a:ea typeface="Calibri"/>
+                <a:cs typeface="Calibri"/>
+                <a:sym typeface="Calibri"/>
+              </a:rPr>
+              <a:t>Google introduces Home MCP server for AI Agents to interact with home devices</a:t>
+            </a:r>
+            <a:endParaRPr sz="1200">
+              <a:latin typeface="Calibri"/>
+              <a:ea typeface="Calibri"/>
+              <a:cs typeface="Calibri"/>
+              <a:sym typeface="Calibri"/>
+            </a:endParaRPr>
+          </a:p>
+          <a:p>
+            <a:pPr marL="171450" lvl="0" indent="-133350" algn="l" rtl="0">
+              <a:spcBef>
+                <a:spcPts val="0"/>
+              </a:spcBef>
+              <a:spcAft>
+                <a:spcPts val="0"/>
+              </a:spcAft>
+              <a:buSzPts val="1200"/>
+              <a:buFont typeface="Calibri"/>
+              <a:buChar char="●"/>
+            </a:pPr>
+            <a:r>
+              <a:rPr lang="en" sz="1200" u="sng">
+                <a:solidFill>
+                  <a:schemeClr val="hlink"/>
+                </a:solidFill>
+                <a:latin typeface="Calibri"/>
+                <a:ea typeface="Calibri"/>
+                <a:cs typeface="Calibri"/>
+                <a:sym typeface="Calibri"/>
+                <a:hlinkClick r:id="rId7"/>
+              </a:rPr>
+              <a:t>https://tech.yahoo.com/home/articles/ai-agents-now-control-google-170000833.html</a:t>
+            </a:r>
+            <a:r>
+              <a:rPr lang="en" sz="1200">
+                <a:latin typeface="Calibri"/>
+                <a:ea typeface="Calibri"/>
+                <a:cs typeface="Calibri"/>
+                <a:sym typeface="Calibri"/>
+              </a:rPr>
+              <a:t> </a:t>
+            </a:r>
+            <a:endParaRPr sz="1200">
+              <a:latin typeface="Calibri"/>
+              <a:ea typeface="Calibri"/>
+              <a:cs typeface="Calibri"/>
+              <a:sym typeface="Calibri"/>
+            </a:endParaRPr>
+          </a:p>
+          <a:p>
+            <a:pPr marL="171450" lvl="0" indent="-133350" algn="l" rtl="0">
+              <a:spcBef>
+                <a:spcPts val="0"/>
+              </a:spcBef>
+              <a:spcAft>
+                <a:spcPts val="0"/>
+              </a:spcAft>
+              <a:buSzPts val="1200"/>
+              <a:buFont typeface="Calibri"/>
+              <a:buChar char="●"/>
+            </a:pPr>
+            <a:r>
+              <a:rPr lang="en" sz="1200">
+                <a:latin typeface="Calibri"/>
+                <a:ea typeface="Calibri"/>
+                <a:cs typeface="Calibri"/>
+                <a:sym typeface="Calibri"/>
+              </a:rPr>
+              <a:t>Control devices, inspect activity, review camera summaries, and build dashboards</a:t>
+            </a:r>
+            <a:endParaRPr sz="1200">
+              <a:latin typeface="Calibri"/>
+              <a:ea typeface="Calibri"/>
+              <a:cs typeface="Calibri"/>
+              <a:sym typeface="Calibri"/>
+            </a:endParaRPr>
+          </a:p>
+          <a:p>
+            <a:pPr marL="171450" lvl="0" indent="-133350" algn="l" rtl="0">
+              <a:spcBef>
+                <a:spcPts val="0"/>
+              </a:spcBef>
+              <a:spcAft>
+                <a:spcPts val="0"/>
+              </a:spcAft>
+              <a:buSzPts val="1200"/>
+              <a:buFont typeface="Calibri"/>
+              <a:buChar char="●"/>
+            </a:pPr>
+            <a:r>
+              <a:rPr lang="en" sz="1200">
+                <a:latin typeface="Calibri"/>
+                <a:ea typeface="Calibri"/>
+                <a:cs typeface="Calibri"/>
+                <a:sym typeface="Calibri"/>
+              </a:rPr>
+              <a:t>Agents can take authorized actions rather than merely answer questions about the home.</a:t>
+            </a:r>
+            <a:endParaRPr sz="1200">
+              <a:latin typeface="Calibri"/>
+              <a:ea typeface="Calibri"/>
+              <a:cs typeface="Calibri"/>
+              <a:sym typeface="Calibri"/>
+            </a:endParaRPr>
+          </a:p>
+          <a:p>
+            <a:pPr marL="171450" lvl="0" indent="-133350" algn="l" rtl="0">
+              <a:spcBef>
+                <a:spcPts val="0"/>
+              </a:spcBef>
+              <a:spcAft>
+                <a:spcPts val="0"/>
+              </a:spcAft>
+              <a:buSzPts val="1200"/>
+              <a:buFont typeface="Calibri"/>
+              <a:buChar char="●"/>
+            </a:pPr>
+            <a:r>
+              <a:rPr lang="en" sz="1200">
+                <a:latin typeface="Calibri"/>
+                <a:ea typeface="Calibri"/>
+                <a:cs typeface="Calibri"/>
+                <a:sym typeface="Calibri"/>
+              </a:rPr>
+              <a:t>Early access is limited to U.S. Google Home Premium Advanced subscribers and requires Google Cloud setup plus explicit sign-in and permission grants</a:t>
+            </a:r>
+            <a:endParaRPr sz="1200">
+              <a:latin typeface="Calibri"/>
+              <a:ea typeface="Calibri"/>
+              <a:cs typeface="Calibri"/>
+              <a:sym typeface="Calibri"/>
+            </a:endParaRPr>
+          </a:p>
+          <a:p>
+            <a:pPr marL="171450" lvl="0" indent="-133350" algn="l" rtl="0">
+              <a:spcBef>
+                <a:spcPts val="0"/>
+              </a:spcBef>
+              <a:spcAft>
+                <a:spcPts val="0"/>
+              </a:spcAft>
+              <a:buSzPts val="1200"/>
+              <a:buFont typeface="Calibri"/>
+              <a:buChar char="●"/>
+            </a:pPr>
+            <a:r>
+              <a:rPr lang="en" sz="1200" u="sng">
+                <a:solidFill>
+                  <a:schemeClr val="hlink"/>
+                </a:solidFill>
+                <a:latin typeface="Calibri"/>
+                <a:ea typeface="Calibri"/>
+                <a:cs typeface="Calibri"/>
+                <a:sym typeface="Calibri"/>
+                <a:hlinkClick r:id="rId8"/>
+              </a:rPr>
+              <a:t>https://home.googleapis.com/mcp</a:t>
+            </a:r>
+            <a:r>
+              <a:rPr lang="en" sz="1200">
+                <a:latin typeface="Calibri"/>
+                <a:ea typeface="Calibri"/>
+                <a:cs typeface="Calibri"/>
+                <a:sym typeface="Calibri"/>
+              </a:rPr>
+              <a:t> </a:t>
+            </a:r>
+            <a:endParaRPr sz="1200">
+              <a:latin typeface="Calibri"/>
+              <a:ea typeface="Calibri"/>
+              <a:cs typeface="Calibri"/>
+              <a:sym typeface="Calibri"/>
+            </a:endParaRPr>
+          </a:p>
+        </p:txBody>
+      </p:sp>
+    </p:spTree>
+  </p:cSld>
+  <p:clrMapOvr>
+    <a:masterClrMapping/>
+  </p:clrMapOvr>
+</p:sld>
+</file>
+
+<file path=ppt/slides/slide25.xml><?xml version="1.0" encoding="utf-8"?>
+<p:sld xmlns:a="http://schemas.openxmlformats.org/drawingml/2006/main" xmlns:r="http://schemas.openxmlformats.org/officeDocument/2006/relationships" xmlns:p="http://schemas.openxmlformats.org/presentationml/2006/main">
+  <p:cSld>
+    <p:spTree>
+      <p:nvGrpSpPr>
+        <p:cNvPr id="1" name="Shape 269"/>
+        <p:cNvGrpSpPr/>
+        <p:nvPr/>
+      </p:nvGrpSpPr>
+      <p:grpSpPr>
+        <a:xfrm>
+          <a:off x="0" y="0"/>
+          <a:ext cx="0" cy="0"/>
+          <a:chOff x="0" y="0"/>
+          <a:chExt cx="0" cy="0"/>
+        </a:xfrm>
+      </p:grpSpPr>
+      <p:sp>
+        <p:nvSpPr>
+          <p:cNvPr id="270" name="Google Shape;270;p37"/>
+          <p:cNvSpPr txBox="1"/>
+          <p:nvPr/>
+        </p:nvSpPr>
+        <p:spPr>
+          <a:xfrm>
+            <a:off x="36576" y="-27432"/>
+            <a:ext cx="1177200" cy="384000"/>
+          </a:xfrm>
+          <a:prstGeom prst="rect">
+            <a:avLst/>
+          </a:prstGeom>
+          <a:noFill/>
+          <a:ln>
+            <a:noFill/>
+          </a:ln>
+        </p:spPr>
+        <p:txBody>
+          <a:bodyPr spcFirstLastPara="1" wrap="square" lIns="91425" tIns="91425" rIns="91425" bIns="91425" anchor="t" anchorCtr="0">
+            <a:noAutofit/>
+          </a:bodyPr>
+          <a:lstStyle/>
+          <a:p>
+            <a:pPr marL="0" lvl="0" indent="0" algn="l" rtl="0">
+              <a:spcBef>
+                <a:spcPts val="0"/>
+              </a:spcBef>
+              <a:spcAft>
+                <a:spcPts val="0"/>
+              </a:spcAft>
+              <a:buNone/>
+            </a:pPr>
+            <a:r>
+              <a:rPr lang="en" sz="2000" b="1">
+                <a:latin typeface="Calibri"/>
+                <a:ea typeface="Calibri"/>
+                <a:cs typeface="Calibri"/>
+                <a:sym typeface="Calibri"/>
+              </a:rPr>
+              <a:t>AI News</a:t>
+            </a:r>
+            <a:endParaRPr sz="2000" b="1">
+              <a:latin typeface="Calibri"/>
+              <a:ea typeface="Calibri"/>
+              <a:cs typeface="Calibri"/>
+              <a:sym typeface="Calibri"/>
+            </a:endParaRPr>
+          </a:p>
+        </p:txBody>
+      </p:sp>
+      <p:sp>
+        <p:nvSpPr>
+          <p:cNvPr id="271" name="Google Shape;271;p37"/>
+          <p:cNvSpPr txBox="1"/>
+          <p:nvPr/>
+        </p:nvSpPr>
+        <p:spPr>
+          <a:xfrm>
+            <a:off x="60333" y="471875"/>
+            <a:ext cx="4465500" cy="1696200"/>
+          </a:xfrm>
+          <a:prstGeom prst="rect">
+            <a:avLst/>
+          </a:prstGeom>
+          <a:solidFill>
+            <a:srgbClr val="FFF2CC"/>
+          </a:solidFill>
+          <a:ln w="9525" cap="flat" cmpd="sng">
+            <a:solidFill>
+              <a:srgbClr val="FF0000"/>
+            </a:solidFill>
+            <a:prstDash val="solid"/>
+            <a:round/>
+            <a:headEnd type="none" w="sm" len="sm"/>
+            <a:tailEnd type="none" w="sm" len="sm"/>
+          </a:ln>
+        </p:spPr>
+        <p:txBody>
+          <a:bodyPr spcFirstLastPara="1" wrap="square" lIns="9125" tIns="9125" rIns="9125" bIns="9125" anchor="t" anchorCtr="0">
+            <a:spAutoFit/>
+          </a:bodyPr>
+          <a:lstStyle/>
+          <a:p>
+            <a:pPr marL="171450" lvl="0" indent="-133350" algn="l" rtl="0">
+              <a:spcBef>
+                <a:spcPts val="0"/>
+              </a:spcBef>
+              <a:spcAft>
+                <a:spcPts val="0"/>
+              </a:spcAft>
+              <a:buSzPts val="1200"/>
+              <a:buFont typeface="Calibri"/>
+              <a:buChar char="●"/>
+            </a:pPr>
+            <a:r>
+              <a:rPr lang="en" sz="1300" b="1">
+                <a:solidFill>
+                  <a:srgbClr val="FF0000"/>
+                </a:solidFill>
+                <a:latin typeface="Calibri"/>
+                <a:ea typeface="Calibri"/>
+                <a:cs typeface="Calibri"/>
+                <a:sym typeface="Calibri"/>
+              </a:rPr>
+              <a:t>Recursive Raises Seed $4.65B at $5B Valuation</a:t>
+            </a:r>
+            <a:endParaRPr sz="1300" b="1">
+              <a:solidFill>
+                <a:srgbClr val="FF0000"/>
+              </a:solidFill>
+              <a:latin typeface="Calibri"/>
+              <a:ea typeface="Calibri"/>
+              <a:cs typeface="Calibri"/>
+              <a:sym typeface="Calibri"/>
+            </a:endParaRPr>
+          </a:p>
+          <a:p>
+            <a:pPr marL="171450" lvl="0" indent="-133350" algn="l" rtl="0">
+              <a:spcBef>
+                <a:spcPts val="0"/>
+              </a:spcBef>
+              <a:spcAft>
+                <a:spcPts val="0"/>
+              </a:spcAft>
+              <a:buSzPts val="1200"/>
+              <a:buFont typeface="Calibri"/>
+              <a:buChar char="●"/>
+            </a:pPr>
+            <a:r>
+              <a:rPr lang="en" sz="1200" b="1">
+                <a:solidFill>
+                  <a:srgbClr val="3C78D8"/>
+                </a:solidFill>
+                <a:latin typeface="Calibri"/>
+                <a:ea typeface="Calibri"/>
+                <a:cs typeface="Calibri"/>
+                <a:sym typeface="Calibri"/>
+              </a:rPr>
+              <a:t>Richard Socher</a:t>
+            </a:r>
+            <a:r>
+              <a:rPr lang="en" sz="1200">
+                <a:latin typeface="Calibri"/>
+                <a:ea typeface="Calibri"/>
+                <a:cs typeface="Calibri"/>
+                <a:sym typeface="Calibri"/>
+              </a:rPr>
+              <a:t> spun Recursive out of </a:t>
+            </a:r>
+            <a:r>
+              <a:rPr lang="en" sz="1200" b="1">
+                <a:solidFill>
+                  <a:srgbClr val="3C78D8"/>
+                </a:solidFill>
+                <a:latin typeface="Calibri"/>
+                <a:ea typeface="Calibri"/>
+                <a:cs typeface="Calibri"/>
+                <a:sym typeface="Calibri"/>
+              </a:rPr>
+              <a:t>You.com</a:t>
+            </a:r>
+            <a:r>
+              <a:rPr lang="en" sz="1200">
+                <a:latin typeface="Calibri"/>
+                <a:ea typeface="Calibri"/>
+                <a:cs typeface="Calibri"/>
+                <a:sym typeface="Calibri"/>
+              </a:rPr>
+              <a:t> to work </a:t>
+            </a:r>
+            <a:br>
+              <a:rPr lang="en" sz="1200">
+                <a:latin typeface="Calibri"/>
+                <a:ea typeface="Calibri"/>
+                <a:cs typeface="Calibri"/>
+                <a:sym typeface="Calibri"/>
+              </a:rPr>
+            </a:br>
+            <a:r>
+              <a:rPr lang="en" sz="1200">
+                <a:latin typeface="Calibri"/>
+                <a:ea typeface="Calibri"/>
+                <a:cs typeface="Calibri"/>
+                <a:sym typeface="Calibri"/>
+              </a:rPr>
+              <a:t>on </a:t>
+            </a:r>
+            <a:r>
+              <a:rPr lang="en" sz="1200" b="1">
+                <a:latin typeface="Calibri"/>
+                <a:ea typeface="Calibri"/>
+                <a:cs typeface="Calibri"/>
+                <a:sym typeface="Calibri"/>
+              </a:rPr>
+              <a:t>recursive self improvement</a:t>
+            </a:r>
+            <a:endParaRPr sz="1200">
+              <a:latin typeface="Calibri"/>
+              <a:ea typeface="Calibri"/>
+              <a:cs typeface="Calibri"/>
+              <a:sym typeface="Calibri"/>
+            </a:endParaRPr>
+          </a:p>
+          <a:p>
+            <a:pPr marL="171450" lvl="0" indent="-133350" algn="l" rtl="0">
+              <a:spcBef>
+                <a:spcPts val="0"/>
+              </a:spcBef>
+              <a:spcAft>
+                <a:spcPts val="0"/>
+              </a:spcAft>
+              <a:buSzPts val="1200"/>
+              <a:buFont typeface="Calibri"/>
+              <a:buChar char="●"/>
+            </a:pPr>
+            <a:r>
+              <a:rPr lang="en" sz="1200">
+                <a:latin typeface="Calibri"/>
+                <a:ea typeface="Calibri"/>
+                <a:cs typeface="Calibri"/>
+                <a:sym typeface="Calibri"/>
+              </a:rPr>
+              <a:t>Beat humans and their agents on optimization tasks</a:t>
+            </a:r>
+            <a:endParaRPr sz="1200">
+              <a:latin typeface="Calibri"/>
+              <a:ea typeface="Calibri"/>
+              <a:cs typeface="Calibri"/>
+              <a:sym typeface="Calibri"/>
+            </a:endParaRPr>
+          </a:p>
+          <a:p>
+            <a:pPr marL="171450" lvl="0" indent="-133350" algn="l" rtl="0">
+              <a:spcBef>
+                <a:spcPts val="0"/>
+              </a:spcBef>
+              <a:spcAft>
+                <a:spcPts val="0"/>
+              </a:spcAft>
+              <a:buSzPts val="1200"/>
+              <a:buFont typeface="Calibri"/>
+              <a:buChar char="●"/>
+            </a:pPr>
+            <a:r>
+              <a:rPr lang="en" sz="1200">
+                <a:latin typeface="Calibri"/>
+                <a:ea typeface="Calibri"/>
+                <a:cs typeface="Calibri"/>
+                <a:sym typeface="Calibri"/>
+              </a:rPr>
+              <a:t>It found NVIDIA GPU kernel improvements</a:t>
+            </a:r>
+            <a:endParaRPr sz="1200">
+              <a:latin typeface="Calibri"/>
+              <a:ea typeface="Calibri"/>
+              <a:cs typeface="Calibri"/>
+              <a:sym typeface="Calibri"/>
+            </a:endParaRPr>
+          </a:p>
+          <a:p>
+            <a:pPr marL="171450" lvl="0" indent="-133350" algn="l" rtl="0">
+              <a:spcBef>
+                <a:spcPts val="0"/>
+              </a:spcBef>
+              <a:spcAft>
+                <a:spcPts val="0"/>
+              </a:spcAft>
+              <a:buSzPts val="1200"/>
+              <a:buFont typeface="Calibri"/>
+              <a:buChar char="●"/>
+            </a:pPr>
+            <a:r>
+              <a:rPr lang="en" sz="1200">
+                <a:latin typeface="Calibri"/>
+                <a:ea typeface="Calibri"/>
+                <a:cs typeface="Calibri"/>
+                <a:sym typeface="Calibri"/>
+              </a:rPr>
+              <a:t>The goal - a Eureka Machine: a system to improve invention itself</a:t>
+            </a:r>
+            <a:endParaRPr sz="1200">
+              <a:latin typeface="Calibri"/>
+              <a:ea typeface="Calibri"/>
+              <a:cs typeface="Calibri"/>
+              <a:sym typeface="Calibri"/>
+            </a:endParaRPr>
+          </a:p>
+          <a:p>
+            <a:pPr marL="171450" lvl="0" indent="-133350" algn="l" rtl="0">
+              <a:spcBef>
+                <a:spcPts val="0"/>
+              </a:spcBef>
+              <a:spcAft>
+                <a:spcPts val="0"/>
+              </a:spcAft>
+              <a:buSzPts val="1200"/>
+              <a:buFont typeface="Calibri"/>
+              <a:buChar char="●"/>
+            </a:pPr>
+            <a:r>
+              <a:rPr lang="en" sz="1200">
+                <a:latin typeface="Calibri"/>
+                <a:ea typeface="Calibri"/>
+                <a:cs typeface="Calibri"/>
+                <a:sym typeface="Calibri"/>
+              </a:rPr>
+              <a:t>A research that takes thousands of people years </a:t>
+            </a:r>
+            <a:br>
+              <a:rPr lang="en" sz="1200">
+                <a:latin typeface="Calibri"/>
+                <a:ea typeface="Calibri"/>
+                <a:cs typeface="Calibri"/>
+                <a:sym typeface="Calibri"/>
+              </a:rPr>
+            </a:br>
+            <a:r>
+              <a:rPr lang="en" sz="1200">
+                <a:latin typeface="Calibri"/>
+                <a:ea typeface="Calibri"/>
+                <a:cs typeface="Calibri"/>
+                <a:sym typeface="Calibri"/>
+              </a:rPr>
+              <a:t>could compress into weeks</a:t>
+            </a:r>
+            <a:endParaRPr sz="1200">
+              <a:latin typeface="Calibri"/>
+              <a:ea typeface="Calibri"/>
+              <a:cs typeface="Calibri"/>
+              <a:sym typeface="Calibri"/>
+            </a:endParaRPr>
+          </a:p>
+          <a:p>
+            <a:pPr marL="171450" lvl="0" indent="-133350" algn="l" rtl="0">
+              <a:spcBef>
+                <a:spcPts val="0"/>
+              </a:spcBef>
+              <a:spcAft>
+                <a:spcPts val="0"/>
+              </a:spcAft>
+              <a:buSzPts val="1200"/>
+              <a:buFont typeface="Calibri"/>
+              <a:buChar char="●"/>
+            </a:pPr>
+            <a:r>
+              <a:rPr lang="en" sz="1200" u="sng">
+                <a:solidFill>
+                  <a:schemeClr val="hlink"/>
+                </a:solidFill>
+                <a:latin typeface="Calibri"/>
+                <a:ea typeface="Calibri"/>
+                <a:cs typeface="Calibri"/>
+                <a:sym typeface="Calibri"/>
+                <a:hlinkClick r:id="rId3"/>
+              </a:rPr>
+              <a:t>https://www.recursive.com</a:t>
+            </a:r>
+            <a:r>
+              <a:rPr lang="en" sz="1200">
+                <a:latin typeface="Calibri"/>
+                <a:ea typeface="Calibri"/>
+                <a:cs typeface="Calibri"/>
+                <a:sym typeface="Calibri"/>
+              </a:rPr>
+              <a:t> </a:t>
+            </a:r>
+            <a:endParaRPr sz="900">
+              <a:solidFill>
+                <a:srgbClr val="0563C1"/>
+              </a:solidFill>
+              <a:latin typeface="Calibri"/>
+              <a:ea typeface="Calibri"/>
+              <a:cs typeface="Calibri"/>
+              <a:sym typeface="Calibri"/>
+            </a:endParaRPr>
+          </a:p>
+        </p:txBody>
+      </p:sp>
+      <p:pic>
+        <p:nvPicPr>
+          <p:cNvPr id="272" name="Google Shape;272;p37"/>
+          <p:cNvPicPr preferRelativeResize="0"/>
+          <p:nvPr/>
+        </p:nvPicPr>
+        <p:blipFill>
+          <a:blip r:embed="rId4" cstate="email">
+            <a:alphaModFix/>
+            <a:extLst>
+              <a:ext uri="{28A0092B-C50C-407E-A947-70E740481C1C}">
+                <a14:useLocalDpi xmlns:a14="http://schemas.microsoft.com/office/drawing/2010/main"/>
+              </a:ext>
+            </a:extLst>
+          </a:blip>
+          <a:stretch>
+            <a:fillRect/>
+          </a:stretch>
+        </p:blipFill>
+        <p:spPr>
+          <a:xfrm>
+            <a:off x="4713850" y="471875"/>
+            <a:ext cx="1514792" cy="1696200"/>
+          </a:xfrm>
+          <a:prstGeom prst="rect">
+            <a:avLst/>
+          </a:prstGeom>
+          <a:noFill/>
+          <a:ln w="9525" cap="flat" cmpd="sng">
+            <a:solidFill>
+              <a:srgbClr val="FF0000"/>
+            </a:solidFill>
+            <a:prstDash val="solid"/>
+            <a:round/>
+            <a:headEnd type="none" w="sm" len="sm"/>
+            <a:tailEnd type="none" w="sm" len="sm"/>
+          </a:ln>
+        </p:spPr>
+      </p:pic>
+      <p:pic>
+        <p:nvPicPr>
+          <p:cNvPr id="273" name="Google Shape;273;p37"/>
+          <p:cNvPicPr preferRelativeResize="0"/>
+          <p:nvPr/>
+        </p:nvPicPr>
+        <p:blipFill>
+          <a:blip r:embed="rId5" cstate="email">
+            <a:alphaModFix/>
+            <a:extLst>
+              <a:ext uri="{28A0092B-C50C-407E-A947-70E740481C1C}">
+                <a14:useLocalDpi xmlns:a14="http://schemas.microsoft.com/office/drawing/2010/main"/>
+              </a:ext>
+            </a:extLst>
+          </a:blip>
+          <a:stretch>
+            <a:fillRect/>
+          </a:stretch>
+        </p:blipFill>
+        <p:spPr>
+          <a:xfrm>
+            <a:off x="6364975" y="859400"/>
+            <a:ext cx="2615350" cy="781975"/>
+          </a:xfrm>
+          <a:prstGeom prst="rect">
+            <a:avLst/>
+          </a:prstGeom>
+          <a:noFill/>
+          <a:ln w="9525" cap="flat" cmpd="sng">
+            <a:solidFill>
+              <a:srgbClr val="FF0000"/>
+            </a:solidFill>
+            <a:prstDash val="solid"/>
+            <a:round/>
+            <a:headEnd type="none" w="sm" len="sm"/>
+            <a:tailEnd type="none" w="sm" len="sm"/>
+          </a:ln>
+        </p:spPr>
+      </p:pic>
+      <p:sp>
+        <p:nvSpPr>
+          <p:cNvPr id="274" name="Google Shape;274;p37"/>
+          <p:cNvSpPr txBox="1"/>
+          <p:nvPr/>
+        </p:nvSpPr>
+        <p:spPr>
+          <a:xfrm>
+            <a:off x="36575" y="2799600"/>
+            <a:ext cx="4465500" cy="1080600"/>
+          </a:xfrm>
+          <a:prstGeom prst="rect">
+            <a:avLst/>
+          </a:prstGeom>
+          <a:solidFill>
+            <a:srgbClr val="FFF2CC"/>
+          </a:solidFill>
+          <a:ln w="9525" cap="flat" cmpd="sng">
+            <a:solidFill>
+              <a:srgbClr val="FF0000"/>
+            </a:solidFill>
+            <a:prstDash val="solid"/>
+            <a:round/>
+            <a:headEnd type="none" w="sm" len="sm"/>
+            <a:tailEnd type="none" w="sm" len="sm"/>
+          </a:ln>
+        </p:spPr>
+        <p:txBody>
+          <a:bodyPr spcFirstLastPara="1" wrap="square" lIns="9125" tIns="9125" rIns="9125" bIns="9125" anchor="t" anchorCtr="0">
+            <a:spAutoFit/>
+          </a:bodyPr>
+          <a:lstStyle/>
+          <a:p>
+            <a:pPr marL="171450" lvl="0" indent="-133350" algn="l" rtl="0">
+              <a:spcBef>
+                <a:spcPts val="0"/>
+              </a:spcBef>
+              <a:spcAft>
+                <a:spcPts val="0"/>
+              </a:spcAft>
+              <a:buClr>
+                <a:srgbClr val="FF0000"/>
+              </a:buClr>
+              <a:buSzPts val="1200"/>
+              <a:buFont typeface="Calibri"/>
+              <a:buChar char="●"/>
+            </a:pPr>
+            <a:r>
+              <a:rPr lang="en" sz="1200" b="1">
+                <a:solidFill>
+                  <a:srgbClr val="FF0000"/>
+                </a:solidFill>
+                <a:latin typeface="Calibri"/>
+                <a:ea typeface="Calibri"/>
+                <a:cs typeface="Calibri"/>
+                <a:sym typeface="Calibri"/>
+              </a:rPr>
+              <a:t>Databricks now offers Astra to 3.5K Engineers</a:t>
+            </a:r>
+            <a:endParaRPr sz="1200" b="1">
+              <a:solidFill>
+                <a:srgbClr val="FF0000"/>
+              </a:solidFill>
+              <a:latin typeface="Calibri"/>
+              <a:ea typeface="Calibri"/>
+              <a:cs typeface="Calibri"/>
+              <a:sym typeface="Calibri"/>
+            </a:endParaRPr>
+          </a:p>
+          <a:p>
+            <a:pPr marL="171450" lvl="0" indent="-133350" algn="l" rtl="0">
+              <a:spcBef>
+                <a:spcPts val="0"/>
+              </a:spcBef>
+              <a:spcAft>
+                <a:spcPts val="0"/>
+              </a:spcAft>
+              <a:buSzPts val="1200"/>
+              <a:buFont typeface="Calibri"/>
+              <a:buChar char="●"/>
+            </a:pPr>
+            <a:r>
+              <a:rPr lang="en" sz="1200">
+                <a:latin typeface="Calibri"/>
+                <a:ea typeface="Calibri"/>
+                <a:cs typeface="Calibri"/>
+                <a:sym typeface="Calibri"/>
+              </a:rPr>
+              <a:t>It beats Opus 5 and Sol 5.6 on complex, long horizon tasks, especially system design</a:t>
+            </a:r>
+            <a:endParaRPr sz="1200">
+              <a:latin typeface="Calibri"/>
+              <a:ea typeface="Calibri"/>
+              <a:cs typeface="Calibri"/>
+              <a:sym typeface="Calibri"/>
+            </a:endParaRPr>
+          </a:p>
+          <a:p>
+            <a:pPr marL="171450" lvl="0" indent="-133350" algn="l" rtl="0">
+              <a:spcBef>
+                <a:spcPts val="0"/>
+              </a:spcBef>
+              <a:spcAft>
+                <a:spcPts val="0"/>
+              </a:spcAft>
+              <a:buSzPts val="1200"/>
+              <a:buFont typeface="Calibri"/>
+              <a:buChar char="●"/>
+            </a:pPr>
+            <a:r>
+              <a:rPr lang="en" sz="1200">
+                <a:latin typeface="Calibri"/>
+                <a:ea typeface="Calibri"/>
+                <a:cs typeface="Calibri"/>
+                <a:sym typeface="Calibri"/>
+              </a:rPr>
+              <a:t>Overall coding spend went up 60%. Benchmarks usually show Astra cheaper, but it is more expensive for real engineering</a:t>
+            </a:r>
+            <a:endParaRPr sz="1200" b="1">
+              <a:latin typeface="Calibri"/>
+              <a:ea typeface="Calibri"/>
+              <a:cs typeface="Calibri"/>
+              <a:sym typeface="Calibri"/>
+            </a:endParaRPr>
+          </a:p>
+          <a:p>
+            <a:pPr marL="171450" lvl="0" indent="-114300" algn="l" rtl="0">
+              <a:spcBef>
+                <a:spcPts val="0"/>
+              </a:spcBef>
+              <a:spcAft>
+                <a:spcPts val="0"/>
+              </a:spcAft>
+              <a:buSzPts val="900"/>
+              <a:buFont typeface="Calibri"/>
+              <a:buChar char="●"/>
+            </a:pPr>
+            <a:r>
+              <a:rPr lang="en" sz="900" u="sng">
+                <a:solidFill>
+                  <a:schemeClr val="hlink"/>
+                </a:solidFill>
+                <a:latin typeface="Calibri"/>
+                <a:ea typeface="Calibri"/>
+                <a:cs typeface="Calibri"/>
+                <a:sym typeface="Calibri"/>
+                <a:hlinkClick r:id="rId6"/>
+              </a:rPr>
+              <a:t>https://x.com/pwendell/status/2100299179923067016</a:t>
+            </a:r>
+            <a:r>
+              <a:rPr lang="en" sz="900">
+                <a:solidFill>
+                  <a:srgbClr val="0563C1"/>
+                </a:solidFill>
+                <a:latin typeface="Calibri"/>
+                <a:ea typeface="Calibri"/>
+                <a:cs typeface="Calibri"/>
+                <a:sym typeface="Calibri"/>
+              </a:rPr>
+              <a:t> </a:t>
+            </a:r>
+            <a:endParaRPr sz="900">
+              <a:solidFill>
+                <a:srgbClr val="0563C1"/>
+              </a:solidFill>
+              <a:latin typeface="Calibri"/>
+              <a:ea typeface="Calibri"/>
+              <a:cs typeface="Calibri"/>
+              <a:sym typeface="Calibri"/>
+            </a:endParaRPr>
+          </a:p>
+        </p:txBody>
+      </p:sp>
+      <p:pic>
+        <p:nvPicPr>
+          <p:cNvPr id="275" name="Google Shape;275;p37"/>
+          <p:cNvPicPr preferRelativeResize="0"/>
+          <p:nvPr/>
+        </p:nvPicPr>
+        <p:blipFill>
+          <a:blip r:embed="rId7" cstate="email">
+            <a:alphaModFix/>
+            <a:extLst>
+              <a:ext uri="{28A0092B-C50C-407E-A947-70E740481C1C}">
+                <a14:useLocalDpi xmlns:a14="http://schemas.microsoft.com/office/drawing/2010/main"/>
+              </a:ext>
+            </a:extLst>
+          </a:blip>
+          <a:stretch>
+            <a:fillRect/>
+          </a:stretch>
+        </p:blipFill>
+        <p:spPr>
+          <a:xfrm>
+            <a:off x="4713850" y="2560038"/>
+            <a:ext cx="2980383" cy="1559724"/>
           </a:xfrm>
           <a:prstGeom prst="rect">
             <a:avLst/>
@@ -35753,12 +38047,12 @@
 </p:sld>
 </file>
 
-<file path=ppt/slides/slide25.xml><?xml version="1.0" encoding="utf-8"?>
+<file path=ppt/slides/slide26.xml><?xml version="1.0" encoding="utf-8"?>
 <p:sld xmlns:a="http://schemas.openxmlformats.org/drawingml/2006/main" xmlns:r="http://schemas.openxmlformats.org/officeDocument/2006/relationships" xmlns:p="http://schemas.openxmlformats.org/presentationml/2006/main">
   <p:cSld>
     <p:spTree>
       <p:nvGrpSpPr>
-        <p:cNvPr id="1" name="Shape 264"/>
+        <p:cNvPr id="1" name="Shape 279"/>
         <p:cNvGrpSpPr/>
         <p:nvPr/>
       </p:nvGrpSpPr>
@@ -35772,7 +38066,1420 @@
       </p:grpSpPr>
       <p:sp>
         <p:nvSpPr>
-          <p:cNvPr id="265" name="Google Shape;265;p37"/>
+          <p:cNvPr id="280" name="Google Shape;280;p38"/>
+          <p:cNvSpPr txBox="1"/>
+          <p:nvPr/>
+        </p:nvSpPr>
+        <p:spPr>
+          <a:xfrm>
+            <a:off x="36576" y="-27432"/>
+            <a:ext cx="1177200" cy="384000"/>
+          </a:xfrm>
+          <a:prstGeom prst="rect">
+            <a:avLst/>
+          </a:prstGeom>
+          <a:noFill/>
+          <a:ln>
+            <a:noFill/>
+          </a:ln>
+        </p:spPr>
+        <p:txBody>
+          <a:bodyPr spcFirstLastPara="1" wrap="square" lIns="91425" tIns="91425" rIns="91425" bIns="91425" anchor="t" anchorCtr="0">
+            <a:noAutofit/>
+          </a:bodyPr>
+          <a:lstStyle/>
+          <a:p>
+            <a:pPr marL="0" lvl="0" indent="0" algn="l" rtl="0">
+              <a:spcBef>
+                <a:spcPts val="0"/>
+              </a:spcBef>
+              <a:spcAft>
+                <a:spcPts val="0"/>
+              </a:spcAft>
+              <a:buNone/>
+            </a:pPr>
+            <a:r>
+              <a:rPr lang="en" sz="2000" b="1">
+                <a:latin typeface="Calibri"/>
+                <a:ea typeface="Calibri"/>
+                <a:cs typeface="Calibri"/>
+                <a:sym typeface="Calibri"/>
+              </a:rPr>
+              <a:t>AI News</a:t>
+            </a:r>
+            <a:endParaRPr sz="2000" b="1">
+              <a:latin typeface="Calibri"/>
+              <a:ea typeface="Calibri"/>
+              <a:cs typeface="Calibri"/>
+              <a:sym typeface="Calibri"/>
+            </a:endParaRPr>
+          </a:p>
+        </p:txBody>
+      </p:sp>
+      <p:sp>
+        <p:nvSpPr>
+          <p:cNvPr id="281" name="Google Shape;281;p38"/>
+          <p:cNvSpPr txBox="1"/>
+          <p:nvPr/>
+        </p:nvSpPr>
+        <p:spPr>
+          <a:xfrm>
+            <a:off x="36575" y="450100"/>
+            <a:ext cx="4726800" cy="2496600"/>
+          </a:xfrm>
+          <a:prstGeom prst="rect">
+            <a:avLst/>
+          </a:prstGeom>
+          <a:solidFill>
+            <a:srgbClr val="FFF2CC"/>
+          </a:solidFill>
+          <a:ln w="9525" cap="flat" cmpd="sng">
+            <a:solidFill>
+              <a:srgbClr val="FF0000"/>
+            </a:solidFill>
+            <a:prstDash val="solid"/>
+            <a:round/>
+            <a:headEnd type="none" w="sm" len="sm"/>
+            <a:tailEnd type="none" w="sm" len="sm"/>
+          </a:ln>
+        </p:spPr>
+        <p:txBody>
+          <a:bodyPr spcFirstLastPara="1" wrap="square" lIns="9125" tIns="9125" rIns="9125" bIns="9125" anchor="t" anchorCtr="0">
+            <a:spAutoFit/>
+          </a:bodyPr>
+          <a:lstStyle/>
+          <a:p>
+            <a:pPr marL="171450" lvl="0" indent="-139700" algn="l" rtl="0">
+              <a:spcBef>
+                <a:spcPts val="0"/>
+              </a:spcBef>
+              <a:spcAft>
+                <a:spcPts val="0"/>
+              </a:spcAft>
+              <a:buClr>
+                <a:srgbClr val="FF0000"/>
+              </a:buClr>
+              <a:buSzPts val="1300"/>
+              <a:buFont typeface="Calibri"/>
+              <a:buChar char="●"/>
+            </a:pPr>
+            <a:r>
+              <a:rPr lang="en" sz="1300" b="1">
+                <a:solidFill>
+                  <a:srgbClr val="FF0000"/>
+                </a:solidFill>
+                <a:latin typeface="Calibri"/>
+                <a:ea typeface="Calibri"/>
+                <a:cs typeface="Calibri"/>
+                <a:sym typeface="Calibri"/>
+              </a:rPr>
+              <a:t>Claude Code Projects </a:t>
+            </a:r>
+            <a:endParaRPr sz="1300" b="1">
+              <a:solidFill>
+                <a:srgbClr val="FF0000"/>
+              </a:solidFill>
+              <a:latin typeface="Calibri"/>
+              <a:ea typeface="Calibri"/>
+              <a:cs typeface="Calibri"/>
+              <a:sym typeface="Calibri"/>
+            </a:endParaRPr>
+          </a:p>
+          <a:p>
+            <a:pPr marL="171450" lvl="0" indent="-139700" algn="l" rtl="0">
+              <a:spcBef>
+                <a:spcPts val="0"/>
+              </a:spcBef>
+              <a:spcAft>
+                <a:spcPts val="0"/>
+              </a:spcAft>
+              <a:buClr>
+                <a:srgbClr val="FF0000"/>
+              </a:buClr>
+              <a:buSzPts val="1300"/>
+              <a:buFont typeface="Calibri"/>
+              <a:buChar char="●"/>
+            </a:pPr>
+            <a:r>
+              <a:rPr lang="en" sz="1300" b="1">
+                <a:solidFill>
+                  <a:srgbClr val="FF0000"/>
+                </a:solidFill>
+                <a:latin typeface="Calibri"/>
+                <a:ea typeface="Calibri"/>
+                <a:cs typeface="Calibri"/>
+                <a:sym typeface="Calibri"/>
+              </a:rPr>
+              <a:t>keeps agents coding in the cloud while you're offline</a:t>
+            </a:r>
+            <a:endParaRPr sz="1300" b="1">
+              <a:solidFill>
+                <a:srgbClr val="FF0000"/>
+              </a:solidFill>
+              <a:latin typeface="Calibri"/>
+              <a:ea typeface="Calibri"/>
+              <a:cs typeface="Calibri"/>
+              <a:sym typeface="Calibri"/>
+            </a:endParaRPr>
+          </a:p>
+          <a:p>
+            <a:pPr marL="171450" lvl="0" indent="-133350" algn="l" rtl="0">
+              <a:spcBef>
+                <a:spcPts val="0"/>
+              </a:spcBef>
+              <a:spcAft>
+                <a:spcPts val="0"/>
+              </a:spcAft>
+              <a:buSzPts val="1200"/>
+              <a:buFont typeface="Calibri"/>
+              <a:buChar char="●"/>
+            </a:pPr>
+            <a:r>
+              <a:rPr lang="en" sz="1200">
+                <a:latin typeface="Calibri"/>
+                <a:ea typeface="Calibri"/>
+                <a:cs typeface="Calibri"/>
+                <a:sym typeface="Calibri"/>
+              </a:rPr>
+              <a:t>Anthropic relaunched </a:t>
+            </a:r>
+            <a:r>
+              <a:rPr lang="en" sz="1200" b="1">
+                <a:latin typeface="Calibri"/>
+                <a:ea typeface="Calibri"/>
+                <a:cs typeface="Calibri"/>
+                <a:sym typeface="Calibri"/>
+              </a:rPr>
+              <a:t>Projects</a:t>
+            </a:r>
+            <a:r>
+              <a:rPr lang="en" sz="1200">
+                <a:latin typeface="Calibri"/>
+                <a:ea typeface="Calibri"/>
+                <a:cs typeface="Calibri"/>
+                <a:sym typeface="Calibri"/>
+              </a:rPr>
+              <a:t> in Claude Code for cloud orchestration</a:t>
+            </a:r>
+            <a:endParaRPr sz="1200">
+              <a:latin typeface="Calibri"/>
+              <a:ea typeface="Calibri"/>
+              <a:cs typeface="Calibri"/>
+              <a:sym typeface="Calibri"/>
+            </a:endParaRPr>
+          </a:p>
+          <a:p>
+            <a:pPr marL="171450" lvl="0" indent="-133350" algn="l" rtl="0">
+              <a:spcBef>
+                <a:spcPts val="0"/>
+              </a:spcBef>
+              <a:spcAft>
+                <a:spcPts val="0"/>
+              </a:spcAft>
+              <a:buSzPts val="1200"/>
+              <a:buFont typeface="Calibri"/>
+              <a:buChar char="●"/>
+            </a:pPr>
+            <a:r>
+              <a:rPr lang="en" sz="1200">
+                <a:latin typeface="Calibri"/>
+                <a:ea typeface="Calibri"/>
+                <a:cs typeface="Calibri"/>
+                <a:sym typeface="Calibri"/>
+              </a:rPr>
+              <a:t>You describe a goal and a coordinator splits it into parallel threads</a:t>
+            </a:r>
+            <a:endParaRPr sz="1200">
+              <a:latin typeface="Calibri"/>
+              <a:ea typeface="Calibri"/>
+              <a:cs typeface="Calibri"/>
+              <a:sym typeface="Calibri"/>
+            </a:endParaRPr>
+          </a:p>
+          <a:p>
+            <a:pPr marL="171450" lvl="0" indent="-133350" algn="l" rtl="0">
+              <a:spcBef>
+                <a:spcPts val="0"/>
+              </a:spcBef>
+              <a:spcAft>
+                <a:spcPts val="0"/>
+              </a:spcAft>
+              <a:buClr>
+                <a:srgbClr val="3C78D8"/>
+              </a:buClr>
+              <a:buSzPts val="1200"/>
+              <a:buFont typeface="Calibri"/>
+              <a:buChar char="●"/>
+            </a:pPr>
+            <a:r>
+              <a:rPr lang="en" sz="1200" b="1">
+                <a:solidFill>
+                  <a:srgbClr val="3C78D8"/>
+                </a:solidFill>
+                <a:latin typeface="Calibri"/>
+                <a:ea typeface="Calibri"/>
+                <a:cs typeface="Calibri"/>
+                <a:sym typeface="Calibri"/>
+              </a:rPr>
+              <a:t>Each thread works on its own Git branch, </a:t>
+            </a:r>
+            <a:br>
+              <a:rPr lang="en" sz="1200" b="1">
+                <a:solidFill>
+                  <a:srgbClr val="3C78D8"/>
+                </a:solidFill>
+                <a:latin typeface="Calibri"/>
+                <a:ea typeface="Calibri"/>
+                <a:cs typeface="Calibri"/>
+                <a:sym typeface="Calibri"/>
+              </a:rPr>
+            </a:br>
+            <a:r>
+              <a:rPr lang="en" sz="1200" b="1">
+                <a:solidFill>
+                  <a:srgbClr val="3C78D8"/>
+                </a:solidFill>
+                <a:latin typeface="Calibri"/>
+                <a:ea typeface="Calibri"/>
+                <a:cs typeface="Calibri"/>
+                <a:sym typeface="Calibri"/>
+              </a:rPr>
+              <a:t>opens pull requests and runs tests</a:t>
+            </a:r>
+            <a:endParaRPr sz="1200" b="1">
+              <a:solidFill>
+                <a:srgbClr val="3C78D8"/>
+              </a:solidFill>
+              <a:latin typeface="Calibri"/>
+              <a:ea typeface="Calibri"/>
+              <a:cs typeface="Calibri"/>
+              <a:sym typeface="Calibri"/>
+            </a:endParaRPr>
+          </a:p>
+          <a:p>
+            <a:pPr marL="171450" lvl="0" indent="-133350" algn="l" rtl="0">
+              <a:spcBef>
+                <a:spcPts val="0"/>
+              </a:spcBef>
+              <a:spcAft>
+                <a:spcPts val="0"/>
+              </a:spcAft>
+              <a:buSzPts val="1200"/>
+              <a:buFont typeface="Calibri"/>
+              <a:buChar char="●"/>
+            </a:pPr>
+            <a:r>
+              <a:rPr lang="en" sz="1200">
+                <a:latin typeface="Calibri"/>
+                <a:ea typeface="Calibri"/>
+                <a:cs typeface="Calibri"/>
+                <a:sym typeface="Calibri"/>
+              </a:rPr>
+              <a:t>Merge conflicts are handled like ordinary pull requests</a:t>
+            </a:r>
+            <a:endParaRPr sz="1200">
+              <a:latin typeface="Calibri"/>
+              <a:ea typeface="Calibri"/>
+              <a:cs typeface="Calibri"/>
+              <a:sym typeface="Calibri"/>
+            </a:endParaRPr>
+          </a:p>
+          <a:p>
+            <a:pPr marL="171450" lvl="0" indent="-133350" algn="l" rtl="0">
+              <a:spcBef>
+                <a:spcPts val="0"/>
+              </a:spcBef>
+              <a:spcAft>
+                <a:spcPts val="0"/>
+              </a:spcAft>
+              <a:buClr>
+                <a:srgbClr val="3C78D8"/>
+              </a:buClr>
+              <a:buSzPts val="1200"/>
+              <a:buFont typeface="Calibri"/>
+              <a:buChar char="●"/>
+            </a:pPr>
+            <a:r>
+              <a:rPr lang="en" sz="1200" b="1">
+                <a:solidFill>
+                  <a:srgbClr val="3C78D8"/>
+                </a:solidFill>
+                <a:latin typeface="Calibri"/>
+                <a:ea typeface="Calibri"/>
+                <a:cs typeface="Calibri"/>
+                <a:sym typeface="Calibri"/>
+              </a:rPr>
+              <a:t>Threads keep running after you close your laptop</a:t>
+            </a:r>
+            <a:r>
+              <a:rPr lang="en" sz="1200">
+                <a:solidFill>
+                  <a:srgbClr val="3C78D8"/>
+                </a:solidFill>
+                <a:latin typeface="Calibri"/>
+                <a:ea typeface="Calibri"/>
+                <a:cs typeface="Calibri"/>
+                <a:sym typeface="Calibri"/>
+              </a:rPr>
+              <a:t>; </a:t>
+            </a:r>
+            <a:endParaRPr sz="1200">
+              <a:solidFill>
+                <a:srgbClr val="3C78D8"/>
+              </a:solidFill>
+              <a:latin typeface="Calibri"/>
+              <a:ea typeface="Calibri"/>
+              <a:cs typeface="Calibri"/>
+              <a:sym typeface="Calibri"/>
+            </a:endParaRPr>
+          </a:p>
+          <a:p>
+            <a:pPr marL="171450" lvl="0" indent="-133350" algn="l" rtl="0">
+              <a:spcBef>
+                <a:spcPts val="0"/>
+              </a:spcBef>
+              <a:spcAft>
+                <a:spcPts val="0"/>
+              </a:spcAft>
+              <a:buClr>
+                <a:srgbClr val="3C78D8"/>
+              </a:buClr>
+              <a:buSzPts val="1200"/>
+              <a:buFont typeface="Calibri"/>
+              <a:buChar char="●"/>
+            </a:pPr>
+            <a:r>
+              <a:rPr lang="en" sz="1200" b="1">
+                <a:solidFill>
+                  <a:srgbClr val="3C78D8"/>
+                </a:solidFill>
+                <a:latin typeface="Calibri"/>
+                <a:ea typeface="Calibri"/>
+                <a:cs typeface="Calibri"/>
+                <a:sym typeface="Calibri"/>
+              </a:rPr>
+              <a:t>You can check in from your phone</a:t>
+            </a:r>
+            <a:endParaRPr sz="1200" b="1">
+              <a:solidFill>
+                <a:srgbClr val="3C78D8"/>
+              </a:solidFill>
+              <a:latin typeface="Calibri"/>
+              <a:ea typeface="Calibri"/>
+              <a:cs typeface="Calibri"/>
+              <a:sym typeface="Calibri"/>
+            </a:endParaRPr>
+          </a:p>
+          <a:p>
+            <a:pPr marL="171450" lvl="0" indent="-133350" algn="l" rtl="0">
+              <a:spcBef>
+                <a:spcPts val="0"/>
+              </a:spcBef>
+              <a:spcAft>
+                <a:spcPts val="0"/>
+              </a:spcAft>
+              <a:buSzPts val="1200"/>
+              <a:buFont typeface="Calibri"/>
+              <a:buChar char="●"/>
+            </a:pPr>
+            <a:r>
+              <a:rPr lang="en" sz="1200">
+                <a:latin typeface="Calibri"/>
+                <a:ea typeface="Calibri"/>
+                <a:cs typeface="Calibri"/>
+                <a:sym typeface="Calibri"/>
+              </a:rPr>
+              <a:t>The coordinator uses a stronger model, the workers run cheaper ones</a:t>
+            </a:r>
+            <a:endParaRPr sz="1200">
+              <a:latin typeface="Calibri"/>
+              <a:ea typeface="Calibri"/>
+              <a:cs typeface="Calibri"/>
+              <a:sym typeface="Calibri"/>
+            </a:endParaRPr>
+          </a:p>
+          <a:p>
+            <a:pPr marL="171450" lvl="0" indent="-133350" algn="l" rtl="0">
+              <a:spcBef>
+                <a:spcPts val="0"/>
+              </a:spcBef>
+              <a:spcAft>
+                <a:spcPts val="0"/>
+              </a:spcAft>
+              <a:buSzPts val="1200"/>
+              <a:buFont typeface="Calibri"/>
+              <a:buChar char="●"/>
+            </a:pPr>
+            <a:r>
+              <a:rPr lang="en" sz="1200">
+                <a:latin typeface="Calibri"/>
+                <a:ea typeface="Calibri"/>
+                <a:cs typeface="Calibri"/>
+                <a:sym typeface="Calibri"/>
+              </a:rPr>
+              <a:t>Beta for select Pro and Max users first, then Team and Enterprise</a:t>
+            </a:r>
+            <a:endParaRPr sz="1200">
+              <a:latin typeface="Calibri"/>
+              <a:ea typeface="Calibri"/>
+              <a:cs typeface="Calibri"/>
+              <a:sym typeface="Calibri"/>
+            </a:endParaRPr>
+          </a:p>
+          <a:p>
+            <a:pPr marL="171450" lvl="0" indent="-114300" algn="l" rtl="0">
+              <a:spcBef>
+                <a:spcPts val="0"/>
+              </a:spcBef>
+              <a:spcAft>
+                <a:spcPts val="0"/>
+              </a:spcAft>
+              <a:buSzPts val="900"/>
+              <a:buFont typeface="Calibri"/>
+              <a:buChar char="●"/>
+            </a:pPr>
+            <a:r>
+              <a:rPr lang="en" sz="900" u="sng">
+                <a:solidFill>
+                  <a:schemeClr val="hlink"/>
+                </a:solidFill>
+                <a:latin typeface="Calibri"/>
+                <a:ea typeface="Calibri"/>
+                <a:cs typeface="Calibri"/>
+                <a:sym typeface="Calibri"/>
+                <a:hlinkClick r:id="rId3"/>
+              </a:rPr>
+              <a:t>https://www.theverge.com/ai-artificial-intelligence/997134/anthropic-claude-code-projects</a:t>
+            </a:r>
+            <a:r>
+              <a:rPr lang="en" sz="900">
+                <a:solidFill>
+                  <a:srgbClr val="0563C1"/>
+                </a:solidFill>
+                <a:latin typeface="Calibri"/>
+                <a:ea typeface="Calibri"/>
+                <a:cs typeface="Calibri"/>
+                <a:sym typeface="Calibri"/>
+              </a:rPr>
+              <a:t> </a:t>
+            </a:r>
+            <a:endParaRPr sz="900">
+              <a:solidFill>
+                <a:srgbClr val="0563C1"/>
+              </a:solidFill>
+              <a:latin typeface="Calibri"/>
+              <a:ea typeface="Calibri"/>
+              <a:cs typeface="Calibri"/>
+              <a:sym typeface="Calibri"/>
+            </a:endParaRPr>
+          </a:p>
+          <a:p>
+            <a:pPr marL="171450" lvl="0" indent="-114300" algn="l" rtl="0">
+              <a:spcBef>
+                <a:spcPts val="0"/>
+              </a:spcBef>
+              <a:spcAft>
+                <a:spcPts val="0"/>
+              </a:spcAft>
+              <a:buClr>
+                <a:srgbClr val="0563C1"/>
+              </a:buClr>
+              <a:buSzPts val="900"/>
+              <a:buFont typeface="Calibri"/>
+              <a:buChar char="●"/>
+            </a:pPr>
+            <a:r>
+              <a:rPr lang="en" sz="900" u="sng">
+                <a:solidFill>
+                  <a:schemeClr val="hlink"/>
+                </a:solidFill>
+                <a:latin typeface="Calibri"/>
+                <a:ea typeface="Calibri"/>
+                <a:cs typeface="Calibri"/>
+                <a:sym typeface="Calibri"/>
+                <a:hlinkClick r:id="rId4"/>
+              </a:rPr>
+              <a:t>https://venturebeat.com/orchestration/anthropic-launches-claude-code-projects-an-always-on-conversation-that-remembers-and-delegates-your-long-running-dev-work</a:t>
+            </a:r>
+            <a:r>
+              <a:rPr lang="en" sz="900">
+                <a:solidFill>
+                  <a:srgbClr val="0563C1"/>
+                </a:solidFill>
+                <a:latin typeface="Calibri"/>
+                <a:ea typeface="Calibri"/>
+                <a:cs typeface="Calibri"/>
+                <a:sym typeface="Calibri"/>
+              </a:rPr>
+              <a:t> </a:t>
+            </a:r>
+            <a:endParaRPr sz="900">
+              <a:solidFill>
+                <a:srgbClr val="0563C1"/>
+              </a:solidFill>
+              <a:latin typeface="Calibri"/>
+              <a:ea typeface="Calibri"/>
+              <a:cs typeface="Calibri"/>
+              <a:sym typeface="Calibri"/>
+            </a:endParaRPr>
+          </a:p>
+        </p:txBody>
+      </p:sp>
+      <p:sp>
+        <p:nvSpPr>
+          <p:cNvPr id="282" name="Google Shape;282;p38"/>
+          <p:cNvSpPr txBox="1"/>
+          <p:nvPr/>
+        </p:nvSpPr>
+        <p:spPr>
+          <a:xfrm>
+            <a:off x="36575" y="3153825"/>
+            <a:ext cx="5166300" cy="1834800"/>
+          </a:xfrm>
+          <a:prstGeom prst="rect">
+            <a:avLst/>
+          </a:prstGeom>
+          <a:solidFill>
+            <a:srgbClr val="FFF2CC"/>
+          </a:solidFill>
+          <a:ln w="9525" cap="flat" cmpd="sng">
+            <a:solidFill>
+              <a:srgbClr val="FF0000"/>
+            </a:solidFill>
+            <a:prstDash val="solid"/>
+            <a:round/>
+            <a:headEnd type="none" w="sm" len="sm"/>
+            <a:tailEnd type="none" w="sm" len="sm"/>
+          </a:ln>
+        </p:spPr>
+        <p:txBody>
+          <a:bodyPr spcFirstLastPara="1" wrap="square" lIns="9125" tIns="9125" rIns="9125" bIns="9125" anchor="t" anchorCtr="0">
+            <a:spAutoFit/>
+          </a:bodyPr>
+          <a:lstStyle/>
+          <a:p>
+            <a:pPr marL="171450" lvl="0" indent="-139700" algn="l" rtl="0">
+              <a:spcBef>
+                <a:spcPts val="0"/>
+              </a:spcBef>
+              <a:spcAft>
+                <a:spcPts val="0"/>
+              </a:spcAft>
+              <a:buClr>
+                <a:srgbClr val="FF0000"/>
+              </a:buClr>
+              <a:buSzPts val="1300"/>
+              <a:buFont typeface="Calibri"/>
+              <a:buChar char="●"/>
+            </a:pPr>
+            <a:r>
+              <a:rPr lang="en" sz="1300" b="1">
+                <a:solidFill>
+                  <a:srgbClr val="FF0000"/>
+                </a:solidFill>
+                <a:latin typeface="Calibri"/>
+                <a:ea typeface="Calibri"/>
+                <a:cs typeface="Calibri"/>
+                <a:sym typeface="Calibri"/>
+              </a:rPr>
+              <a:t>ChatGPT ads now open a chat with Agent</a:t>
+            </a:r>
+            <a:endParaRPr sz="1300" b="1">
+              <a:solidFill>
+                <a:srgbClr val="FF0000"/>
+              </a:solidFill>
+              <a:latin typeface="Calibri"/>
+              <a:ea typeface="Calibri"/>
+              <a:cs typeface="Calibri"/>
+              <a:sym typeface="Calibri"/>
+            </a:endParaRPr>
+          </a:p>
+          <a:p>
+            <a:pPr marL="171450" lvl="0" indent="-133350" algn="l" rtl="0">
+              <a:spcBef>
+                <a:spcPts val="0"/>
+              </a:spcBef>
+              <a:spcAft>
+                <a:spcPts val="0"/>
+              </a:spcAft>
+              <a:buSzPts val="1200"/>
+              <a:buFont typeface="Calibri"/>
+              <a:buChar char="●"/>
+            </a:pPr>
+            <a:r>
+              <a:rPr lang="en" sz="1200">
+                <a:latin typeface="Calibri"/>
+                <a:ea typeface="Calibri"/>
+                <a:cs typeface="Calibri"/>
+                <a:sym typeface="Calibri"/>
+              </a:rPr>
+              <a:t>OpenAI launched </a:t>
+            </a:r>
+            <a:r>
+              <a:rPr lang="en" sz="1200" b="1">
+                <a:latin typeface="Calibri"/>
+                <a:ea typeface="Calibri"/>
+                <a:cs typeface="Calibri"/>
+                <a:sym typeface="Calibri"/>
+              </a:rPr>
+              <a:t>Sponsored Agents</a:t>
+            </a:r>
+            <a:r>
+              <a:rPr lang="en" sz="1200">
+                <a:latin typeface="Calibri"/>
+                <a:ea typeface="Calibri"/>
+                <a:cs typeface="Calibri"/>
+                <a:sym typeface="Calibri"/>
+              </a:rPr>
+              <a:t>: </a:t>
+            </a:r>
+            <a:br>
+              <a:rPr lang="en" sz="1200">
+                <a:latin typeface="Calibri"/>
+                <a:ea typeface="Calibri"/>
+                <a:cs typeface="Calibri"/>
+                <a:sym typeface="Calibri"/>
+              </a:rPr>
+            </a:br>
+            <a:r>
+              <a:rPr lang="en" sz="1200">
+                <a:latin typeface="Calibri"/>
+                <a:ea typeface="Calibri"/>
+                <a:cs typeface="Calibri"/>
+                <a:sym typeface="Calibri"/>
+              </a:rPr>
+              <a:t>click an ad and talk to the advertiser's agent</a:t>
+            </a:r>
+            <a:endParaRPr sz="1200">
+              <a:latin typeface="Calibri"/>
+              <a:ea typeface="Calibri"/>
+              <a:cs typeface="Calibri"/>
+              <a:sym typeface="Calibri"/>
+            </a:endParaRPr>
+          </a:p>
+          <a:p>
+            <a:pPr marL="171450" lvl="0" indent="-133350" algn="l" rtl="0">
+              <a:spcBef>
+                <a:spcPts val="0"/>
+              </a:spcBef>
+              <a:spcAft>
+                <a:spcPts val="0"/>
+              </a:spcAft>
+              <a:buSzPts val="1200"/>
+              <a:buFont typeface="Calibri"/>
+              <a:buChar char="●"/>
+            </a:pPr>
+            <a:r>
+              <a:rPr lang="en" sz="1200">
+                <a:latin typeface="Calibri"/>
+                <a:ea typeface="Calibri"/>
+                <a:cs typeface="Calibri"/>
+                <a:sym typeface="Calibri"/>
+              </a:rPr>
+              <a:t>The sponsored chat is labeled and kept apart from ChatGPT's own answer</a:t>
+            </a:r>
+            <a:endParaRPr sz="1200">
+              <a:latin typeface="Calibri"/>
+              <a:ea typeface="Calibri"/>
+              <a:cs typeface="Calibri"/>
+              <a:sym typeface="Calibri"/>
+            </a:endParaRPr>
+          </a:p>
+          <a:p>
+            <a:pPr marL="171450" lvl="0" indent="-133350" algn="l" rtl="0">
+              <a:spcBef>
+                <a:spcPts val="0"/>
+              </a:spcBef>
+              <a:spcAft>
+                <a:spcPts val="0"/>
+              </a:spcAft>
+              <a:buSzPts val="1200"/>
+              <a:buFont typeface="Calibri"/>
+              <a:buChar char="●"/>
+            </a:pPr>
+            <a:r>
+              <a:rPr lang="en" sz="1200">
+                <a:latin typeface="Calibri"/>
+                <a:ea typeface="Calibri"/>
+                <a:cs typeface="Calibri"/>
+                <a:sym typeface="Calibri"/>
+              </a:rPr>
+              <a:t>ChatGPT Ads reached a </a:t>
+            </a:r>
+            <a:r>
+              <a:rPr lang="en" sz="1200">
+                <a:highlight>
+                  <a:srgbClr val="FFF2CC"/>
+                </a:highlight>
+                <a:latin typeface="Calibri"/>
+                <a:ea typeface="Calibri"/>
+                <a:cs typeface="Calibri"/>
+                <a:sym typeface="Calibri"/>
+              </a:rPr>
+              <a:t>$1 Bln</a:t>
+            </a:r>
+            <a:r>
+              <a:rPr lang="en" sz="1200">
+                <a:latin typeface="Calibri"/>
+                <a:ea typeface="Calibri"/>
+                <a:cs typeface="Calibri"/>
+                <a:sym typeface="Calibri"/>
+              </a:rPr>
+              <a:t> ARR in August</a:t>
+            </a:r>
+            <a:endParaRPr sz="1200">
+              <a:latin typeface="Calibri"/>
+              <a:ea typeface="Calibri"/>
+              <a:cs typeface="Calibri"/>
+              <a:sym typeface="Calibri"/>
+            </a:endParaRPr>
+          </a:p>
+          <a:p>
+            <a:pPr marL="171450" lvl="0" indent="-133350" algn="l" rtl="0">
+              <a:spcBef>
+                <a:spcPts val="0"/>
+              </a:spcBef>
+              <a:spcAft>
+                <a:spcPts val="0"/>
+              </a:spcAft>
+              <a:buSzPts val="1200"/>
+              <a:buFont typeface="Calibri"/>
+              <a:buChar char="●"/>
+            </a:pPr>
+            <a:r>
+              <a:rPr lang="en" sz="1200">
+                <a:latin typeface="Calibri"/>
+                <a:ea typeface="Calibri"/>
+                <a:cs typeface="Calibri"/>
+                <a:sym typeface="Calibri"/>
+              </a:rPr>
+              <a:t>Ads Manager now drafts campaigns and creative from plain language prompts</a:t>
+            </a:r>
+            <a:endParaRPr sz="1200">
+              <a:latin typeface="Calibri"/>
+              <a:ea typeface="Calibri"/>
+              <a:cs typeface="Calibri"/>
+              <a:sym typeface="Calibri"/>
+            </a:endParaRPr>
+          </a:p>
+          <a:p>
+            <a:pPr marL="171450" lvl="0" indent="-133350" algn="l" rtl="0">
+              <a:spcBef>
+                <a:spcPts val="0"/>
+              </a:spcBef>
+              <a:spcAft>
+                <a:spcPts val="0"/>
+              </a:spcAft>
+              <a:buSzPts val="1200"/>
+              <a:buFont typeface="Calibri"/>
+              <a:buChar char="●"/>
+            </a:pPr>
+            <a:r>
+              <a:rPr lang="en" sz="1200">
+                <a:latin typeface="Calibri"/>
+                <a:ea typeface="Calibri"/>
+                <a:cs typeface="Calibri"/>
+                <a:sym typeface="Calibri"/>
+              </a:rPr>
+              <a:t>New HubSpot and Shopify integrations; </a:t>
+            </a:r>
+            <a:endParaRPr sz="1200">
+              <a:latin typeface="Calibri"/>
+              <a:ea typeface="Calibri"/>
+              <a:cs typeface="Calibri"/>
+              <a:sym typeface="Calibri"/>
+            </a:endParaRPr>
+          </a:p>
+          <a:p>
+            <a:pPr marL="171450" lvl="0" indent="-133350" algn="l" rtl="0">
+              <a:spcBef>
+                <a:spcPts val="0"/>
+              </a:spcBef>
+              <a:spcAft>
+                <a:spcPts val="0"/>
+              </a:spcAft>
+              <a:buSzPts val="1200"/>
+              <a:buFont typeface="Calibri"/>
+              <a:buChar char="●"/>
+            </a:pPr>
+            <a:r>
+              <a:rPr lang="en" sz="1200">
+                <a:latin typeface="Calibri"/>
+                <a:ea typeface="Calibri"/>
+                <a:cs typeface="Calibri"/>
+                <a:sym typeface="Calibri"/>
+              </a:rPr>
+              <a:t>Amazon opened its platform to ChatGPT campaigns</a:t>
+            </a:r>
+            <a:endParaRPr sz="1200">
+              <a:latin typeface="Calibri"/>
+              <a:ea typeface="Calibri"/>
+              <a:cs typeface="Calibri"/>
+              <a:sym typeface="Calibri"/>
+            </a:endParaRPr>
+          </a:p>
+          <a:p>
+            <a:pPr marL="171450" lvl="0" indent="-133350" algn="l" rtl="0">
+              <a:spcBef>
+                <a:spcPts val="0"/>
+              </a:spcBef>
+              <a:spcAft>
+                <a:spcPts val="0"/>
+              </a:spcAft>
+              <a:buSzPts val="1200"/>
+              <a:buFont typeface="Calibri"/>
+              <a:buChar char="●"/>
+            </a:pPr>
+            <a:r>
+              <a:rPr lang="en" sz="1200">
+                <a:latin typeface="Calibri"/>
+                <a:ea typeface="Calibri"/>
+                <a:cs typeface="Calibri"/>
+                <a:sym typeface="Calibri"/>
+              </a:rPr>
+              <a:t>A US pilot with select advertisers, with no pricing or results published</a:t>
+            </a:r>
+            <a:endParaRPr sz="1200">
+              <a:latin typeface="Calibri"/>
+              <a:ea typeface="Calibri"/>
+              <a:cs typeface="Calibri"/>
+              <a:sym typeface="Calibri"/>
+            </a:endParaRPr>
+          </a:p>
+          <a:p>
+            <a:pPr marL="171450" lvl="0" indent="-114300" algn="l" rtl="0">
+              <a:spcBef>
+                <a:spcPts val="0"/>
+              </a:spcBef>
+              <a:spcAft>
+                <a:spcPts val="0"/>
+              </a:spcAft>
+              <a:buSzPts val="900"/>
+              <a:buFont typeface="Calibri"/>
+              <a:buChar char="●"/>
+            </a:pPr>
+            <a:r>
+              <a:rPr lang="en" sz="900" u="sng">
+                <a:solidFill>
+                  <a:schemeClr val="hlink"/>
+                </a:solidFill>
+                <a:latin typeface="Calibri"/>
+                <a:ea typeface="Calibri"/>
+                <a:cs typeface="Calibri"/>
+                <a:sym typeface="Calibri"/>
+                <a:hlinkClick r:id="rId5"/>
+              </a:rPr>
+              <a:t>https://openai.com/index/reimagining-advertising-with-ai/</a:t>
+            </a:r>
+            <a:r>
+              <a:rPr lang="en" sz="900">
+                <a:latin typeface="Calibri"/>
+                <a:ea typeface="Calibri"/>
+                <a:cs typeface="Calibri"/>
+                <a:sym typeface="Calibri"/>
+              </a:rPr>
+              <a:t> </a:t>
+            </a:r>
+            <a:endParaRPr sz="900">
+              <a:latin typeface="Calibri"/>
+              <a:ea typeface="Calibri"/>
+              <a:cs typeface="Calibri"/>
+              <a:sym typeface="Calibri"/>
+            </a:endParaRPr>
+          </a:p>
+        </p:txBody>
+      </p:sp>
+      <p:pic>
+        <p:nvPicPr>
+          <p:cNvPr id="283" name="Google Shape;283;p38"/>
+          <p:cNvPicPr preferRelativeResize="0"/>
+          <p:nvPr/>
+        </p:nvPicPr>
+        <p:blipFill>
+          <a:blip r:embed="rId6" cstate="email">
+            <a:alphaModFix/>
+            <a:extLst>
+              <a:ext uri="{28A0092B-C50C-407E-A947-70E740481C1C}">
+                <a14:useLocalDpi xmlns:a14="http://schemas.microsoft.com/office/drawing/2010/main"/>
+              </a:ext>
+            </a:extLst>
+          </a:blip>
+          <a:stretch>
+            <a:fillRect/>
+          </a:stretch>
+        </p:blipFill>
+        <p:spPr>
+          <a:xfrm>
+            <a:off x="5367150" y="3629925"/>
+            <a:ext cx="3636325" cy="882603"/>
+          </a:xfrm>
+          <a:prstGeom prst="rect">
+            <a:avLst/>
+          </a:prstGeom>
+          <a:noFill/>
+          <a:ln w="9525" cap="flat" cmpd="sng">
+            <a:solidFill>
+              <a:srgbClr val="FF0000"/>
+            </a:solidFill>
+            <a:prstDash val="solid"/>
+            <a:round/>
+            <a:headEnd type="none" w="sm" len="sm"/>
+            <a:tailEnd type="none" w="sm" len="sm"/>
+          </a:ln>
+        </p:spPr>
+      </p:pic>
+      <p:pic>
+        <p:nvPicPr>
+          <p:cNvPr id="284" name="Google Shape;284;p38"/>
+          <p:cNvPicPr preferRelativeResize="0"/>
+          <p:nvPr/>
+        </p:nvPicPr>
+        <p:blipFill>
+          <a:blip r:embed="rId7" cstate="email">
+            <a:alphaModFix/>
+            <a:extLst>
+              <a:ext uri="{28A0092B-C50C-407E-A947-70E740481C1C}">
+                <a14:useLocalDpi xmlns:a14="http://schemas.microsoft.com/office/drawing/2010/main"/>
+              </a:ext>
+            </a:extLst>
+          </a:blip>
+          <a:stretch>
+            <a:fillRect/>
+          </a:stretch>
+        </p:blipFill>
+        <p:spPr>
+          <a:xfrm>
+            <a:off x="4927650" y="628500"/>
+            <a:ext cx="4075824" cy="2139808"/>
+          </a:xfrm>
+          <a:prstGeom prst="rect">
+            <a:avLst/>
+          </a:prstGeom>
+          <a:noFill/>
+          <a:ln w="9525" cap="flat" cmpd="sng">
+            <a:solidFill>
+              <a:srgbClr val="FF0000"/>
+            </a:solidFill>
+            <a:prstDash val="solid"/>
+            <a:round/>
+            <a:headEnd type="none" w="sm" len="sm"/>
+            <a:tailEnd type="none" w="sm" len="sm"/>
+          </a:ln>
+        </p:spPr>
+      </p:pic>
+    </p:spTree>
+  </p:cSld>
+  <p:clrMapOvr>
+    <a:masterClrMapping/>
+  </p:clrMapOvr>
+</p:sld>
+</file>
+
+<file path=ppt/slides/slide27.xml><?xml version="1.0" encoding="utf-8"?>
+<p:sld xmlns:a="http://schemas.openxmlformats.org/drawingml/2006/main" xmlns:r="http://schemas.openxmlformats.org/officeDocument/2006/relationships" xmlns:p="http://schemas.openxmlformats.org/presentationml/2006/main">
+  <p:cSld>
+    <p:spTree>
+      <p:nvGrpSpPr>
+        <p:cNvPr id="1" name="Shape 288"/>
+        <p:cNvGrpSpPr/>
+        <p:nvPr/>
+      </p:nvGrpSpPr>
+      <p:grpSpPr>
+        <a:xfrm>
+          <a:off x="0" y="0"/>
+          <a:ext cx="0" cy="0"/>
+          <a:chOff x="0" y="0"/>
+          <a:chExt cx="0" cy="0"/>
+        </a:xfrm>
+      </p:grpSpPr>
+      <p:sp>
+        <p:nvSpPr>
+          <p:cNvPr id="289" name="Google Shape;289;p39"/>
+          <p:cNvSpPr txBox="1"/>
+          <p:nvPr/>
+        </p:nvSpPr>
+        <p:spPr>
+          <a:xfrm>
+            <a:off x="36576" y="-27432"/>
+            <a:ext cx="1177200" cy="384000"/>
+          </a:xfrm>
+          <a:prstGeom prst="rect">
+            <a:avLst/>
+          </a:prstGeom>
+          <a:noFill/>
+          <a:ln>
+            <a:noFill/>
+          </a:ln>
+        </p:spPr>
+        <p:txBody>
+          <a:bodyPr spcFirstLastPara="1" wrap="square" lIns="91425" tIns="91425" rIns="91425" bIns="91425" anchor="t" anchorCtr="0">
+            <a:noAutofit/>
+          </a:bodyPr>
+          <a:lstStyle/>
+          <a:p>
+            <a:pPr marL="0" lvl="0" indent="0" algn="l" rtl="0">
+              <a:spcBef>
+                <a:spcPts val="0"/>
+              </a:spcBef>
+              <a:spcAft>
+                <a:spcPts val="0"/>
+              </a:spcAft>
+              <a:buNone/>
+            </a:pPr>
+            <a:r>
+              <a:rPr lang="en" sz="2000" b="1">
+                <a:latin typeface="Calibri"/>
+                <a:ea typeface="Calibri"/>
+                <a:cs typeface="Calibri"/>
+                <a:sym typeface="Calibri"/>
+              </a:rPr>
+              <a:t>AI News</a:t>
+            </a:r>
+            <a:endParaRPr sz="2000" b="1">
+              <a:latin typeface="Calibri"/>
+              <a:ea typeface="Calibri"/>
+              <a:cs typeface="Calibri"/>
+              <a:sym typeface="Calibri"/>
+            </a:endParaRPr>
+          </a:p>
+        </p:txBody>
+      </p:sp>
+      <p:sp>
+        <p:nvSpPr>
+          <p:cNvPr id="290" name="Google Shape;290;p39"/>
+          <p:cNvSpPr txBox="1"/>
+          <p:nvPr/>
+        </p:nvSpPr>
+        <p:spPr>
+          <a:xfrm>
+            <a:off x="107850" y="554425"/>
+            <a:ext cx="4382400" cy="1496100"/>
+          </a:xfrm>
+          <a:prstGeom prst="rect">
+            <a:avLst/>
+          </a:prstGeom>
+          <a:solidFill>
+            <a:srgbClr val="FFF2CC"/>
+          </a:solidFill>
+          <a:ln w="9525" cap="flat" cmpd="sng">
+            <a:solidFill>
+              <a:srgbClr val="FF0000"/>
+            </a:solidFill>
+            <a:prstDash val="solid"/>
+            <a:round/>
+            <a:headEnd type="none" w="sm" len="sm"/>
+            <a:tailEnd type="none" w="sm" len="sm"/>
+          </a:ln>
+        </p:spPr>
+        <p:txBody>
+          <a:bodyPr spcFirstLastPara="1" wrap="square" lIns="9125" tIns="9125" rIns="9125" bIns="9125" anchor="t" anchorCtr="0">
+            <a:spAutoFit/>
+          </a:bodyPr>
+          <a:lstStyle/>
+          <a:p>
+            <a:pPr marL="171450" lvl="0" indent="-133350" algn="l" rtl="0">
+              <a:spcBef>
+                <a:spcPts val="0"/>
+              </a:spcBef>
+              <a:spcAft>
+                <a:spcPts val="0"/>
+              </a:spcAft>
+              <a:buClr>
+                <a:srgbClr val="FF0000"/>
+              </a:buClr>
+              <a:buSzPts val="1200"/>
+              <a:buFont typeface="Calibri"/>
+              <a:buChar char="●"/>
+            </a:pPr>
+            <a:r>
+              <a:rPr lang="en" sz="1200" b="1">
+                <a:solidFill>
+                  <a:srgbClr val="FF0000"/>
+                </a:solidFill>
+                <a:latin typeface="Calibri"/>
+                <a:ea typeface="Calibri"/>
+                <a:cs typeface="Calibri"/>
+                <a:sym typeface="Calibri"/>
+              </a:rPr>
+              <a:t>Snap launches Specs AR glasses at $2,195</a:t>
+            </a:r>
+            <a:endParaRPr sz="1200" b="1">
+              <a:solidFill>
+                <a:srgbClr val="FF0000"/>
+              </a:solidFill>
+              <a:latin typeface="Calibri"/>
+              <a:ea typeface="Calibri"/>
+              <a:cs typeface="Calibri"/>
+              <a:sym typeface="Calibri"/>
+            </a:endParaRPr>
+          </a:p>
+          <a:p>
+            <a:pPr marL="171450" lvl="0" indent="-133350" algn="l" rtl="0">
+              <a:spcBef>
+                <a:spcPts val="0"/>
+              </a:spcBef>
+              <a:spcAft>
+                <a:spcPts val="0"/>
+              </a:spcAft>
+              <a:buSzPts val="1200"/>
+              <a:buFont typeface="Calibri"/>
+              <a:buChar char="●"/>
+            </a:pPr>
+            <a:r>
+              <a:rPr lang="en" sz="1200">
+                <a:latin typeface="Calibri"/>
+                <a:ea typeface="Calibri"/>
+                <a:cs typeface="Calibri"/>
+                <a:sym typeface="Calibri"/>
+              </a:rPr>
+              <a:t>Snap Inc. is the public company behind Snapchat.</a:t>
+            </a:r>
+            <a:endParaRPr sz="1200">
+              <a:latin typeface="Calibri"/>
+              <a:ea typeface="Calibri"/>
+              <a:cs typeface="Calibri"/>
+              <a:sym typeface="Calibri"/>
+            </a:endParaRPr>
+          </a:p>
+          <a:p>
+            <a:pPr marL="171450" lvl="0" indent="-133350" algn="l" rtl="0">
+              <a:spcBef>
+                <a:spcPts val="0"/>
+              </a:spcBef>
+              <a:spcAft>
+                <a:spcPts val="0"/>
+              </a:spcAft>
+              <a:buSzPts val="1200"/>
+              <a:buFont typeface="Calibri"/>
+              <a:buChar char="●"/>
+            </a:pPr>
+            <a:r>
+              <a:rPr lang="en" sz="1200">
+                <a:latin typeface="Calibri"/>
+                <a:ea typeface="Calibri"/>
+                <a:cs typeface="Calibri"/>
+                <a:sym typeface="Calibri"/>
+              </a:rPr>
+              <a:t>The glasses overlay directions, translate conversations live, </a:t>
+            </a:r>
+            <a:br>
+              <a:rPr lang="en" sz="1200">
+                <a:latin typeface="Calibri"/>
+                <a:ea typeface="Calibri"/>
+                <a:cs typeface="Calibri"/>
+                <a:sym typeface="Calibri"/>
+              </a:rPr>
+            </a:br>
+            <a:r>
+              <a:rPr lang="en" sz="1200">
+                <a:latin typeface="Calibri"/>
+                <a:ea typeface="Calibri"/>
+                <a:cs typeface="Calibri"/>
+                <a:sym typeface="Calibri"/>
+              </a:rPr>
+              <a:t>stream movies and take calls</a:t>
+            </a:r>
+            <a:endParaRPr sz="1200">
+              <a:latin typeface="Calibri"/>
+              <a:ea typeface="Calibri"/>
+              <a:cs typeface="Calibri"/>
+              <a:sym typeface="Calibri"/>
+            </a:endParaRPr>
+          </a:p>
+          <a:p>
+            <a:pPr marL="171450" lvl="0" indent="-133350" algn="l" rtl="0">
+              <a:spcBef>
+                <a:spcPts val="0"/>
+              </a:spcBef>
+              <a:spcAft>
+                <a:spcPts val="0"/>
+              </a:spcAft>
+              <a:buSzPts val="1200"/>
+              <a:buFont typeface="Calibri"/>
+              <a:buChar char="●"/>
+            </a:pPr>
+            <a:r>
+              <a:rPr lang="en" sz="1200">
+                <a:latin typeface="Calibri"/>
+                <a:ea typeface="Calibri"/>
+                <a:cs typeface="Calibri"/>
+                <a:sym typeface="Calibri"/>
+              </a:rPr>
+              <a:t>Hands-free video calls put the other person in your field of view</a:t>
+            </a:r>
+            <a:endParaRPr sz="1200">
+              <a:latin typeface="Calibri"/>
+              <a:ea typeface="Calibri"/>
+              <a:cs typeface="Calibri"/>
+              <a:sym typeface="Calibri"/>
+            </a:endParaRPr>
+          </a:p>
+          <a:p>
+            <a:pPr marL="171450" lvl="0" indent="-133350" algn="l" rtl="0">
+              <a:spcBef>
+                <a:spcPts val="0"/>
+              </a:spcBef>
+              <a:spcAft>
+                <a:spcPts val="0"/>
+              </a:spcAft>
+              <a:buSzPts val="1200"/>
+              <a:buFont typeface="Calibri"/>
+              <a:buChar char="●"/>
+            </a:pPr>
+            <a:r>
+              <a:rPr lang="en" sz="1200">
+                <a:latin typeface="Calibri"/>
+                <a:ea typeface="Calibri"/>
+                <a:cs typeface="Calibri"/>
+                <a:sym typeface="Calibri"/>
+              </a:rPr>
+              <a:t>No tethered battery pack, unlike Vision Pro</a:t>
+            </a:r>
+            <a:endParaRPr sz="1200">
+              <a:latin typeface="Calibri"/>
+              <a:ea typeface="Calibri"/>
+              <a:cs typeface="Calibri"/>
+              <a:sym typeface="Calibri"/>
+            </a:endParaRPr>
+          </a:p>
+          <a:p>
+            <a:pPr marL="171450" lvl="0" indent="-133350" algn="l" rtl="0">
+              <a:spcBef>
+                <a:spcPts val="0"/>
+              </a:spcBef>
+              <a:spcAft>
+                <a:spcPts val="0"/>
+              </a:spcAft>
+              <a:buSzPts val="1200"/>
+              <a:buFont typeface="Calibri"/>
+              <a:buChar char="●"/>
+            </a:pPr>
+            <a:r>
+              <a:rPr lang="en" sz="1200">
+                <a:latin typeface="Calibri"/>
+                <a:ea typeface="Calibri"/>
+                <a:cs typeface="Calibri"/>
+                <a:sym typeface="Calibri"/>
+              </a:rPr>
+              <a:t>Pre-orders are open, shipping this fall</a:t>
+            </a:r>
+            <a:endParaRPr sz="1200">
+              <a:latin typeface="Calibri"/>
+              <a:ea typeface="Calibri"/>
+              <a:cs typeface="Calibri"/>
+              <a:sym typeface="Calibri"/>
+            </a:endParaRPr>
+          </a:p>
+          <a:p>
+            <a:pPr marL="171450" lvl="0" indent="-133350" algn="l" rtl="0">
+              <a:spcBef>
+                <a:spcPts val="0"/>
+              </a:spcBef>
+              <a:spcAft>
+                <a:spcPts val="0"/>
+              </a:spcAft>
+              <a:buSzPts val="1200"/>
+              <a:buFont typeface="Calibri"/>
+              <a:buChar char="●"/>
+            </a:pPr>
+            <a:r>
+              <a:rPr lang="en" sz="1200" u="sng">
+                <a:solidFill>
+                  <a:schemeClr val="hlink"/>
+                </a:solidFill>
+                <a:latin typeface="Calibri"/>
+                <a:ea typeface="Calibri"/>
+                <a:cs typeface="Calibri"/>
+                <a:sym typeface="Calibri"/>
+                <a:hlinkClick r:id="rId3"/>
+              </a:rPr>
+              <a:t>https://www.specs.com/smart-glasses/specs-27</a:t>
+            </a:r>
+            <a:r>
+              <a:rPr lang="en" sz="1200">
+                <a:latin typeface="Calibri"/>
+                <a:ea typeface="Calibri"/>
+                <a:cs typeface="Calibri"/>
+                <a:sym typeface="Calibri"/>
+              </a:rPr>
+              <a:t> </a:t>
+            </a:r>
+            <a:endParaRPr sz="1200">
+              <a:latin typeface="Calibri"/>
+              <a:ea typeface="Calibri"/>
+              <a:cs typeface="Calibri"/>
+              <a:sym typeface="Calibri"/>
+            </a:endParaRPr>
+          </a:p>
+        </p:txBody>
+      </p:sp>
+      <p:pic>
+        <p:nvPicPr>
+          <p:cNvPr id="291" name="Google Shape;291;p39"/>
+          <p:cNvPicPr preferRelativeResize="0"/>
+          <p:nvPr/>
+        </p:nvPicPr>
+        <p:blipFill>
+          <a:blip r:embed="rId4" cstate="email">
+            <a:alphaModFix/>
+            <a:extLst>
+              <a:ext uri="{28A0092B-C50C-407E-A947-70E740481C1C}">
+                <a14:useLocalDpi xmlns:a14="http://schemas.microsoft.com/office/drawing/2010/main"/>
+              </a:ext>
+            </a:extLst>
+          </a:blip>
+          <a:stretch>
+            <a:fillRect/>
+          </a:stretch>
+        </p:blipFill>
+        <p:spPr>
+          <a:xfrm>
+            <a:off x="5129600" y="661800"/>
+            <a:ext cx="2817301" cy="1281350"/>
+          </a:xfrm>
+          <a:prstGeom prst="rect">
+            <a:avLst/>
+          </a:prstGeom>
+          <a:noFill/>
+          <a:ln w="9525" cap="flat" cmpd="sng">
+            <a:solidFill>
+              <a:srgbClr val="FF0000"/>
+            </a:solidFill>
+            <a:prstDash val="solid"/>
+            <a:round/>
+            <a:headEnd type="none" w="sm" len="sm"/>
+            <a:tailEnd type="none" w="sm" len="sm"/>
+          </a:ln>
+        </p:spPr>
+      </p:pic>
+    </p:spTree>
+  </p:cSld>
+  <p:clrMapOvr>
+    <a:masterClrMapping/>
+  </p:clrMapOvr>
+</p:sld>
+</file>
+
+<file path=ppt/slides/slide28.xml><?xml version="1.0" encoding="utf-8"?>
+<p:sld xmlns:a="http://schemas.openxmlformats.org/drawingml/2006/main" xmlns:r="http://schemas.openxmlformats.org/officeDocument/2006/relationships" xmlns:p="http://schemas.openxmlformats.org/presentationml/2006/main">
+  <p:cSld>
+    <p:spTree>
+      <p:nvGrpSpPr>
+        <p:cNvPr id="1" name="Shape 295"/>
+        <p:cNvGrpSpPr/>
+        <p:nvPr/>
+      </p:nvGrpSpPr>
+      <p:grpSpPr>
+        <a:xfrm>
+          <a:off x="0" y="0"/>
+          <a:ext cx="0" cy="0"/>
+          <a:chOff x="0" y="0"/>
+          <a:chExt cx="0" cy="0"/>
+        </a:xfrm>
+      </p:grpSpPr>
+      <p:sp>
+        <p:nvSpPr>
+          <p:cNvPr id="296" name="Google Shape;296;p40"/>
           <p:cNvSpPr txBox="1"/>
           <p:nvPr/>
         </p:nvSpPr>
@@ -35824,7 +39531,7 @@
       </p:sp>
       <p:sp>
         <p:nvSpPr>
-          <p:cNvPr id="266" name="Google Shape;266;p37"/>
+          <p:cNvPr id="297" name="Google Shape;297;p40"/>
           <p:cNvSpPr txBox="1"/>
           <p:nvPr/>
         </p:nvSpPr>
@@ -35964,7 +39671,7 @@
       </p:sp>
       <p:sp>
         <p:nvSpPr>
-          <p:cNvPr id="267" name="Google Shape;267;p37"/>
+          <p:cNvPr id="298" name="Google Shape;298;p40"/>
           <p:cNvSpPr txBox="1"/>
           <p:nvPr/>
         </p:nvSpPr>
@@ -36051,7 +39758,7 @@
                 <a:cs typeface="Roboto Mono"/>
                 <a:sym typeface="Roboto Mono"/>
               </a:rPr>
-              <a:t>128.9K in 2026 </a:t>
+              <a:t>129.2K in 2026 </a:t>
             </a:r>
             <a:r>
               <a:rPr lang="en" sz="1000" b="1">
@@ -36063,7 +39770,7 @@
                 <a:cs typeface="Roboto Mono"/>
                 <a:sym typeface="Roboto Mono"/>
               </a:rPr>
-              <a:t>(as of Sept 14, 2026)</a:t>
+              <a:t>(as of Sept 18, 2026)</a:t>
             </a:r>
             <a:endParaRPr sz="1000" b="1">
               <a:latin typeface="Roboto Mono"/>
@@ -36234,7 +39941,7 @@
       </p:sp>
       <p:sp>
         <p:nvSpPr>
-          <p:cNvPr id="268" name="Google Shape;268;p37"/>
+          <p:cNvPr id="299" name="Google Shape;299;p40"/>
           <p:cNvSpPr txBox="1"/>
           <p:nvPr/>
         </p:nvSpPr>
@@ -36324,7 +40031,7 @@
                 <a:cs typeface="Calibri"/>
                 <a:sym typeface="Calibri"/>
               </a:rPr>
-              <a:t>187,604</a:t>
+              <a:t>189,217</a:t>
             </a:r>
             <a:r>
               <a:rPr lang="en" sz="1200">
@@ -36333,7 +40040,7 @@
                 <a:cs typeface="Calibri"/>
                 <a:sym typeface="Calibri"/>
               </a:rPr>
-              <a:t> people laid off (727 per day)</a:t>
+              <a:t> people laid off (725 per day)</a:t>
             </a:r>
             <a:endParaRPr sz="1200">
               <a:latin typeface="Calibri"/>
@@ -36495,7 +40202,7 @@
       </p:sp>
       <p:pic>
         <p:nvPicPr>
-          <p:cNvPr id="269" name="Google Shape;269;p37" descr="auto: layoffs-fyi-chart"/>
+          <p:cNvPr id="300" name="Google Shape;300;p40"/>
           <p:cNvPicPr preferRelativeResize="0"/>
           <p:nvPr/>
         </p:nvPicPr>
@@ -36514,8 +40221,8 @@
         </p:blipFill>
         <p:spPr>
           <a:xfrm>
-            <a:off x="102925" y="3324699"/>
-            <a:ext cx="5120081" cy="1714831"/>
+            <a:off x="345736" y="3324699"/>
+            <a:ext cx="4634458" cy="1714830"/>
           </a:xfrm>
           <a:prstGeom prst="rect">
             <a:avLst/>
@@ -36534,7 +40241,7 @@
       </p:pic>
       <p:pic>
         <p:nvPicPr>
-          <p:cNvPr id="270" name="Google Shape;270;p37" descr="auto: trueup-chart"/>
+          <p:cNvPr id="301" name="Google Shape;301;p40"/>
           <p:cNvPicPr preferRelativeResize="0"/>
           <p:nvPr/>
         </p:nvPicPr>
@@ -36553,8 +40260,8 @@
         </p:blipFill>
         <p:spPr>
           <a:xfrm>
-            <a:off x="143553" y="518028"/>
-            <a:ext cx="5038829" cy="2598718"/>
+            <a:off x="243109" y="518028"/>
+            <a:ext cx="4839720" cy="2598719"/>
           </a:xfrm>
           <a:prstGeom prst="rect">
             <a:avLst/>
@@ -36579,12 +40286,12 @@
 </p:sld>
 </file>
 
-<file path=ppt/slides/slide26.xml><?xml version="1.0" encoding="utf-8"?>
+<file path=ppt/slides/slide29.xml><?xml version="1.0" encoding="utf-8"?>
 <p:sld xmlns:a="http://schemas.openxmlformats.org/drawingml/2006/main" xmlns:r="http://schemas.openxmlformats.org/officeDocument/2006/relationships" xmlns:p="http://schemas.openxmlformats.org/presentationml/2006/main">
   <p:cSld>
     <p:spTree>
       <p:nvGrpSpPr>
-        <p:cNvPr id="1" name="Shape 274"/>
+        <p:cNvPr id="1" name="Shape 305"/>
         <p:cNvGrpSpPr/>
         <p:nvPr/>
       </p:nvGrpSpPr>
@@ -36598,7 +40305,7 @@
       </p:grpSpPr>
       <p:sp>
         <p:nvSpPr>
-          <p:cNvPr id="275" name="Google Shape;275;p38"/>
+          <p:cNvPr id="306" name="Google Shape;306;p41"/>
           <p:cNvSpPr txBox="1"/>
           <p:nvPr/>
         </p:nvSpPr>
@@ -36650,7 +40357,7 @@
       </p:sp>
       <p:sp>
         <p:nvSpPr>
-          <p:cNvPr id="276" name="Google Shape;276;p38"/>
+          <p:cNvPr id="307" name="Google Shape;307;p41"/>
           <p:cNvSpPr txBox="1"/>
           <p:nvPr/>
         </p:nvSpPr>
@@ -36899,7 +40606,7 @@
       </p:sp>
       <p:pic>
         <p:nvPicPr>
-          <p:cNvPr id="277" name="Google Shape;277;p38"/>
+          <p:cNvPr id="308" name="Google Shape;308;p41"/>
           <p:cNvPicPr preferRelativeResize="0"/>
           <p:nvPr/>
         </p:nvPicPr>
@@ -36936,340 +40643,6 @@
           </a:ln>
         </p:spPr>
       </p:pic>
-    </p:spTree>
-  </p:cSld>
-  <p:clrMapOvr>
-    <a:masterClrMapping/>
-  </p:clrMapOvr>
-</p:sld>
-</file>
-
-<file path=ppt/slides/slide27.xml><?xml version="1.0" encoding="utf-8"?>
-<p:sld xmlns:a="http://schemas.openxmlformats.org/drawingml/2006/main" xmlns:r="http://schemas.openxmlformats.org/officeDocument/2006/relationships" xmlns:p="http://schemas.openxmlformats.org/presentationml/2006/main">
-  <p:cSld>
-    <p:spTree>
-      <p:nvGrpSpPr>
-        <p:cNvPr id="1" name="Shape 281"/>
-        <p:cNvGrpSpPr/>
-        <p:nvPr/>
-      </p:nvGrpSpPr>
-      <p:grpSpPr>
-        <a:xfrm>
-          <a:off x="0" y="0"/>
-          <a:ext cx="0" cy="0"/>
-          <a:chOff x="0" y="0"/>
-          <a:chExt cx="0" cy="0"/>
-        </a:xfrm>
-      </p:grpSpPr>
-      <p:sp>
-        <p:nvSpPr>
-          <p:cNvPr id="282" name="Google Shape;282;p39"/>
-          <p:cNvSpPr txBox="1"/>
-          <p:nvPr/>
-        </p:nvSpPr>
-        <p:spPr>
-          <a:xfrm>
-            <a:off x="2733451" y="1718275"/>
-            <a:ext cx="3677100" cy="776100"/>
-          </a:xfrm>
-          <a:prstGeom prst="rect">
-            <a:avLst/>
-          </a:prstGeom>
-          <a:noFill/>
-          <a:ln>
-            <a:noFill/>
-          </a:ln>
-        </p:spPr>
-        <p:txBody>
-          <a:bodyPr spcFirstLastPara="1" wrap="square" lIns="91425" tIns="91425" rIns="91425" bIns="91425" anchor="t" anchorCtr="0">
-            <a:noAutofit/>
-          </a:bodyPr>
-          <a:lstStyle/>
-          <a:p>
-            <a:pPr marL="0" lvl="0" indent="0" algn="ctr" rtl="0">
-              <a:spcBef>
-                <a:spcPts val="0"/>
-              </a:spcBef>
-              <a:spcAft>
-                <a:spcPts val="0"/>
-              </a:spcAft>
-              <a:buNone/>
-            </a:pPr>
-            <a:r>
-              <a:rPr lang="en" sz="4000" b="1">
-                <a:latin typeface="Calibri"/>
-                <a:ea typeface="Calibri"/>
-                <a:cs typeface="Calibri"/>
-                <a:sym typeface="Calibri"/>
-              </a:rPr>
-              <a:t>Thank You!</a:t>
-            </a:r>
-            <a:endParaRPr sz="4000" b="1">
-              <a:latin typeface="Calibri"/>
-              <a:ea typeface="Calibri"/>
-              <a:cs typeface="Calibri"/>
-              <a:sym typeface="Calibri"/>
-            </a:endParaRPr>
-          </a:p>
-        </p:txBody>
-      </p:sp>
-      <p:sp>
-        <p:nvSpPr>
-          <p:cNvPr id="283" name="Google Shape;283;p39"/>
-          <p:cNvSpPr txBox="1"/>
-          <p:nvPr/>
-        </p:nvSpPr>
-        <p:spPr>
-          <a:xfrm>
-            <a:off x="1622775" y="2571750"/>
-            <a:ext cx="7126200" cy="1311300"/>
-          </a:xfrm>
-          <a:prstGeom prst="rect">
-            <a:avLst/>
-          </a:prstGeom>
-          <a:noFill/>
-          <a:ln>
-            <a:noFill/>
-          </a:ln>
-        </p:spPr>
-        <p:txBody>
-          <a:bodyPr spcFirstLastPara="1" wrap="square" lIns="9125" tIns="9125" rIns="9125" bIns="9125" anchor="t" anchorCtr="0">
-            <a:spAutoFit/>
-          </a:bodyPr>
-          <a:lstStyle/>
-          <a:p>
-            <a:pPr marL="171450" lvl="0" indent="-171450" algn="l" rtl="0">
-              <a:spcBef>
-                <a:spcPts val="0"/>
-              </a:spcBef>
-              <a:spcAft>
-                <a:spcPts val="0"/>
-              </a:spcAft>
-              <a:buNone/>
-            </a:pPr>
-            <a:r>
-              <a:rPr lang="en" sz="1600">
-                <a:solidFill>
-                  <a:srgbClr val="FF0000"/>
-                </a:solidFill>
-                <a:latin typeface="Calibri"/>
-                <a:ea typeface="Calibri"/>
-                <a:cs typeface="Calibri"/>
-                <a:sym typeface="Calibri"/>
-              </a:rPr>
-              <a:t>● </a:t>
-            </a:r>
-            <a:r>
-              <a:rPr lang="en" sz="1600">
-                <a:latin typeface="Calibri"/>
-                <a:ea typeface="Calibri"/>
-                <a:cs typeface="Calibri"/>
-                <a:sym typeface="Calibri"/>
-              </a:rPr>
-              <a:t>Videos of every seminar are on YouTube</a:t>
-            </a:r>
-            <a:endParaRPr sz="1600">
-              <a:latin typeface="Calibri"/>
-              <a:ea typeface="Calibri"/>
-              <a:cs typeface="Calibri"/>
-              <a:sym typeface="Calibri"/>
-            </a:endParaRPr>
-          </a:p>
-          <a:p>
-            <a:pPr marL="0" lvl="0" indent="0" algn="l" rtl="0">
-              <a:spcBef>
-                <a:spcPts val="0"/>
-              </a:spcBef>
-              <a:spcAft>
-                <a:spcPts val="0"/>
-              </a:spcAft>
-              <a:buNone/>
-            </a:pPr>
-            <a:r>
-              <a:rPr lang="en" sz="1200" u="sng">
-                <a:solidFill>
-                  <a:srgbClr val="0563C1"/>
-                </a:solidFill>
-                <a:latin typeface="Calibri"/>
-                <a:ea typeface="Calibri"/>
-                <a:cs typeface="Calibri"/>
-                <a:sym typeface="Calibri"/>
-                <a:hlinkClick r:id="rId3">
-                  <a:extLst>
-                    <a:ext uri="{A12FA001-AC4F-418D-AE19-62706E023703}">
-                      <ahyp:hlinkClr xmlns:ahyp="http://schemas.microsoft.com/office/drawing/2018/hyperlinkcolor" val="tx"/>
-                    </a:ext>
-                  </a:extLst>
-                </a:hlinkClick>
-              </a:rPr>
-              <a:t>https://www.youtube.com/@lev-selector</a:t>
-            </a:r>
-            <a:endParaRPr sz="1200">
-              <a:solidFill>
-                <a:srgbClr val="0563C1"/>
-              </a:solidFill>
-              <a:latin typeface="Calibri"/>
-              <a:ea typeface="Calibri"/>
-              <a:cs typeface="Calibri"/>
-              <a:sym typeface="Calibri"/>
-            </a:endParaRPr>
-          </a:p>
-          <a:p>
-            <a:pPr marL="171450" lvl="0" indent="-171450" algn="l" rtl="0">
-              <a:spcBef>
-                <a:spcPts val="0"/>
-              </a:spcBef>
-              <a:spcAft>
-                <a:spcPts val="0"/>
-              </a:spcAft>
-              <a:buNone/>
-            </a:pPr>
-            <a:r>
-              <a:rPr lang="en" sz="1600">
-                <a:solidFill>
-                  <a:srgbClr val="FF0000"/>
-                </a:solidFill>
-                <a:latin typeface="Calibri"/>
-                <a:ea typeface="Calibri"/>
-                <a:cs typeface="Calibri"/>
-                <a:sym typeface="Calibri"/>
-              </a:rPr>
-              <a:t>● </a:t>
-            </a:r>
-            <a:r>
-              <a:rPr lang="en" sz="1600">
-                <a:latin typeface="Calibri"/>
-                <a:ea typeface="Calibri"/>
-                <a:cs typeface="Calibri"/>
-                <a:sym typeface="Calibri"/>
-              </a:rPr>
-              <a:t>Slides on GitHub. Click a pptx file, then the download button on the right</a:t>
-            </a:r>
-            <a:endParaRPr sz="1600">
-              <a:latin typeface="Calibri"/>
-              <a:ea typeface="Calibri"/>
-              <a:cs typeface="Calibri"/>
-              <a:sym typeface="Calibri"/>
-            </a:endParaRPr>
-          </a:p>
-          <a:p>
-            <a:pPr marL="0" lvl="0" indent="0" algn="l" rtl="0">
-              <a:spcBef>
-                <a:spcPts val="0"/>
-              </a:spcBef>
-              <a:spcAft>
-                <a:spcPts val="0"/>
-              </a:spcAft>
-              <a:buNone/>
-            </a:pPr>
-            <a:r>
-              <a:rPr lang="en" sz="1200" u="sng">
-                <a:solidFill>
-                  <a:srgbClr val="0563C1"/>
-                </a:solidFill>
-                <a:latin typeface="Calibri"/>
-                <a:ea typeface="Calibri"/>
-                <a:cs typeface="Calibri"/>
-                <a:sym typeface="Calibri"/>
-                <a:hlinkClick r:id="rId4">
-                  <a:extLst>
-                    <a:ext uri="{A12FA001-AC4F-418D-AE19-62706E023703}">
-                      <ahyp:hlinkClr xmlns:ahyp="http://schemas.microsoft.com/office/drawing/2018/hyperlinkcolor" val="tx"/>
-                    </a:ext>
-                  </a:extLst>
-                </a:hlinkClick>
-              </a:rPr>
-              <a:t>https://github.com/lselector/seminar</a:t>
-            </a:r>
-            <a:endParaRPr sz="1200">
-              <a:solidFill>
-                <a:srgbClr val="0563C1"/>
-              </a:solidFill>
-              <a:latin typeface="Calibri"/>
-              <a:ea typeface="Calibri"/>
-              <a:cs typeface="Calibri"/>
-              <a:sym typeface="Calibri"/>
-            </a:endParaRPr>
-          </a:p>
-          <a:p>
-            <a:pPr marL="171450" lvl="0" indent="-171450" algn="l" rtl="0">
-              <a:spcBef>
-                <a:spcPts val="0"/>
-              </a:spcBef>
-              <a:spcAft>
-                <a:spcPts val="0"/>
-              </a:spcAft>
-              <a:buNone/>
-            </a:pPr>
-            <a:r>
-              <a:rPr lang="en" sz="1600">
-                <a:solidFill>
-                  <a:srgbClr val="FF0000"/>
-                </a:solidFill>
-                <a:latin typeface="Calibri"/>
-                <a:ea typeface="Calibri"/>
-                <a:cs typeface="Calibri"/>
-                <a:sym typeface="Calibri"/>
-              </a:rPr>
-              <a:t>● </a:t>
-            </a:r>
-            <a:r>
-              <a:rPr lang="en" sz="1600">
-                <a:latin typeface="Calibri"/>
-                <a:ea typeface="Calibri"/>
-                <a:cs typeface="Calibri"/>
-                <a:sym typeface="Calibri"/>
-              </a:rPr>
-              <a:t>Slides on Google Drive</a:t>
-            </a:r>
-            <a:endParaRPr sz="1600">
-              <a:latin typeface="Calibri"/>
-              <a:ea typeface="Calibri"/>
-              <a:cs typeface="Calibri"/>
-              <a:sym typeface="Calibri"/>
-            </a:endParaRPr>
-          </a:p>
-          <a:p>
-            <a:pPr marL="0" lvl="0" indent="0" algn="l" rtl="0">
-              <a:spcBef>
-                <a:spcPts val="0"/>
-              </a:spcBef>
-              <a:spcAft>
-                <a:spcPts val="0"/>
-              </a:spcAft>
-              <a:buNone/>
-            </a:pPr>
-            <a:r>
-              <a:rPr lang="en" sz="1200" u="sng">
-                <a:solidFill>
-                  <a:srgbClr val="0563C1"/>
-                </a:solidFill>
-                <a:latin typeface="Calibri"/>
-                <a:ea typeface="Calibri"/>
-                <a:cs typeface="Calibri"/>
-                <a:sym typeface="Calibri"/>
-                <a:hlinkClick r:id="rId5">
-                  <a:extLst>
-                    <a:ext uri="{A12FA001-AC4F-418D-AE19-62706E023703}">
-                      <ahyp:hlinkClr xmlns:ahyp="http://schemas.microsoft.com/office/drawing/2018/hyperlinkcolor" val="tx"/>
-                    </a:ext>
-                  </a:extLst>
-                </a:hlinkClick>
-              </a:rPr>
-              <a:t>https://drive.google.com/drive/folders/1dmj00iilSP-JYmriMUUaHCKz5X54e3UX?ths=true</a:t>
-            </a:r>
-            <a:endParaRPr sz="1200">
-              <a:solidFill>
-                <a:srgbClr val="0563C1"/>
-              </a:solidFill>
-              <a:latin typeface="Calibri"/>
-              <a:ea typeface="Calibri"/>
-              <a:cs typeface="Calibri"/>
-              <a:sym typeface="Calibri"/>
-            </a:endParaRPr>
-          </a:p>
-        </p:txBody>
-      </p:sp>
     </p:spTree>
   </p:cSld>
   <p:clrMapOvr>
@@ -37528,7 +40901,7 @@
                 <a:cs typeface="Calibri"/>
                 <a:sym typeface="Calibri"/>
               </a:rPr>
-              <a:t>Sept 14</a:t>
+              <a:t>Sept 18</a:t>
             </a:r>
             <a:endParaRPr sz="1200" b="1">
               <a:solidFill>
@@ -37563,8 +40936,8 @@
         </p:blipFill>
         <p:spPr>
           <a:xfrm>
-            <a:off x="112038" y="1587925"/>
-            <a:ext cx="8932926" cy="3490750"/>
+            <a:off x="116067" y="1587925"/>
+            <a:ext cx="8924868" cy="3490750"/>
           </a:xfrm>
           <a:prstGeom prst="rect">
             <a:avLst/>
@@ -37581,6 +40954,340 @@
           </a:ln>
         </p:spPr>
       </p:pic>
+    </p:spTree>
+  </p:cSld>
+  <p:clrMapOvr>
+    <a:masterClrMapping/>
+  </p:clrMapOvr>
+</p:sld>
+</file>
+
+<file path=ppt/slides/slide30.xml><?xml version="1.0" encoding="utf-8"?>
+<p:sld xmlns:a="http://schemas.openxmlformats.org/drawingml/2006/main" xmlns:r="http://schemas.openxmlformats.org/officeDocument/2006/relationships" xmlns:p="http://schemas.openxmlformats.org/presentationml/2006/main">
+  <p:cSld>
+    <p:spTree>
+      <p:nvGrpSpPr>
+        <p:cNvPr id="1" name="Shape 312"/>
+        <p:cNvGrpSpPr/>
+        <p:nvPr/>
+      </p:nvGrpSpPr>
+      <p:grpSpPr>
+        <a:xfrm>
+          <a:off x="0" y="0"/>
+          <a:ext cx="0" cy="0"/>
+          <a:chOff x="0" y="0"/>
+          <a:chExt cx="0" cy="0"/>
+        </a:xfrm>
+      </p:grpSpPr>
+      <p:sp>
+        <p:nvSpPr>
+          <p:cNvPr id="313" name="Google Shape;313;p42"/>
+          <p:cNvSpPr txBox="1"/>
+          <p:nvPr/>
+        </p:nvSpPr>
+        <p:spPr>
+          <a:xfrm>
+            <a:off x="2733451" y="1718275"/>
+            <a:ext cx="3677100" cy="776100"/>
+          </a:xfrm>
+          <a:prstGeom prst="rect">
+            <a:avLst/>
+          </a:prstGeom>
+          <a:noFill/>
+          <a:ln>
+            <a:noFill/>
+          </a:ln>
+        </p:spPr>
+        <p:txBody>
+          <a:bodyPr spcFirstLastPara="1" wrap="square" lIns="91425" tIns="91425" rIns="91425" bIns="91425" anchor="t" anchorCtr="0">
+            <a:noAutofit/>
+          </a:bodyPr>
+          <a:lstStyle/>
+          <a:p>
+            <a:pPr marL="0" lvl="0" indent="0" algn="ctr" rtl="0">
+              <a:spcBef>
+                <a:spcPts val="0"/>
+              </a:spcBef>
+              <a:spcAft>
+                <a:spcPts val="0"/>
+              </a:spcAft>
+              <a:buNone/>
+            </a:pPr>
+            <a:r>
+              <a:rPr lang="en" sz="4000" b="1">
+                <a:latin typeface="Calibri"/>
+                <a:ea typeface="Calibri"/>
+                <a:cs typeface="Calibri"/>
+                <a:sym typeface="Calibri"/>
+              </a:rPr>
+              <a:t>Thank You!</a:t>
+            </a:r>
+            <a:endParaRPr sz="4000" b="1">
+              <a:latin typeface="Calibri"/>
+              <a:ea typeface="Calibri"/>
+              <a:cs typeface="Calibri"/>
+              <a:sym typeface="Calibri"/>
+            </a:endParaRPr>
+          </a:p>
+        </p:txBody>
+      </p:sp>
+      <p:sp>
+        <p:nvSpPr>
+          <p:cNvPr id="314" name="Google Shape;314;p42"/>
+          <p:cNvSpPr txBox="1"/>
+          <p:nvPr/>
+        </p:nvSpPr>
+        <p:spPr>
+          <a:xfrm>
+            <a:off x="1622775" y="2571750"/>
+            <a:ext cx="7126200" cy="1311300"/>
+          </a:xfrm>
+          <a:prstGeom prst="rect">
+            <a:avLst/>
+          </a:prstGeom>
+          <a:noFill/>
+          <a:ln>
+            <a:noFill/>
+          </a:ln>
+        </p:spPr>
+        <p:txBody>
+          <a:bodyPr spcFirstLastPara="1" wrap="square" lIns="9125" tIns="9125" rIns="9125" bIns="9125" anchor="t" anchorCtr="0">
+            <a:spAutoFit/>
+          </a:bodyPr>
+          <a:lstStyle/>
+          <a:p>
+            <a:pPr marL="171450" lvl="0" indent="-171450" algn="l" rtl="0">
+              <a:spcBef>
+                <a:spcPts val="0"/>
+              </a:spcBef>
+              <a:spcAft>
+                <a:spcPts val="0"/>
+              </a:spcAft>
+              <a:buNone/>
+            </a:pPr>
+            <a:r>
+              <a:rPr lang="en" sz="1600">
+                <a:solidFill>
+                  <a:srgbClr val="FF0000"/>
+                </a:solidFill>
+                <a:latin typeface="Calibri"/>
+                <a:ea typeface="Calibri"/>
+                <a:cs typeface="Calibri"/>
+                <a:sym typeface="Calibri"/>
+              </a:rPr>
+              <a:t>● </a:t>
+            </a:r>
+            <a:r>
+              <a:rPr lang="en" sz="1600">
+                <a:latin typeface="Calibri"/>
+                <a:ea typeface="Calibri"/>
+                <a:cs typeface="Calibri"/>
+                <a:sym typeface="Calibri"/>
+              </a:rPr>
+              <a:t>Videos of every seminar are on YouTube</a:t>
+            </a:r>
+            <a:endParaRPr sz="1600">
+              <a:latin typeface="Calibri"/>
+              <a:ea typeface="Calibri"/>
+              <a:cs typeface="Calibri"/>
+              <a:sym typeface="Calibri"/>
+            </a:endParaRPr>
+          </a:p>
+          <a:p>
+            <a:pPr marL="0" lvl="0" indent="0" algn="l" rtl="0">
+              <a:spcBef>
+                <a:spcPts val="0"/>
+              </a:spcBef>
+              <a:spcAft>
+                <a:spcPts val="0"/>
+              </a:spcAft>
+              <a:buNone/>
+            </a:pPr>
+            <a:r>
+              <a:rPr lang="en" sz="1200" u="sng">
+                <a:solidFill>
+                  <a:srgbClr val="0563C1"/>
+                </a:solidFill>
+                <a:latin typeface="Calibri"/>
+                <a:ea typeface="Calibri"/>
+                <a:cs typeface="Calibri"/>
+                <a:sym typeface="Calibri"/>
+                <a:hlinkClick r:id="rId3">
+                  <a:extLst>
+                    <a:ext uri="{A12FA001-AC4F-418D-AE19-62706E023703}">
+                      <ahyp:hlinkClr xmlns:ahyp="http://schemas.microsoft.com/office/drawing/2018/hyperlinkcolor" val="tx"/>
+                    </a:ext>
+                  </a:extLst>
+                </a:hlinkClick>
+              </a:rPr>
+              <a:t>https://www.youtube.com/@lev-selector</a:t>
+            </a:r>
+            <a:endParaRPr sz="1200">
+              <a:solidFill>
+                <a:srgbClr val="0563C1"/>
+              </a:solidFill>
+              <a:latin typeface="Calibri"/>
+              <a:ea typeface="Calibri"/>
+              <a:cs typeface="Calibri"/>
+              <a:sym typeface="Calibri"/>
+            </a:endParaRPr>
+          </a:p>
+          <a:p>
+            <a:pPr marL="171450" lvl="0" indent="-171450" algn="l" rtl="0">
+              <a:spcBef>
+                <a:spcPts val="0"/>
+              </a:spcBef>
+              <a:spcAft>
+                <a:spcPts val="0"/>
+              </a:spcAft>
+              <a:buNone/>
+            </a:pPr>
+            <a:r>
+              <a:rPr lang="en" sz="1600">
+                <a:solidFill>
+                  <a:srgbClr val="FF0000"/>
+                </a:solidFill>
+                <a:latin typeface="Calibri"/>
+                <a:ea typeface="Calibri"/>
+                <a:cs typeface="Calibri"/>
+                <a:sym typeface="Calibri"/>
+              </a:rPr>
+              <a:t>● </a:t>
+            </a:r>
+            <a:r>
+              <a:rPr lang="en" sz="1600">
+                <a:latin typeface="Calibri"/>
+                <a:ea typeface="Calibri"/>
+                <a:cs typeface="Calibri"/>
+                <a:sym typeface="Calibri"/>
+              </a:rPr>
+              <a:t>Slides on GitHub. Click a pptx file, then the download button on the right</a:t>
+            </a:r>
+            <a:endParaRPr sz="1600">
+              <a:latin typeface="Calibri"/>
+              <a:ea typeface="Calibri"/>
+              <a:cs typeface="Calibri"/>
+              <a:sym typeface="Calibri"/>
+            </a:endParaRPr>
+          </a:p>
+          <a:p>
+            <a:pPr marL="0" lvl="0" indent="0" algn="l" rtl="0">
+              <a:spcBef>
+                <a:spcPts val="0"/>
+              </a:spcBef>
+              <a:spcAft>
+                <a:spcPts val="0"/>
+              </a:spcAft>
+              <a:buNone/>
+            </a:pPr>
+            <a:r>
+              <a:rPr lang="en" sz="1200" u="sng">
+                <a:solidFill>
+                  <a:srgbClr val="0563C1"/>
+                </a:solidFill>
+                <a:latin typeface="Calibri"/>
+                <a:ea typeface="Calibri"/>
+                <a:cs typeface="Calibri"/>
+                <a:sym typeface="Calibri"/>
+                <a:hlinkClick r:id="rId4">
+                  <a:extLst>
+                    <a:ext uri="{A12FA001-AC4F-418D-AE19-62706E023703}">
+                      <ahyp:hlinkClr xmlns:ahyp="http://schemas.microsoft.com/office/drawing/2018/hyperlinkcolor" val="tx"/>
+                    </a:ext>
+                  </a:extLst>
+                </a:hlinkClick>
+              </a:rPr>
+              <a:t>https://github.com/lselector/seminar</a:t>
+            </a:r>
+            <a:endParaRPr sz="1200">
+              <a:solidFill>
+                <a:srgbClr val="0563C1"/>
+              </a:solidFill>
+              <a:latin typeface="Calibri"/>
+              <a:ea typeface="Calibri"/>
+              <a:cs typeface="Calibri"/>
+              <a:sym typeface="Calibri"/>
+            </a:endParaRPr>
+          </a:p>
+          <a:p>
+            <a:pPr marL="171450" lvl="0" indent="-171450" algn="l" rtl="0">
+              <a:spcBef>
+                <a:spcPts val="0"/>
+              </a:spcBef>
+              <a:spcAft>
+                <a:spcPts val="0"/>
+              </a:spcAft>
+              <a:buNone/>
+            </a:pPr>
+            <a:r>
+              <a:rPr lang="en" sz="1600">
+                <a:solidFill>
+                  <a:srgbClr val="FF0000"/>
+                </a:solidFill>
+                <a:latin typeface="Calibri"/>
+                <a:ea typeface="Calibri"/>
+                <a:cs typeface="Calibri"/>
+                <a:sym typeface="Calibri"/>
+              </a:rPr>
+              <a:t>● </a:t>
+            </a:r>
+            <a:r>
+              <a:rPr lang="en" sz="1600">
+                <a:latin typeface="Calibri"/>
+                <a:ea typeface="Calibri"/>
+                <a:cs typeface="Calibri"/>
+                <a:sym typeface="Calibri"/>
+              </a:rPr>
+              <a:t>Slides on Google Drive</a:t>
+            </a:r>
+            <a:endParaRPr sz="1600">
+              <a:latin typeface="Calibri"/>
+              <a:ea typeface="Calibri"/>
+              <a:cs typeface="Calibri"/>
+              <a:sym typeface="Calibri"/>
+            </a:endParaRPr>
+          </a:p>
+          <a:p>
+            <a:pPr marL="0" lvl="0" indent="0" algn="l" rtl="0">
+              <a:spcBef>
+                <a:spcPts val="0"/>
+              </a:spcBef>
+              <a:spcAft>
+                <a:spcPts val="0"/>
+              </a:spcAft>
+              <a:buNone/>
+            </a:pPr>
+            <a:r>
+              <a:rPr lang="en" sz="1200" u="sng">
+                <a:solidFill>
+                  <a:srgbClr val="0563C1"/>
+                </a:solidFill>
+                <a:latin typeface="Calibri"/>
+                <a:ea typeface="Calibri"/>
+                <a:cs typeface="Calibri"/>
+                <a:sym typeface="Calibri"/>
+                <a:hlinkClick r:id="rId5">
+                  <a:extLst>
+                    <a:ext uri="{A12FA001-AC4F-418D-AE19-62706E023703}">
+                      <ahyp:hlinkClr xmlns:ahyp="http://schemas.microsoft.com/office/drawing/2018/hyperlinkcolor" val="tx"/>
+                    </a:ext>
+                  </a:extLst>
+                </a:hlinkClick>
+              </a:rPr>
+              <a:t>https://drive.google.com/drive/folders/1dmj00iilSP-JYmriMUUaHCKz5X54e3UX?ths=true</a:t>
+            </a:r>
+            <a:endParaRPr sz="1200">
+              <a:solidFill>
+                <a:srgbClr val="0563C1"/>
+              </a:solidFill>
+              <a:latin typeface="Calibri"/>
+              <a:ea typeface="Calibri"/>
+              <a:cs typeface="Calibri"/>
+              <a:sym typeface="Calibri"/>
+            </a:endParaRPr>
+          </a:p>
+        </p:txBody>
+      </p:sp>
     </p:spTree>
   </p:cSld>
   <p:clrMapOvr>
@@ -39948,8 +43655,8 @@
         </p:nvSpPr>
         <p:spPr>
           <a:xfrm>
-            <a:off x="118750" y="476275"/>
-            <a:ext cx="4453200" cy="3897300"/>
+            <a:off x="118750" y="351175"/>
+            <a:ext cx="5942400" cy="4220700"/>
           </a:xfrm>
           <a:prstGeom prst="rect">
             <a:avLst/>
@@ -39988,7 +43695,7 @@
               <a:buChar char="●"/>
             </a:pPr>
             <a:r>
-              <a:rPr lang="en" sz="1200">
+              <a:rPr lang="en" sz="1200" b="1">
                 <a:solidFill>
                   <a:srgbClr val="FF0000"/>
                 </a:solidFill>
@@ -39997,9 +43704,9 @@
                 <a:cs typeface="Calibri"/>
                 <a:sym typeface="Calibri"/>
               </a:rPr>
-              <a:t>RSI - Recursive Self-Improvement</a:t>
-            </a:r>
-            <a:endParaRPr sz="1200">
+              <a:t>RSI (Recursive Self-Improvement) is a leading priority</a:t>
+            </a:r>
+            <a:endParaRPr sz="1200" b="1">
               <a:solidFill>
                 <a:srgbClr val="FF0000"/>
               </a:solidFill>
@@ -40028,7 +43735,7 @@
                 <a:cs typeface="Calibri"/>
                 <a:sym typeface="Calibri"/>
               </a:rPr>
-              <a:t>AI system improves the methods used to create, train, evaluate, or operate future AI systems</a:t>
+              <a:t>RSI AI system improves the methods used to create, train, evaluate, or operate future AI systems</a:t>
             </a:r>
             <a:endParaRPr sz="1200">
               <a:latin typeface="Calibri"/>
@@ -40129,20 +43836,29 @@
               <a:spcAft>
                 <a:spcPts val="0"/>
               </a:spcAft>
+              <a:buClr>
+                <a:srgbClr val="3C78D8"/>
+              </a:buClr>
               <a:buSzPts val="1200"/>
               <a:buFont typeface="Calibri"/>
               <a:buChar char="●"/>
             </a:pPr>
             <a:r>
-              <a:rPr lang="en" sz="1200">
-                <a:latin typeface="Calibri"/>
-                <a:ea typeface="Calibri"/>
-                <a:cs typeface="Calibri"/>
-                <a:sym typeface="Calibri"/>
-              </a:rPr>
-              <a:t>RSI is constrained by compute, data, hardware, experiment time, reliable measurements, and safety controls</a:t>
-            </a:r>
-            <a:endParaRPr sz="1200">
+              <a:rPr lang="en" sz="1200" b="1">
+                <a:solidFill>
+                  <a:srgbClr val="3C78D8"/>
+                </a:solidFill>
+                <a:latin typeface="Calibri"/>
+                <a:ea typeface="Calibri"/>
+                <a:cs typeface="Calibri"/>
+                <a:sym typeface="Calibri"/>
+              </a:rPr>
+              <a:t>Reports and preprints emerged September 14–16, 2026, spanning OpenAI, Google/DeepMind research, universities, and PHAI Labs’ biomedical workspace</a:t>
+            </a:r>
+            <a:endParaRPr sz="1200" b="1">
+              <a:solidFill>
+                <a:srgbClr val="3C78D8"/>
+              </a:solidFill>
               <a:latin typeface="Calibri"/>
               <a:ea typeface="Calibri"/>
               <a:cs typeface="Calibri"/>
@@ -40161,6 +43877,15 @@
               <a:buFont typeface="Calibri"/>
               <a:buChar char="●"/>
             </a:pPr>
+            <a:r>
+              <a:rPr lang="en" sz="1200">
+                <a:latin typeface="Calibri"/>
+                <a:ea typeface="Calibri"/>
+                <a:cs typeface="Calibri"/>
+                <a:sym typeface="Calibri"/>
+              </a:rPr>
+              <a:t>RSI improves the research, search, software, and training processes that produce later models</a:t>
+            </a:r>
             <a:endParaRPr sz="1200">
               <a:latin typeface="Calibri"/>
               <a:ea typeface="Calibri"/>
@@ -40187,7 +43912,49 @@
                 <a:cs typeface="Calibri"/>
                 <a:sym typeface="Calibri"/>
               </a:rPr>
-              <a:t>[https://www.anthropic.com/institute/recursive-self-improvement](https://www.anthropic.com/institute/recursive-self-improvement)</a:t>
+              <a:t>AI research remains expensive and human-paced. </a:t>
+            </a:r>
+            <a:r>
+              <a:rPr lang="en" sz="1200" b="1">
+                <a:solidFill>
+                  <a:srgbClr val="FF0000"/>
+                </a:solidFill>
+                <a:latin typeface="Calibri"/>
+                <a:ea typeface="Calibri"/>
+                <a:cs typeface="Calibri"/>
+                <a:sym typeface="Calibri"/>
+              </a:rPr>
+              <a:t>Dream-RSI </a:t>
+            </a:r>
+            <a:r>
+              <a:rPr lang="en" sz="1200">
+                <a:latin typeface="Calibri"/>
+                <a:ea typeface="Calibri"/>
+                <a:cs typeface="Calibri"/>
+                <a:sym typeface="Calibri"/>
+              </a:rPr>
+              <a:t>replays recorded search histories to test improved exploration strategies cheaply, while </a:t>
+            </a:r>
+            <a:r>
+              <a:rPr lang="en" sz="1200" b="1">
+                <a:solidFill>
+                  <a:srgbClr val="FF0000"/>
+                </a:solidFill>
+                <a:latin typeface="Calibri"/>
+                <a:ea typeface="Calibri"/>
+                <a:cs typeface="Calibri"/>
+                <a:sym typeface="Calibri"/>
+              </a:rPr>
+              <a:t>ScienceBuddy</a:t>
+            </a:r>
+            <a:r>
+              <a:rPr lang="en" sz="1200">
+                <a:latin typeface="Calibri"/>
+                <a:ea typeface="Calibri"/>
+                <a:cs typeface="Calibri"/>
+                <a:sym typeface="Calibri"/>
+              </a:rPr>
+              <a:t> alternates harness improvements with model reinforcement learning.</a:t>
             </a:r>
             <a:endParaRPr sz="1200">
               <a:latin typeface="Calibri"/>
@@ -40197,55 +43964,341 @@
             </a:endParaRPr>
           </a:p>
           <a:p>
-            <a:pPr marL="228600" lvl="0" indent="-133350" algn="l" rtl="0">
-              <a:spcBef>
-                <a:spcPts val="0"/>
-              </a:spcBef>
-              <a:spcAft>
-                <a:spcPts val="0"/>
-              </a:spcAft>
-              <a:buSzPts val="1200"/>
+            <a:pPr marL="228600" lvl="0" indent="-114300" algn="l" rtl="0">
+              <a:spcBef>
+                <a:spcPts val="0"/>
+              </a:spcBef>
+              <a:spcAft>
+                <a:spcPts val="0"/>
+              </a:spcAft>
+              <a:buSzPts val="900"/>
               <a:buFont typeface="Calibri"/>
               <a:buChar char="●"/>
             </a:pPr>
             <a:r>
-              <a:rPr lang="en" sz="1200">
-                <a:latin typeface="Calibri"/>
-                <a:ea typeface="Calibri"/>
-                <a:cs typeface="Calibri"/>
-                <a:sym typeface="Calibri"/>
-              </a:rPr>
-              <a:t>[https://en.wikipedia.org/wiki/Recursive_self-improvement](https://en.wikipedia.org/wiki/Recursive_self-improvement)</a:t>
-            </a:r>
-            <a:endParaRPr sz="1200">
-              <a:latin typeface="Calibri"/>
-              <a:ea typeface="Calibri"/>
-              <a:cs typeface="Calibri"/>
-              <a:sym typeface="Calibri"/>
-            </a:endParaRPr>
-          </a:p>
-          <a:p>
-            <a:pPr marL="228600" lvl="0" indent="-133350" algn="l" rtl="0">
-              <a:spcBef>
-                <a:spcPts val="0"/>
-              </a:spcBef>
-              <a:spcAft>
-                <a:spcPts val="0"/>
-              </a:spcAft>
-              <a:buSzPts val="1200"/>
+              <a:rPr lang="en" sz="900" u="sng">
+                <a:solidFill>
+                  <a:schemeClr val="hlink"/>
+                </a:solidFill>
+                <a:latin typeface="Calibri"/>
+                <a:ea typeface="Calibri"/>
+                <a:cs typeface="Calibri"/>
+                <a:sym typeface="Calibri"/>
+                <a:hlinkClick r:id="rId3"/>
+              </a:rPr>
+              <a:t>https://www.anthropic.com/institute/recursive-self-improvement</a:t>
+            </a:r>
+            <a:endParaRPr sz="900">
+              <a:latin typeface="Calibri"/>
+              <a:ea typeface="Calibri"/>
+              <a:cs typeface="Calibri"/>
+              <a:sym typeface="Calibri"/>
+            </a:endParaRPr>
+          </a:p>
+          <a:p>
+            <a:pPr marL="228600" lvl="0" indent="-114300" algn="l" rtl="0">
+              <a:spcBef>
+                <a:spcPts val="0"/>
+              </a:spcBef>
+              <a:spcAft>
+                <a:spcPts val="0"/>
+              </a:spcAft>
+              <a:buSzPts val="900"/>
               <a:buFont typeface="Calibri"/>
               <a:buChar char="●"/>
             </a:pPr>
             <a:r>
-              <a:rPr lang="en" sz="1200">
-                <a:latin typeface="Calibri"/>
-                <a:ea typeface="Calibri"/>
-                <a:cs typeface="Calibri"/>
-                <a:sym typeface="Calibri"/>
-              </a:rPr>
-              <a:t>[https://www.lesswrong.com/posts/ELnqefmefjhyEPzbc/what-do-people-mean-by-recursive-self-improvement](https://www.lesswrong.com/posts/ELnqefmefjhyEPzbc/what-do-people-mean-by-recursive-self-improvement)</a:t>
-            </a:r>
-            <a:endParaRPr sz="1200">
+              <a:rPr lang="en" sz="900" u="sng">
+                <a:solidFill>
+                  <a:schemeClr val="hlink"/>
+                </a:solidFill>
+                <a:latin typeface="Calibri"/>
+                <a:ea typeface="Calibri"/>
+                <a:cs typeface="Calibri"/>
+                <a:sym typeface="Calibri"/>
+                <a:hlinkClick r:id="rId4"/>
+              </a:rPr>
+              <a:t>https://en.wikipedia.org/wiki/Recursive_self-improvement</a:t>
+            </a:r>
+            <a:endParaRPr sz="900">
+              <a:latin typeface="Calibri"/>
+              <a:ea typeface="Calibri"/>
+              <a:cs typeface="Calibri"/>
+              <a:sym typeface="Calibri"/>
+            </a:endParaRPr>
+          </a:p>
+          <a:p>
+            <a:pPr marL="228600" lvl="0" indent="-114300" algn="l" rtl="0">
+              <a:spcBef>
+                <a:spcPts val="0"/>
+              </a:spcBef>
+              <a:spcAft>
+                <a:spcPts val="0"/>
+              </a:spcAft>
+              <a:buSzPts val="900"/>
+              <a:buFont typeface="Calibri"/>
+              <a:buChar char="●"/>
+            </a:pPr>
+            <a:r>
+              <a:rPr lang="en" sz="900" u="sng">
+                <a:solidFill>
+                  <a:schemeClr val="hlink"/>
+                </a:solidFill>
+                <a:latin typeface="Calibri"/>
+                <a:ea typeface="Calibri"/>
+                <a:cs typeface="Calibri"/>
+                <a:sym typeface="Calibri"/>
+                <a:hlinkClick r:id="rId5"/>
+              </a:rPr>
+              <a:t>https://www.lesswrong.com/posts/ELnqefmefjhyEPzbc/what-do-people-mean-by-recursive-self-improvement</a:t>
+            </a:r>
+            <a:endParaRPr sz="900">
+              <a:latin typeface="Calibri"/>
+              <a:ea typeface="Calibri"/>
+              <a:cs typeface="Calibri"/>
+              <a:sym typeface="Calibri"/>
+            </a:endParaRPr>
+          </a:p>
+          <a:p>
+            <a:pPr marL="228600" lvl="0" indent="-114300" algn="l" rtl="0">
+              <a:spcBef>
+                <a:spcPts val="0"/>
+              </a:spcBef>
+              <a:spcAft>
+                <a:spcPts val="0"/>
+              </a:spcAft>
+              <a:buSzPts val="900"/>
+              <a:buFont typeface="Calibri"/>
+              <a:buChar char="●"/>
+            </a:pPr>
+            <a:r>
+              <a:rPr lang="en" sz="900" u="sng">
+                <a:solidFill>
+                  <a:schemeClr val="hlink"/>
+                </a:solidFill>
+                <a:latin typeface="Calibri"/>
+                <a:ea typeface="Calibri"/>
+                <a:cs typeface="Calibri"/>
+                <a:sym typeface="Calibri"/>
+                <a:hlinkClick r:id="rId6"/>
+              </a:rPr>
+              <a:t>https://www.theinformation.com/articles/openais-top-priority-ai-agents-automating-ai-research-says-noam-brown</a:t>
+            </a:r>
+            <a:r>
+              <a:rPr lang="en" sz="900">
+                <a:latin typeface="Calibri"/>
+                <a:ea typeface="Calibri"/>
+                <a:cs typeface="Calibri"/>
+                <a:sym typeface="Calibri"/>
+              </a:rPr>
+              <a:t> </a:t>
+            </a:r>
+            <a:endParaRPr sz="900">
+              <a:latin typeface="Calibri"/>
+              <a:ea typeface="Calibri"/>
+              <a:cs typeface="Calibri"/>
+              <a:sym typeface="Calibri"/>
+            </a:endParaRPr>
+          </a:p>
+          <a:p>
+            <a:pPr marL="228600" lvl="0" indent="-114300" algn="l" rtl="0">
+              <a:spcBef>
+                <a:spcPts val="0"/>
+              </a:spcBef>
+              <a:spcAft>
+                <a:spcPts val="0"/>
+              </a:spcAft>
+              <a:buSzPts val="900"/>
+              <a:buFont typeface="Calibri"/>
+              <a:buChar char="●"/>
+            </a:pPr>
+            <a:r>
+              <a:rPr lang="en" sz="900" u="sng">
+                <a:solidFill>
+                  <a:schemeClr val="hlink"/>
+                </a:solidFill>
+                <a:latin typeface="Calibri"/>
+                <a:ea typeface="Calibri"/>
+                <a:cs typeface="Calibri"/>
+                <a:sym typeface="Calibri"/>
+                <a:hlinkClick r:id="rId7"/>
+              </a:rPr>
+              <a:t>https://github.com/zhengkid/Dream-RSI</a:t>
+            </a:r>
+            <a:r>
+              <a:rPr lang="en" sz="900">
+                <a:latin typeface="Calibri"/>
+                <a:ea typeface="Calibri"/>
+                <a:cs typeface="Calibri"/>
+                <a:sym typeface="Calibri"/>
+              </a:rPr>
+              <a:t> </a:t>
+            </a:r>
+            <a:endParaRPr sz="900">
+              <a:latin typeface="Calibri"/>
+              <a:ea typeface="Calibri"/>
+              <a:cs typeface="Calibri"/>
+              <a:sym typeface="Calibri"/>
+            </a:endParaRPr>
+          </a:p>
+          <a:p>
+            <a:pPr marL="228600" lvl="0" indent="-114300" algn="l" rtl="0">
+              <a:spcBef>
+                <a:spcPts val="0"/>
+              </a:spcBef>
+              <a:spcAft>
+                <a:spcPts val="0"/>
+              </a:spcAft>
+              <a:buSzPts val="900"/>
+              <a:buFont typeface="Calibri"/>
+              <a:buChar char="●"/>
+            </a:pPr>
+            <a:r>
+              <a:rPr lang="en" sz="900" u="sng">
+                <a:solidFill>
+                  <a:schemeClr val="hlink"/>
+                </a:solidFill>
+                <a:latin typeface="Calibri"/>
+                <a:ea typeface="Calibri"/>
+                <a:cs typeface="Calibri"/>
+                <a:sym typeface="Calibri"/>
+                <a:hlinkClick r:id="rId8"/>
+              </a:rPr>
+              <a:t>https://github.com/Gen-Verse/ScienceBuddy</a:t>
+            </a:r>
+            <a:r>
+              <a:rPr lang="en" sz="900">
+                <a:latin typeface="Calibri"/>
+                <a:ea typeface="Calibri"/>
+                <a:cs typeface="Calibri"/>
+                <a:sym typeface="Calibri"/>
+              </a:rPr>
+              <a:t> </a:t>
+            </a:r>
+            <a:endParaRPr sz="900">
+              <a:latin typeface="Calibri"/>
+              <a:ea typeface="Calibri"/>
+              <a:cs typeface="Calibri"/>
+              <a:sym typeface="Calibri"/>
+            </a:endParaRPr>
+          </a:p>
+          <a:p>
+            <a:pPr marL="228600" lvl="0" indent="-114300" algn="l" rtl="0">
+              <a:spcBef>
+                <a:spcPts val="0"/>
+              </a:spcBef>
+              <a:spcAft>
+                <a:spcPts val="0"/>
+              </a:spcAft>
+              <a:buSzPts val="900"/>
+              <a:buFont typeface="Calibri"/>
+              <a:buChar char="●"/>
+            </a:pPr>
+            <a:r>
+              <a:rPr lang="en" sz="900" u="sng">
+                <a:solidFill>
+                  <a:schemeClr val="hlink"/>
+                </a:solidFill>
+                <a:latin typeface="Calibri"/>
+                <a:ea typeface="Calibri"/>
+                <a:cs typeface="Calibri"/>
+                <a:sym typeface="Calibri"/>
+                <a:hlinkClick r:id="rId9"/>
+              </a:rPr>
+              <a:t>https://arxiv.org/abs/2609.14858</a:t>
+            </a:r>
+            <a:r>
+              <a:rPr lang="en" sz="900">
+                <a:latin typeface="Calibri"/>
+                <a:ea typeface="Calibri"/>
+                <a:cs typeface="Calibri"/>
+                <a:sym typeface="Calibri"/>
+              </a:rPr>
+              <a:t> </a:t>
+            </a:r>
+            <a:endParaRPr sz="900">
+              <a:latin typeface="Calibri"/>
+              <a:ea typeface="Calibri"/>
+              <a:cs typeface="Calibri"/>
+              <a:sym typeface="Calibri"/>
+            </a:endParaRPr>
+          </a:p>
+          <a:p>
+            <a:pPr marL="228600" lvl="0" indent="-114300" algn="l" rtl="0">
+              <a:spcBef>
+                <a:spcPts val="0"/>
+              </a:spcBef>
+              <a:spcAft>
+                <a:spcPts val="0"/>
+              </a:spcAft>
+              <a:buSzPts val="900"/>
+              <a:buFont typeface="Calibri"/>
+              <a:buChar char="●"/>
+            </a:pPr>
+            <a:r>
+              <a:rPr lang="en" sz="900" u="sng">
+                <a:solidFill>
+                  <a:schemeClr val="hlink"/>
+                </a:solidFill>
+                <a:latin typeface="Calibri"/>
+                <a:ea typeface="Calibri"/>
+                <a:cs typeface="Calibri"/>
+                <a:sym typeface="Calibri"/>
+                <a:hlinkClick r:id="rId10"/>
+              </a:rPr>
+              <a:t>https://dream-rsi.com</a:t>
+            </a:r>
+            <a:r>
+              <a:rPr lang="en" sz="900">
+                <a:latin typeface="Calibri"/>
+                <a:ea typeface="Calibri"/>
+                <a:cs typeface="Calibri"/>
+                <a:sym typeface="Calibri"/>
+              </a:rPr>
+              <a:t> </a:t>
+            </a:r>
+            <a:endParaRPr sz="900">
+              <a:latin typeface="Calibri"/>
+              <a:ea typeface="Calibri"/>
+              <a:cs typeface="Calibri"/>
+              <a:sym typeface="Calibri"/>
+            </a:endParaRPr>
+          </a:p>
+          <a:p>
+            <a:pPr marL="228600" lvl="0" indent="-114300" algn="l" rtl="0">
+              <a:spcBef>
+                <a:spcPts val="0"/>
+              </a:spcBef>
+              <a:spcAft>
+                <a:spcPts val="0"/>
+              </a:spcAft>
+              <a:buSzPts val="900"/>
+              <a:buFont typeface="Calibri"/>
+              <a:buChar char="●"/>
+            </a:pPr>
+            <a:r>
+              <a:rPr lang="en" sz="900" u="sng">
+                <a:solidFill>
+                  <a:schemeClr val="hlink"/>
+                </a:solidFill>
+                <a:latin typeface="Calibri"/>
+                <a:ea typeface="Calibri"/>
+                <a:cs typeface="Calibri"/>
+                <a:sym typeface="Calibri"/>
+                <a:hlinkClick r:id="rId7"/>
+              </a:rPr>
+              <a:t>https://github.com/zhengkid/Dream-RSI</a:t>
+            </a:r>
+            <a:r>
+              <a:rPr lang="en" sz="900">
+                <a:latin typeface="Calibri"/>
+                <a:ea typeface="Calibri"/>
+                <a:cs typeface="Calibri"/>
+                <a:sym typeface="Calibri"/>
+              </a:rPr>
+              <a:t> </a:t>
+            </a:r>
+            <a:endParaRPr sz="900">
               <a:latin typeface="Calibri"/>
               <a:ea typeface="Calibri"/>
               <a:cs typeface="Calibri"/>
@@ -40261,7 +44314,7 @@
           <p:nvPr/>
         </p:nvPicPr>
         <p:blipFill>
-          <a:blip r:embed="rId3" cstate="email">
+          <a:blip r:embed="rId11" cstate="email">
             <a:alphaModFix/>
             <a:extLst>
               <a:ext uri="{28A0092B-C50C-407E-A947-70E740481C1C}">
@@ -40275,8 +44328,86 @@
         </p:blipFill>
         <p:spPr>
           <a:xfrm>
-            <a:off x="4660125" y="1040194"/>
-            <a:ext cx="4375999" cy="1149100"/>
+            <a:off x="6216420" y="1313775"/>
+            <a:ext cx="2832629" cy="743825"/>
+          </a:xfrm>
+          <a:prstGeom prst="rect">
+            <a:avLst/>
+          </a:prstGeom>
+          <a:noFill/>
+          <a:ln w="9525" cap="flat" cmpd="sng">
+            <a:solidFill>
+              <a:srgbClr val="FF0000"/>
+            </a:solidFill>
+            <a:prstDash val="solid"/>
+            <a:round/>
+            <a:headEnd type="none" w="sm" len="sm"/>
+            <a:tailEnd type="none" w="sm" len="sm"/>
+          </a:ln>
+        </p:spPr>
+      </p:pic>
+      <p:pic>
+        <p:nvPicPr>
+          <p:cNvPr id="112" name="Google Shape;112;p19"/>
+          <p:cNvPicPr preferRelativeResize="0"/>
+          <p:nvPr/>
+        </p:nvPicPr>
+        <p:blipFill>
+          <a:blip r:embed="rId12" cstate="email">
+            <a:alphaModFix/>
+            <a:extLst>
+              <a:ext uri="{28A0092B-C50C-407E-A947-70E740481C1C}">
+                <a14:useLocalDpi xmlns:a14="http://schemas.microsoft.com/office/drawing/2010/main"/>
+              </a:ext>
+            </a:extLst>
+          </a:blip>
+          <a:stretch>
+            <a:fillRect/>
+          </a:stretch>
+        </p:blipFill>
+        <p:spPr>
+          <a:xfrm>
+            <a:off x="6216427" y="2253624"/>
+            <a:ext cx="2832624" cy="415803"/>
+          </a:xfrm>
+          <a:prstGeom prst="rect">
+            <a:avLst/>
+          </a:prstGeom>
+          <a:noFill/>
+          <a:ln w="9525" cap="flat" cmpd="sng">
+            <a:solidFill>
+              <a:srgbClr val="FF0000"/>
+            </a:solidFill>
+            <a:prstDash val="solid"/>
+            <a:round/>
+            <a:headEnd type="none" w="sm" len="sm"/>
+            <a:tailEnd type="none" w="sm" len="sm"/>
+          </a:ln>
+        </p:spPr>
+      </p:pic>
+      <p:pic>
+        <p:nvPicPr>
+          <p:cNvPr id="113" name="Google Shape;113;p19"/>
+          <p:cNvPicPr preferRelativeResize="0"/>
+          <p:nvPr/>
+        </p:nvPicPr>
+        <p:blipFill>
+          <a:blip r:embed="rId13" cstate="email">
+            <a:alphaModFix/>
+            <a:extLst>
+              <a:ext uri="{28A0092B-C50C-407E-A947-70E740481C1C}">
+                <a14:useLocalDpi xmlns:a14="http://schemas.microsoft.com/office/drawing/2010/main"/>
+              </a:ext>
+            </a:extLst>
+          </a:blip>
+          <a:stretch>
+            <a:fillRect/>
+          </a:stretch>
+        </p:blipFill>
+        <p:spPr>
+          <a:xfrm>
+            <a:off x="6216425" y="2865442"/>
+            <a:ext cx="2832624" cy="382407"/>
           </a:xfrm>
           <a:prstGeom prst="rect">
             <a:avLst/>
@@ -40306,7 +44437,7 @@
   <p:cSld>
     <p:spTree>
       <p:nvGrpSpPr>
-        <p:cNvPr id="1" name="Shape 115"/>
+        <p:cNvPr id="1" name="Shape 117"/>
         <p:cNvGrpSpPr/>
         <p:nvPr/>
       </p:nvGrpSpPr>
@@ -40320,7 +44451,7 @@
       </p:grpSpPr>
       <p:sp>
         <p:nvSpPr>
-          <p:cNvPr id="116" name="Google Shape;116;p20"/>
+          <p:cNvPr id="118" name="Google Shape;118;p20"/>
           <p:cNvSpPr txBox="1"/>
           <p:nvPr/>
         </p:nvSpPr>
@@ -40372,7 +44503,7 @@
       </p:sp>
       <p:sp>
         <p:nvSpPr>
-          <p:cNvPr id="117" name="Google Shape;117;p20"/>
+          <p:cNvPr id="119" name="Google Shape;119;p20"/>
           <p:cNvSpPr txBox="1"/>
           <p:nvPr/>
         </p:nvSpPr>
@@ -40620,7 +44751,7 @@
       </p:sp>
       <p:pic>
         <p:nvPicPr>
-          <p:cNvPr id="118" name="Google Shape;118;p20"/>
+          <p:cNvPr id="120" name="Google Shape;120;p20"/>
           <p:cNvPicPr preferRelativeResize="0"/>
           <p:nvPr/>
         </p:nvPicPr>
@@ -40670,7 +44801,7 @@
   <p:cSld>
     <p:spTree>
       <p:nvGrpSpPr>
-        <p:cNvPr id="1" name="Shape 122"/>
+        <p:cNvPr id="1" name="Shape 124"/>
         <p:cNvGrpSpPr/>
         <p:nvPr/>
       </p:nvGrpSpPr>
@@ -40684,7 +44815,7 @@
       </p:grpSpPr>
       <p:sp>
         <p:nvSpPr>
-          <p:cNvPr id="123" name="Google Shape;123;p21"/>
+          <p:cNvPr id="125" name="Google Shape;125;p21"/>
           <p:cNvSpPr txBox="1"/>
           <p:nvPr/>
         </p:nvSpPr>
@@ -40734,351 +44865,14 @@
           </a:p>
         </p:txBody>
       </p:sp>
-      <p:sp>
-        <p:nvSpPr>
-          <p:cNvPr id="124" name="Google Shape;124;p21"/>
-          <p:cNvSpPr txBox="1"/>
-          <p:nvPr/>
-        </p:nvSpPr>
-        <p:spPr>
-          <a:xfrm>
-            <a:off x="102375" y="725485"/>
-            <a:ext cx="4161900" cy="4186800"/>
-          </a:xfrm>
-          <a:prstGeom prst="rect">
-            <a:avLst/>
-          </a:prstGeom>
-          <a:solidFill>
-            <a:srgbClr val="FFF2CC"/>
-          </a:solidFill>
-          <a:ln w="9525" cap="flat" cmpd="sng">
-            <a:solidFill>
-              <a:srgbClr val="FF0000"/>
-            </a:solidFill>
-            <a:prstDash val="solid"/>
-            <a:round/>
-            <a:headEnd type="none" w="sm" len="sm"/>
-            <a:tailEnd type="none" w="sm" len="sm"/>
-          </a:ln>
-        </p:spPr>
-        <p:txBody>
-          <a:bodyPr spcFirstLastPara="1" wrap="square" lIns="91425" tIns="91425" rIns="91425" bIns="91425" anchor="t" anchorCtr="0">
-            <a:spAutoFit/>
-          </a:bodyPr>
-          <a:lstStyle/>
-          <a:p>
-            <a:pPr marL="0" marR="0" lvl="0" indent="0" algn="l" rtl="0">
-              <a:lnSpc>
-                <a:spcPct val="100000"/>
-              </a:lnSpc>
-              <a:spcBef>
-                <a:spcPts val="0"/>
-              </a:spcBef>
-              <a:spcAft>
-                <a:spcPts val="0"/>
-              </a:spcAft>
-              <a:buClr>
-                <a:srgbClr val="000000"/>
-              </a:buClr>
-              <a:buSzPts val="2500"/>
-              <a:buFont typeface="Arial"/>
-              <a:buNone/>
-            </a:pPr>
-            <a:r>
-              <a:rPr lang="en" sz="2200">
-                <a:solidFill>
-                  <a:srgbClr val="000000"/>
-                </a:solidFill>
-                <a:latin typeface="Calibri"/>
-                <a:ea typeface="Calibri"/>
-                <a:cs typeface="Calibri"/>
-                <a:sym typeface="Calibri"/>
-              </a:rPr>
-              <a:t>Weekly videos every Friday</a:t>
-            </a:r>
-            <a:endParaRPr sz="2200">
-              <a:solidFill>
-                <a:srgbClr val="000000"/>
-              </a:solidFill>
-              <a:latin typeface="Calibri"/>
-              <a:ea typeface="Calibri"/>
-              <a:cs typeface="Calibri"/>
-              <a:sym typeface="Calibri"/>
-            </a:endParaRPr>
-          </a:p>
-          <a:p>
-            <a:pPr marL="0" lvl="0" indent="0" algn="l" rtl="0">
-              <a:spcBef>
-                <a:spcPts val="0"/>
-              </a:spcBef>
-              <a:spcAft>
-                <a:spcPts val="0"/>
-              </a:spcAft>
-              <a:buClr>
-                <a:srgbClr val="000000"/>
-              </a:buClr>
-              <a:buSzPts val="2500"/>
-              <a:buFont typeface="Arial"/>
-              <a:buNone/>
-            </a:pPr>
-            <a:r>
-              <a:rPr lang="en" sz="2200">
-                <a:solidFill>
-                  <a:srgbClr val="000000"/>
-                </a:solidFill>
-                <a:latin typeface="Calibri"/>
-                <a:ea typeface="Calibri"/>
-                <a:cs typeface="Calibri"/>
-                <a:sym typeface="Calibri"/>
-              </a:rPr>
-              <a:t>7.51K subscribers, 3337 videos</a:t>
-            </a:r>
-            <a:endParaRPr sz="2200">
-              <a:solidFill>
-                <a:srgbClr val="000000"/>
-              </a:solidFill>
-              <a:latin typeface="Calibri"/>
-              <a:ea typeface="Calibri"/>
-              <a:cs typeface="Calibri"/>
-              <a:sym typeface="Calibri"/>
-            </a:endParaRPr>
-          </a:p>
-          <a:p>
-            <a:pPr marL="0" marR="0" lvl="0" indent="0" algn="l" rtl="0">
-              <a:lnSpc>
-                <a:spcPct val="100000"/>
-              </a:lnSpc>
-              <a:spcBef>
-                <a:spcPts val="0"/>
-              </a:spcBef>
-              <a:spcAft>
-                <a:spcPts val="0"/>
-              </a:spcAft>
-              <a:buClr>
-                <a:srgbClr val="000000"/>
-              </a:buClr>
-              <a:buSzPts val="2500"/>
-              <a:buFont typeface="Arial"/>
-              <a:buNone/>
-            </a:pPr>
-            <a:endParaRPr sz="2200">
-              <a:solidFill>
-                <a:srgbClr val="000000"/>
-              </a:solidFill>
-              <a:latin typeface="Calibri"/>
-              <a:ea typeface="Calibri"/>
-              <a:cs typeface="Calibri"/>
-              <a:sym typeface="Calibri"/>
-            </a:endParaRPr>
-          </a:p>
-          <a:p>
-            <a:pPr marL="0" lvl="0" indent="0" algn="l" rtl="0">
-              <a:spcBef>
-                <a:spcPts val="0"/>
-              </a:spcBef>
-              <a:spcAft>
-                <a:spcPts val="0"/>
-              </a:spcAft>
-              <a:buClr>
-                <a:srgbClr val="000000"/>
-              </a:buClr>
-              <a:buSzPts val="2500"/>
-              <a:buFont typeface="Arial"/>
-              <a:buNone/>
-            </a:pPr>
-            <a:r>
-              <a:rPr lang="en" sz="2200">
-                <a:solidFill>
-                  <a:srgbClr val="000000"/>
-                </a:solidFill>
-                <a:latin typeface="Calibri"/>
-                <a:ea typeface="Calibri"/>
-                <a:cs typeface="Calibri"/>
-                <a:sym typeface="Calibri"/>
-              </a:rPr>
-              <a:t>1. Subscribe to this channel </a:t>
-            </a:r>
-            <a:r>
-              <a:rPr lang="en" sz="1800" b="1" u="sng">
-                <a:solidFill>
-                  <a:srgbClr val="0097A7"/>
-                </a:solidFill>
-                <a:latin typeface="Calibri"/>
-                <a:ea typeface="Calibri"/>
-                <a:cs typeface="Calibri"/>
-                <a:sym typeface="Calibri"/>
-                <a:hlinkClick r:id="rId3">
-                  <a:extLst>
-                    <a:ext uri="{A12FA001-AC4F-418D-AE19-62706E023703}">
-                      <ahyp:hlinkClr xmlns:ahyp="http://schemas.microsoft.com/office/drawing/2018/hyperlinkcolor" val="tx"/>
-                    </a:ext>
-                  </a:extLst>
-                </a:hlinkClick>
-              </a:rPr>
-              <a:t>https://www.youtube.com/@lev-selector</a:t>
-            </a:r>
-            <a:r>
-              <a:rPr lang="en" sz="1800" b="1">
-                <a:solidFill>
-                  <a:srgbClr val="000000"/>
-                </a:solidFill>
-                <a:latin typeface="Calibri"/>
-                <a:ea typeface="Calibri"/>
-                <a:cs typeface="Calibri"/>
-                <a:sym typeface="Calibri"/>
-              </a:rPr>
-              <a:t> </a:t>
-            </a:r>
-            <a:endParaRPr sz="1800" b="1">
-              <a:solidFill>
-                <a:srgbClr val="000000"/>
-              </a:solidFill>
-              <a:latin typeface="Calibri"/>
-              <a:ea typeface="Calibri"/>
-              <a:cs typeface="Calibri"/>
-              <a:sym typeface="Calibri"/>
-            </a:endParaRPr>
-          </a:p>
-          <a:p>
-            <a:pPr marL="0" marR="0" lvl="0" indent="0" algn="l" rtl="0">
-              <a:lnSpc>
-                <a:spcPct val="100000"/>
-              </a:lnSpc>
-              <a:spcBef>
-                <a:spcPts val="0"/>
-              </a:spcBef>
-              <a:spcAft>
-                <a:spcPts val="0"/>
-              </a:spcAft>
-              <a:buClr>
-                <a:srgbClr val="000000"/>
-              </a:buClr>
-              <a:buSzPts val="2500"/>
-              <a:buFont typeface="Arial"/>
-              <a:buNone/>
-            </a:pPr>
-            <a:endParaRPr sz="2200">
-              <a:solidFill>
-                <a:srgbClr val="000000"/>
-              </a:solidFill>
-              <a:latin typeface="Calibri"/>
-              <a:ea typeface="Calibri"/>
-              <a:cs typeface="Calibri"/>
-              <a:sym typeface="Calibri"/>
-            </a:endParaRPr>
-          </a:p>
-          <a:p>
-            <a:pPr marL="0" marR="0" lvl="0" indent="0" algn="l" rtl="0">
-              <a:lnSpc>
-                <a:spcPct val="100000"/>
-              </a:lnSpc>
-              <a:spcBef>
-                <a:spcPts val="0"/>
-              </a:spcBef>
-              <a:spcAft>
-                <a:spcPts val="0"/>
-              </a:spcAft>
-              <a:buClr>
-                <a:srgbClr val="000000"/>
-              </a:buClr>
-              <a:buSzPts val="2500"/>
-              <a:buFont typeface="Arial"/>
-              <a:buNone/>
-            </a:pPr>
-            <a:r>
-              <a:rPr lang="en" sz="2200">
-                <a:solidFill>
-                  <a:srgbClr val="000000"/>
-                </a:solidFill>
-                <a:latin typeface="Calibri"/>
-                <a:ea typeface="Calibri"/>
-                <a:cs typeface="Calibri"/>
-                <a:sym typeface="Calibri"/>
-              </a:rPr>
-              <a:t>2. Download slides from GitHub using links under the videos</a:t>
-            </a:r>
-            <a:endParaRPr sz="2200">
-              <a:solidFill>
-                <a:srgbClr val="000000"/>
-              </a:solidFill>
-              <a:latin typeface="Calibri"/>
-              <a:ea typeface="Calibri"/>
-              <a:cs typeface="Calibri"/>
-              <a:sym typeface="Calibri"/>
-            </a:endParaRPr>
-          </a:p>
-          <a:p>
-            <a:pPr marL="0" lvl="0" indent="0" algn="l" rtl="0">
-              <a:spcBef>
-                <a:spcPts val="0"/>
-              </a:spcBef>
-              <a:spcAft>
-                <a:spcPts val="0"/>
-              </a:spcAft>
-              <a:buClr>
-                <a:srgbClr val="000000"/>
-              </a:buClr>
-              <a:buSzPts val="2500"/>
-              <a:buFont typeface="Arial"/>
-              <a:buNone/>
-            </a:pPr>
-            <a:endParaRPr sz="2200">
-              <a:solidFill>
-                <a:srgbClr val="000000"/>
-              </a:solidFill>
-              <a:latin typeface="Calibri"/>
-              <a:ea typeface="Calibri"/>
-              <a:cs typeface="Calibri"/>
-              <a:sym typeface="Calibri"/>
-            </a:endParaRPr>
-          </a:p>
-          <a:p>
-            <a:pPr marL="0" lvl="0" indent="0" algn="l" rtl="0">
-              <a:spcBef>
-                <a:spcPts val="0"/>
-              </a:spcBef>
-              <a:spcAft>
-                <a:spcPts val="0"/>
-              </a:spcAft>
-              <a:buClr>
-                <a:srgbClr val="000000"/>
-              </a:buClr>
-              <a:buSzPts val="2500"/>
-              <a:buFont typeface="Arial"/>
-              <a:buNone/>
-            </a:pPr>
-            <a:r>
-              <a:rPr lang="en" sz="2200" b="1">
-                <a:solidFill>
-                  <a:srgbClr val="FF0000"/>
-                </a:solidFill>
-                <a:latin typeface="Calibri"/>
-                <a:ea typeface="Calibri"/>
-                <a:cs typeface="Calibri"/>
-                <a:sym typeface="Calibri"/>
-              </a:rPr>
-              <a:t>3. Please pause the video - and answer the pinned question in comments under the video</a:t>
-            </a:r>
-            <a:endParaRPr sz="1800" b="1" i="0" u="none" strike="noStrike" cap="none">
-              <a:solidFill>
-                <a:srgbClr val="FF0000"/>
-              </a:solidFill>
-              <a:latin typeface="Calibri"/>
-              <a:ea typeface="Calibri"/>
-              <a:cs typeface="Calibri"/>
-              <a:sym typeface="Calibri"/>
-            </a:endParaRPr>
-          </a:p>
-        </p:txBody>
-      </p:sp>
       <p:pic>
         <p:nvPicPr>
-          <p:cNvPr id="125" name="Google Shape;125;p21"/>
+          <p:cNvPr id="126" name="Google Shape;126;p21"/>
           <p:cNvPicPr preferRelativeResize="0"/>
           <p:nvPr/>
         </p:nvPicPr>
         <p:blipFill>
-          <a:blip r:embed="rId4" cstate="email">
+          <a:blip r:embed="rId3" cstate="email">
             <a:alphaModFix/>
             <a:extLst>
               <a:ext uri="{28A0092B-C50C-407E-A947-70E740481C1C}">
@@ -41112,12 +44906,12 @@
       </p:pic>
       <p:pic>
         <p:nvPicPr>
-          <p:cNvPr id="126" name="Google Shape;126;p21"/>
+          <p:cNvPr id="127" name="Google Shape;127;p21"/>
           <p:cNvPicPr preferRelativeResize="0"/>
           <p:nvPr/>
         </p:nvPicPr>
         <p:blipFill>
-          <a:blip r:embed="rId5" cstate="email">
+          <a:blip r:embed="rId4" cstate="email">
             <a:alphaModFix/>
             <a:extLst>
               <a:ext uri="{28A0092B-C50C-407E-A947-70E740481C1C}">
@@ -41149,6 +44943,340 @@
           </a:ln>
         </p:spPr>
       </p:pic>
+      <p:sp>
+        <p:nvSpPr>
+          <p:cNvPr id="128" name="Google Shape;128;p21"/>
+          <p:cNvSpPr txBox="1"/>
+          <p:nvPr/>
+        </p:nvSpPr>
+        <p:spPr>
+          <a:xfrm>
+            <a:off x="102375" y="725485"/>
+            <a:ext cx="4161900" cy="4186800"/>
+          </a:xfrm>
+          <a:prstGeom prst="rect">
+            <a:avLst/>
+          </a:prstGeom>
+          <a:solidFill>
+            <a:srgbClr val="FFF2CC"/>
+          </a:solidFill>
+          <a:ln w="9525" cap="flat" cmpd="sng">
+            <a:solidFill>
+              <a:srgbClr val="FF0000"/>
+            </a:solidFill>
+            <a:prstDash val="solid"/>
+            <a:round/>
+            <a:headEnd type="none" w="sm" len="sm"/>
+            <a:tailEnd type="none" w="sm" len="sm"/>
+          </a:ln>
+        </p:spPr>
+        <p:txBody>
+          <a:bodyPr spcFirstLastPara="1" wrap="square" lIns="91425" tIns="91425" rIns="91425" bIns="91425" anchor="t" anchorCtr="0">
+            <a:noAutofit/>
+          </a:bodyPr>
+          <a:lstStyle/>
+          <a:p>
+            <a:pPr marL="0" marR="0" lvl="0" indent="0" algn="l" rtl="0">
+              <a:lnSpc>
+                <a:spcPct val="100000"/>
+              </a:lnSpc>
+              <a:spcBef>
+                <a:spcPts val="0"/>
+              </a:spcBef>
+              <a:spcAft>
+                <a:spcPts val="0"/>
+              </a:spcAft>
+              <a:buClr>
+                <a:srgbClr val="000000"/>
+              </a:buClr>
+              <a:buSzPts val="2500"/>
+              <a:buFont typeface="Arial"/>
+              <a:buNone/>
+            </a:pPr>
+            <a:r>
+              <a:rPr lang="en" sz="2200">
+                <a:solidFill>
+                  <a:srgbClr val="000000"/>
+                </a:solidFill>
+                <a:latin typeface="Calibri"/>
+                <a:ea typeface="Calibri"/>
+                <a:cs typeface="Calibri"/>
+                <a:sym typeface="Calibri"/>
+              </a:rPr>
+              <a:t>Weekly videos every Friday</a:t>
+            </a:r>
+            <a:endParaRPr sz="2200">
+              <a:solidFill>
+                <a:srgbClr val="000000"/>
+              </a:solidFill>
+              <a:latin typeface="Calibri"/>
+              <a:ea typeface="Calibri"/>
+              <a:cs typeface="Calibri"/>
+              <a:sym typeface="Calibri"/>
+            </a:endParaRPr>
+          </a:p>
+          <a:p>
+            <a:pPr marL="0" lvl="0" indent="0" algn="l" rtl="0">
+              <a:spcBef>
+                <a:spcPts val="0"/>
+              </a:spcBef>
+              <a:spcAft>
+                <a:spcPts val="0"/>
+              </a:spcAft>
+              <a:buClr>
+                <a:srgbClr val="000000"/>
+              </a:buClr>
+              <a:buSzPts val="2500"/>
+              <a:buFont typeface="Arial"/>
+              <a:buNone/>
+            </a:pPr>
+            <a:r>
+              <a:rPr lang="en" sz="2200">
+                <a:latin typeface="Calibri"/>
+                <a:ea typeface="Calibri"/>
+                <a:cs typeface="Calibri"/>
+                <a:sym typeface="Calibri"/>
+              </a:rPr>
+              <a:t>7.52K subscribers, 339 videos</a:t>
+            </a:r>
+            <a:endParaRPr sz="2200">
+              <a:solidFill>
+                <a:srgbClr val="000000"/>
+              </a:solidFill>
+              <a:latin typeface="Calibri"/>
+              <a:ea typeface="Calibri"/>
+              <a:cs typeface="Calibri"/>
+              <a:sym typeface="Calibri"/>
+            </a:endParaRPr>
+          </a:p>
+          <a:p>
+            <a:pPr marL="0" marR="0" lvl="0" indent="0" algn="l" rtl="0">
+              <a:lnSpc>
+                <a:spcPct val="100000"/>
+              </a:lnSpc>
+              <a:spcBef>
+                <a:spcPts val="0"/>
+              </a:spcBef>
+              <a:spcAft>
+                <a:spcPts val="0"/>
+              </a:spcAft>
+              <a:buClr>
+                <a:srgbClr val="000000"/>
+              </a:buClr>
+              <a:buSzPts val="2500"/>
+              <a:buFont typeface="Arial"/>
+              <a:buNone/>
+            </a:pPr>
+            <a:endParaRPr sz="2200">
+              <a:solidFill>
+                <a:srgbClr val="000000"/>
+              </a:solidFill>
+              <a:latin typeface="Calibri"/>
+              <a:ea typeface="Calibri"/>
+              <a:cs typeface="Calibri"/>
+              <a:sym typeface="Calibri"/>
+            </a:endParaRPr>
+          </a:p>
+          <a:p>
+            <a:pPr marL="0" lvl="0" indent="0" algn="l" rtl="0">
+              <a:spcBef>
+                <a:spcPts val="0"/>
+              </a:spcBef>
+              <a:spcAft>
+                <a:spcPts val="0"/>
+              </a:spcAft>
+              <a:buClr>
+                <a:srgbClr val="000000"/>
+              </a:buClr>
+              <a:buSzPts val="2500"/>
+              <a:buFont typeface="Arial"/>
+              <a:buNone/>
+            </a:pPr>
+            <a:r>
+              <a:rPr lang="en" sz="2200">
+                <a:solidFill>
+                  <a:srgbClr val="000000"/>
+                </a:solidFill>
+                <a:latin typeface="Calibri"/>
+                <a:ea typeface="Calibri"/>
+                <a:cs typeface="Calibri"/>
+                <a:sym typeface="Calibri"/>
+              </a:rPr>
+              <a:t>1. Subscribe to this channel </a:t>
+            </a:r>
+            <a:r>
+              <a:rPr lang="en" sz="1800" b="1" u="sng">
+                <a:solidFill>
+                  <a:srgbClr val="0097A7"/>
+                </a:solidFill>
+                <a:latin typeface="Calibri"/>
+                <a:ea typeface="Calibri"/>
+                <a:cs typeface="Calibri"/>
+                <a:sym typeface="Calibri"/>
+                <a:hlinkClick r:id="rId5">
+                  <a:extLst>
+                    <a:ext uri="{A12FA001-AC4F-418D-AE19-62706E023703}">
+                      <ahyp:hlinkClr xmlns:ahyp="http://schemas.microsoft.com/office/drawing/2018/hyperlinkcolor" val="tx"/>
+                    </a:ext>
+                  </a:extLst>
+                </a:hlinkClick>
+              </a:rPr>
+              <a:t>https://www.youtube.com/@lev-selector</a:t>
+            </a:r>
+            <a:r>
+              <a:rPr lang="en" sz="1800" b="1">
+                <a:solidFill>
+                  <a:srgbClr val="000000"/>
+                </a:solidFill>
+                <a:latin typeface="Calibri"/>
+                <a:ea typeface="Calibri"/>
+                <a:cs typeface="Calibri"/>
+                <a:sym typeface="Calibri"/>
+              </a:rPr>
+              <a:t> </a:t>
+            </a:r>
+            <a:endParaRPr sz="1800" b="1">
+              <a:solidFill>
+                <a:srgbClr val="000000"/>
+              </a:solidFill>
+              <a:latin typeface="Calibri"/>
+              <a:ea typeface="Calibri"/>
+              <a:cs typeface="Calibri"/>
+              <a:sym typeface="Calibri"/>
+            </a:endParaRPr>
+          </a:p>
+          <a:p>
+            <a:pPr marL="0" marR="0" lvl="0" indent="0" algn="l" rtl="0">
+              <a:lnSpc>
+                <a:spcPct val="100000"/>
+              </a:lnSpc>
+              <a:spcBef>
+                <a:spcPts val="0"/>
+              </a:spcBef>
+              <a:spcAft>
+                <a:spcPts val="0"/>
+              </a:spcAft>
+              <a:buClr>
+                <a:srgbClr val="000000"/>
+              </a:buClr>
+              <a:buSzPts val="2500"/>
+              <a:buFont typeface="Arial"/>
+              <a:buNone/>
+            </a:pPr>
+            <a:endParaRPr sz="2200">
+              <a:solidFill>
+                <a:srgbClr val="000000"/>
+              </a:solidFill>
+              <a:latin typeface="Calibri"/>
+              <a:ea typeface="Calibri"/>
+              <a:cs typeface="Calibri"/>
+              <a:sym typeface="Calibri"/>
+            </a:endParaRPr>
+          </a:p>
+          <a:p>
+            <a:pPr marL="0" marR="0" lvl="0" indent="0" algn="l" rtl="0">
+              <a:lnSpc>
+                <a:spcPct val="100000"/>
+              </a:lnSpc>
+              <a:spcBef>
+                <a:spcPts val="0"/>
+              </a:spcBef>
+              <a:spcAft>
+                <a:spcPts val="0"/>
+              </a:spcAft>
+              <a:buClr>
+                <a:srgbClr val="000000"/>
+              </a:buClr>
+              <a:buSzPts val="2500"/>
+              <a:buFont typeface="Arial"/>
+              <a:buNone/>
+            </a:pPr>
+            <a:r>
+              <a:rPr lang="en" sz="2200">
+                <a:solidFill>
+                  <a:srgbClr val="000000"/>
+                </a:solidFill>
+                <a:latin typeface="Calibri"/>
+                <a:ea typeface="Calibri"/>
+                <a:cs typeface="Calibri"/>
+                <a:sym typeface="Calibri"/>
+              </a:rPr>
+              <a:t>2. Download slides from GitHub using links under the videos</a:t>
+            </a:r>
+            <a:endParaRPr sz="2200">
+              <a:solidFill>
+                <a:srgbClr val="000000"/>
+              </a:solidFill>
+              <a:latin typeface="Calibri"/>
+              <a:ea typeface="Calibri"/>
+              <a:cs typeface="Calibri"/>
+              <a:sym typeface="Calibri"/>
+            </a:endParaRPr>
+          </a:p>
+          <a:p>
+            <a:pPr marL="0" lvl="0" indent="0" algn="l" rtl="0">
+              <a:spcBef>
+                <a:spcPts val="0"/>
+              </a:spcBef>
+              <a:spcAft>
+                <a:spcPts val="0"/>
+              </a:spcAft>
+              <a:buClr>
+                <a:srgbClr val="000000"/>
+              </a:buClr>
+              <a:buSzPts val="2500"/>
+              <a:buFont typeface="Arial"/>
+              <a:buNone/>
+            </a:pPr>
+            <a:endParaRPr sz="2200">
+              <a:solidFill>
+                <a:srgbClr val="000000"/>
+              </a:solidFill>
+              <a:latin typeface="Calibri"/>
+              <a:ea typeface="Calibri"/>
+              <a:cs typeface="Calibri"/>
+              <a:sym typeface="Calibri"/>
+            </a:endParaRPr>
+          </a:p>
+          <a:p>
+            <a:pPr marL="0" lvl="0" indent="0" algn="l" rtl="0">
+              <a:spcBef>
+                <a:spcPts val="0"/>
+              </a:spcBef>
+              <a:spcAft>
+                <a:spcPts val="0"/>
+              </a:spcAft>
+              <a:buClr>
+                <a:srgbClr val="000000"/>
+              </a:buClr>
+              <a:buSzPts val="2500"/>
+              <a:buFont typeface="Arial"/>
+              <a:buNone/>
+            </a:pPr>
+            <a:r>
+              <a:rPr lang="en" sz="2200" b="1">
+                <a:solidFill>
+                  <a:srgbClr val="FF0000"/>
+                </a:solidFill>
+                <a:latin typeface="Calibri"/>
+                <a:ea typeface="Calibri"/>
+                <a:cs typeface="Calibri"/>
+                <a:sym typeface="Calibri"/>
+              </a:rPr>
+              <a:t>3. Please pause the video - and answer the pinned question in comments under the video</a:t>
+            </a:r>
+            <a:endParaRPr sz="1800" b="1" i="0" u="none" strike="noStrike" cap="none">
+              <a:solidFill>
+                <a:srgbClr val="FF0000"/>
+              </a:solidFill>
+              <a:latin typeface="Calibri"/>
+              <a:ea typeface="Calibri"/>
+              <a:cs typeface="Calibri"/>
+              <a:sym typeface="Calibri"/>
+            </a:endParaRPr>
+          </a:p>
+        </p:txBody>
+      </p:sp>
     </p:spTree>
   </p:cSld>
   <p:clrMapOvr>
